--- a/docs/content/05-teaching-resources/slides/specialism/06-materials-standard-parts-and-processes.pptx
+++ b/docs/content/05-teaching-resources/slides/specialism/06-materials-standard-parts-and-processes.pptx
@@ -8,12 +8,16 @@
     <p:sldId id="256" r:id="rId7"/>
     <p:sldId id="257" r:id="rId8"/>
     <p:sldId id="258" r:id="rId9"/>
-    <p:sldId id="259" r:id="rId11"/>
+    <p:sldId id="259" r:id="rId10"/>
     <p:sldId id="260" r:id="rId12"/>
     <p:sldId id="261" r:id="rId13"/>
     <p:sldId id="262" r:id="rId14"/>
     <p:sldId id="263" r:id="rId15"/>
     <p:sldId id="264" r:id="rId16"/>
+    <p:sldId id="265" r:id="rId17"/>
+    <p:sldId id="266" r:id="rId18"/>
+    <p:sldId id="267" r:id="rId19"/>
+    <p:sldId id="268" r:id="rId20"/>
   </p:sldIdLst>
   <p:sldSz cx="12191695" cy="6858000" type="screen4x3"/>
   <p:notesSz cx="6858000" cy="9144000"/>
@@ -580,7 +584,22 @@
           <a:lstStyle/>
           <a:p>
             <a:r>
-              <a:t>Give students a few minutes to answer on mini whiteboards or paper, then reveal the answers on the next slide.</a:t>
+              <a:t>Answers:</a:t>
+            </a:r>
+          </a:p>
+          <a:p>
+            <a:r>
+              <a:t>1. Designing a part stronger than its expected load.</a:t>
+            </a:r>
+          </a:p>
+          <a:p>
+            <a:r>
+              <a:t>2. When failure is dangerous or loads are uncertain.</a:t>
+            </a:r>
+          </a:p>
+          <a:p>
+            <a:r>
+              <a:t>3. E.g. fitness for purpose, availability, risk.</a:t>
             </a:r>
           </a:p>
         </p:txBody>
@@ -650,7 +669,22 @@
           <a:lstStyle/>
           <a:p>
             <a:r>
-              <a:t>Talk through any answers the class found difficult.</a:t>
+              <a:t>Answers:</a:t>
+            </a:r>
+          </a:p>
+          <a:p>
+            <a:r>
+              <a:t>1. TIG.</a:t>
+            </a:r>
+          </a:p>
+          <a:p>
+            <a:r>
+              <a:t>2. Tooling is expensive.</a:t>
+            </a:r>
+          </a:p>
+          <a:p>
+            <a:r>
+              <a:t>3. Ductility.</a:t>
             </a:r>
           </a:p>
         </p:txBody>
@@ -676,6 +710,146 @@
 </file>
 
 <file path=ppt/notesSlides/notesSlide4.xml><?xml version="1.0" encoding="utf-8"?>
+<p:notes xmlns:a="http://schemas.openxmlformats.org/drawingml/2006/main" xmlns:p="http://schemas.openxmlformats.org/presentationml/2006/main" xmlns:r="http://schemas.openxmlformats.org/officeDocument/2006/relationships">
+  <p:cSld>
+    <p:spTree>
+      <p:nvGrpSpPr>
+        <p:cNvPr id="1" name=""/>
+        <p:cNvGrpSpPr/>
+        <p:nvPr/>
+      </p:nvGrpSpPr>
+      <p:grpSpPr>
+        <a:xfrm>
+          <a:off x="0" y="0"/>
+          <a:ext cx="0" cy="0"/>
+          <a:chOff x="0" y="0"/>
+          <a:chExt cx="0" cy="0"/>
+        </a:xfrm>
+      </p:grpSpPr>
+      <p:sp>
+        <p:nvSpPr>
+          <p:cNvPr id="2" name="Slide Image Placeholder 1"/>
+          <p:cNvSpPr>
+            <a:spLocks noGrp="1"/>
+          </p:cNvSpPr>
+          <p:nvPr>
+            <p:ph type="sldImg" idx="2"/>
+          </p:nvPr>
+        </p:nvSpPr>
+        <p:spPr/>
+      </p:sp>
+      <p:sp>
+        <p:nvSpPr>
+          <p:cNvPr id="3" name="Notes Placeholder 2"/>
+          <p:cNvSpPr>
+            <a:spLocks noGrp="1"/>
+          </p:cNvSpPr>
+          <p:nvPr>
+            <p:ph type="body" idx="3" sz="quarter"/>
+          </p:nvPr>
+        </p:nvSpPr>
+        <p:spPr/>
+        <p:txBody>
+          <a:bodyPr/>
+          <a:lstStyle/>
+          <a:p>
+            <a:r>
+              <a:t>Give students a few minutes to answer on mini whiteboards or paper, then reveal the answers on the next slide.</a:t>
+            </a:r>
+          </a:p>
+        </p:txBody>
+      </p:sp>
+      <p:sp>
+        <p:nvSpPr>
+          <p:cNvPr id="4" name="Slide Number Placeholder 3"/>
+          <p:cNvSpPr>
+            <a:spLocks noGrp="1"/>
+          </p:cNvSpPr>
+          <p:nvPr>
+            <p:ph type="sldNum" idx="5" sz="quarter"/>
+          </p:nvPr>
+        </p:nvSpPr>
+        <p:spPr/>
+      </p:sp>
+    </p:spTree>
+  </p:cSld>
+  <p:clrMapOvr>
+    <a:masterClrMapping/>
+  </p:clrMapOvr>
+</p:notes>
+</file>
+
+<file path=ppt/notesSlides/notesSlide5.xml><?xml version="1.0" encoding="utf-8"?>
+<p:notes xmlns:a="http://schemas.openxmlformats.org/drawingml/2006/main" xmlns:p="http://schemas.openxmlformats.org/presentationml/2006/main" xmlns:r="http://schemas.openxmlformats.org/officeDocument/2006/relationships">
+  <p:cSld>
+    <p:spTree>
+      <p:nvGrpSpPr>
+        <p:cNvPr id="1" name=""/>
+        <p:cNvGrpSpPr/>
+        <p:nvPr/>
+      </p:nvGrpSpPr>
+      <p:grpSpPr>
+        <a:xfrm>
+          <a:off x="0" y="0"/>
+          <a:ext cx="0" cy="0"/>
+          <a:chOff x="0" y="0"/>
+          <a:chExt cx="0" cy="0"/>
+        </a:xfrm>
+      </p:grpSpPr>
+      <p:sp>
+        <p:nvSpPr>
+          <p:cNvPr id="2" name="Slide Image Placeholder 1"/>
+          <p:cNvSpPr>
+            <a:spLocks noGrp="1"/>
+          </p:cNvSpPr>
+          <p:nvPr>
+            <p:ph type="sldImg" idx="2"/>
+          </p:nvPr>
+        </p:nvSpPr>
+        <p:spPr/>
+      </p:sp>
+      <p:sp>
+        <p:nvSpPr>
+          <p:cNvPr id="3" name="Notes Placeholder 2"/>
+          <p:cNvSpPr>
+            <a:spLocks noGrp="1"/>
+          </p:cNvSpPr>
+          <p:nvPr>
+            <p:ph type="body" idx="3" sz="quarter"/>
+          </p:nvPr>
+        </p:nvSpPr>
+        <p:spPr/>
+        <p:txBody>
+          <a:bodyPr/>
+          <a:lstStyle/>
+          <a:p>
+            <a:r>
+              <a:t>Talk through any answers the class found difficult.</a:t>
+            </a:r>
+          </a:p>
+        </p:txBody>
+      </p:sp>
+      <p:sp>
+        <p:nvSpPr>
+          <p:cNvPr id="4" name="Slide Number Placeholder 3"/>
+          <p:cNvSpPr>
+            <a:spLocks noGrp="1"/>
+          </p:cNvSpPr>
+          <p:nvPr>
+            <p:ph type="sldNum" idx="5" sz="quarter"/>
+          </p:nvPr>
+        </p:nvSpPr>
+        <p:spPr/>
+      </p:sp>
+    </p:spTree>
+  </p:cSld>
+  <p:clrMapOvr>
+    <a:masterClrMapping/>
+  </p:clrMapOvr>
+</p:notes>
+</file>
+
+<file path=ppt/notesSlides/notesSlide6.xml><?xml version="1.0" encoding="utf-8"?>
 <p:notes xmlns:a="http://schemas.openxmlformats.org/drawingml/2006/main" xmlns:p="http://schemas.openxmlformats.org/presentationml/2006/main" xmlns:r="http://schemas.openxmlformats.org/officeDocument/2006/relationships">
   <p:cSld>
     <p:spTree>
@@ -4045,6 +4219,2355 @@
 </p:sld>
 </file>
 
+<file path=ppt/slides/slide10.xml><?xml version="1.0" encoding="utf-8"?>
+<p:sld xmlns:a="http://schemas.openxmlformats.org/drawingml/2006/main" xmlns:p="http://schemas.openxmlformats.org/presentationml/2006/main" xmlns:r="http://schemas.openxmlformats.org/officeDocument/2006/relationships">
+  <p:cSld>
+    <p:bg>
+      <p:bgPr>
+        <a:solidFill>
+          <a:srgbClr val="FFFFFF"/>
+        </a:solidFill>
+        <a:effectLst/>
+      </p:bgPr>
+    </p:bg>
+    <p:spTree>
+      <p:nvGrpSpPr>
+        <p:cNvPr id="1" name=""/>
+        <p:cNvGrpSpPr/>
+        <p:nvPr/>
+      </p:nvGrpSpPr>
+      <p:grpSpPr/>
+      <p:sp>
+        <p:nvSpPr>
+          <p:cNvPr id="2" name="TextBox 1"/>
+          <p:cNvSpPr txBox="1"/>
+          <p:nvPr/>
+        </p:nvSpPr>
+        <p:spPr>
+          <a:xfrm>
+            <a:off x="548640" y="320040"/>
+            <a:ext cx="11094415" cy="274320"/>
+          </a:xfrm>
+          <a:prstGeom prst="rect">
+            <a:avLst/>
+          </a:prstGeom>
+          <a:noFill/>
+        </p:spPr>
+        <p:txBody>
+          <a:bodyPr wrap="square" anchor="t" lIns="0" rIns="0" tIns="0" bIns="0"/>
+          <a:lstStyle/>
+          <a:p>
+            <a:pPr algn="l"/>
+            <a:r>
+              <a:rPr sz="1100" b="1" i="0">
+                <a:solidFill>
+                  <a:srgbClr val="54595D"/>
+                </a:solidFill>
+                <a:latin typeface="Calibri"/>
+              </a:rPr>
+              <a:t>MECHANICAL ENGINEERING  ·  Mechanical: Knowledge criteria</a:t>
+            </a:r>
+          </a:p>
+        </p:txBody>
+      </p:sp>
+      <p:sp>
+        <p:nvSpPr>
+          <p:cNvPr id="3" name="TextBox 2"/>
+          <p:cNvSpPr txBox="1"/>
+          <p:nvPr/>
+        </p:nvSpPr>
+        <p:spPr>
+          <a:xfrm>
+            <a:off x="548640" y="566928"/>
+            <a:ext cx="11094415" cy="822960"/>
+          </a:xfrm>
+          <a:prstGeom prst="rect">
+            <a:avLst/>
+          </a:prstGeom>
+          <a:noFill/>
+        </p:spPr>
+        <p:txBody>
+          <a:bodyPr wrap="square" anchor="ctr" lIns="0" rIns="0" tIns="0" bIns="0"/>
+          <a:lstStyle/>
+          <a:p>
+            <a:pPr algn="l"/>
+            <a:r>
+              <a:rPr sz="3200" b="1" i="0">
+                <a:solidFill>
+                  <a:srgbClr val="03306E"/>
+                </a:solidFill>
+                <a:latin typeface="Cambria"/>
+              </a:rPr>
+              <a:t>Check your understanding</a:t>
+            </a:r>
+          </a:p>
+        </p:txBody>
+      </p:sp>
+      <p:sp>
+        <p:nvSpPr>
+          <p:cNvPr id="4" name="TextBox 3"/>
+          <p:cNvSpPr txBox="1"/>
+          <p:nvPr/>
+        </p:nvSpPr>
+        <p:spPr>
+          <a:xfrm>
+            <a:off x="548640" y="6446520"/>
+            <a:ext cx="8229600" cy="274320"/>
+          </a:xfrm>
+          <a:prstGeom prst="rect">
+            <a:avLst/>
+          </a:prstGeom>
+          <a:noFill/>
+        </p:spPr>
+        <p:txBody>
+          <a:bodyPr wrap="square" anchor="t" lIns="0" rIns="0" tIns="0" bIns="0"/>
+          <a:lstStyle/>
+          <a:p>
+            <a:pPr algn="l"/>
+            <a:r>
+              <a:rPr sz="1000" b="0" i="0">
+                <a:solidFill>
+                  <a:srgbClr val="54595D"/>
+                </a:solidFill>
+                <a:latin typeface="Calibri"/>
+              </a:rPr>
+              <a:t>Design and Development for Engineering and Manufacturing T Level  ·  Materials, Standard Parts and Manufacturing Processes</a:t>
+            </a:r>
+          </a:p>
+        </p:txBody>
+      </p:sp>
+      <p:sp>
+        <p:nvSpPr>
+          <p:cNvPr id="5" name="TextBox 4"/>
+          <p:cNvSpPr txBox="1"/>
+          <p:nvPr/>
+        </p:nvSpPr>
+        <p:spPr>
+          <a:xfrm>
+            <a:off x="10728655" y="6446520"/>
+            <a:ext cx="914400" cy="274320"/>
+          </a:xfrm>
+          <a:prstGeom prst="rect">
+            <a:avLst/>
+          </a:prstGeom>
+          <a:noFill/>
+        </p:spPr>
+        <p:txBody>
+          <a:bodyPr wrap="square" anchor="t" lIns="0" rIns="0" tIns="0" bIns="0"/>
+          <a:lstStyle/>
+          <a:p>
+            <a:pPr algn="r"/>
+            <a:r>
+              <a:rPr sz="1000" b="0" i="0">
+                <a:solidFill>
+                  <a:srgbClr val="54595D"/>
+                </a:solidFill>
+                <a:latin typeface="Calibri"/>
+              </a:rPr>
+              <a:t>10</a:t>
+            </a:r>
+          </a:p>
+        </p:txBody>
+      </p:sp>
+      <p:sp>
+        <p:nvSpPr>
+          <p:cNvPr id="6" name="Oval 5"/>
+          <p:cNvSpPr/>
+          <p:nvPr/>
+        </p:nvSpPr>
+        <p:spPr>
+          <a:xfrm>
+            <a:off x="548640" y="1618488"/>
+            <a:ext cx="411480" cy="411480"/>
+          </a:xfrm>
+          <a:prstGeom prst="ellipse">
+            <a:avLst/>
+          </a:prstGeom>
+          <a:solidFill>
+            <a:srgbClr val="E0463A"/>
+          </a:solidFill>
+          <a:ln>
+            <a:noFill/>
+          </a:ln>
+          <a:effectLst/>
+        </p:spPr>
+        <p:style>
+          <a:lnRef idx="1">
+            <a:schemeClr val="accent1"/>
+          </a:lnRef>
+          <a:fillRef idx="3">
+            <a:schemeClr val="accent1"/>
+          </a:fillRef>
+          <a:effectRef idx="2">
+            <a:schemeClr val="accent1"/>
+          </a:effectRef>
+          <a:fontRef idx="minor">
+            <a:schemeClr val="lt1"/>
+          </a:fontRef>
+        </p:style>
+        <p:txBody>
+          <a:bodyPr rtlCol="0" anchor="ctr" lIns="0" rIns="0" tIns="0" bIns="0"/>
+          <a:lstStyle/>
+          <a:p>
+            <a:pPr algn="ctr"/>
+            <a:r>
+              <a:rPr sz="1400" b="1">
+                <a:solidFill>
+                  <a:srgbClr val="FFFFFF"/>
+                </a:solidFill>
+                <a:latin typeface="Calibri"/>
+              </a:rPr>
+              <a:t>1</a:t>
+            </a:r>
+          </a:p>
+        </p:txBody>
+      </p:sp>
+      <p:sp>
+        <p:nvSpPr>
+          <p:cNvPr id="7" name="TextBox 6"/>
+          <p:cNvSpPr txBox="1"/>
+          <p:nvPr/>
+        </p:nvSpPr>
+        <p:spPr>
+          <a:xfrm>
+            <a:off x="1234440" y="1600200"/>
+            <a:ext cx="10408615" cy="1030986"/>
+          </a:xfrm>
+          <a:prstGeom prst="rect">
+            <a:avLst/>
+          </a:prstGeom>
+          <a:noFill/>
+        </p:spPr>
+        <p:txBody>
+          <a:bodyPr wrap="square" anchor="t" lIns="0" rIns="0" tIns="0" bIns="0"/>
+          <a:lstStyle/>
+          <a:p>
+            <a:pPr algn="l"/>
+            <a:r>
+              <a:rPr sz="2200" b="0" i="0">
+                <a:solidFill>
+                  <a:srgbClr val="202122"/>
+                </a:solidFill>
+                <a:latin typeface="Calibri"/>
+              </a:rPr>
+              <a:t>What is a factor of safety?</a:t>
+            </a:r>
+          </a:p>
+        </p:txBody>
+      </p:sp>
+      <p:sp>
+        <p:nvSpPr>
+          <p:cNvPr id="8" name="Oval 7"/>
+          <p:cNvSpPr/>
+          <p:nvPr/>
+        </p:nvSpPr>
+        <p:spPr>
+          <a:xfrm>
+            <a:off x="548640" y="2814066"/>
+            <a:ext cx="411480" cy="411480"/>
+          </a:xfrm>
+          <a:prstGeom prst="ellipse">
+            <a:avLst/>
+          </a:prstGeom>
+          <a:solidFill>
+            <a:srgbClr val="E0463A"/>
+          </a:solidFill>
+          <a:ln>
+            <a:noFill/>
+          </a:ln>
+          <a:effectLst/>
+        </p:spPr>
+        <p:style>
+          <a:lnRef idx="1">
+            <a:schemeClr val="accent1"/>
+          </a:lnRef>
+          <a:fillRef idx="3">
+            <a:schemeClr val="accent1"/>
+          </a:fillRef>
+          <a:effectRef idx="2">
+            <a:schemeClr val="accent1"/>
+          </a:effectRef>
+          <a:fontRef idx="minor">
+            <a:schemeClr val="lt1"/>
+          </a:fontRef>
+        </p:style>
+        <p:txBody>
+          <a:bodyPr rtlCol="0" anchor="ctr" lIns="0" rIns="0" tIns="0" bIns="0"/>
+          <a:lstStyle/>
+          <a:p>
+            <a:pPr algn="ctr"/>
+            <a:r>
+              <a:rPr sz="1400" b="1">
+                <a:solidFill>
+                  <a:srgbClr val="FFFFFF"/>
+                </a:solidFill>
+                <a:latin typeface="Calibri"/>
+              </a:rPr>
+              <a:t>2</a:t>
+            </a:r>
+          </a:p>
+        </p:txBody>
+      </p:sp>
+      <p:sp>
+        <p:nvSpPr>
+          <p:cNvPr id="9" name="TextBox 8"/>
+          <p:cNvSpPr txBox="1"/>
+          <p:nvPr/>
+        </p:nvSpPr>
+        <p:spPr>
+          <a:xfrm>
+            <a:off x="1234440" y="2795778"/>
+            <a:ext cx="10408615" cy="1030986"/>
+          </a:xfrm>
+          <a:prstGeom prst="rect">
+            <a:avLst/>
+          </a:prstGeom>
+          <a:noFill/>
+        </p:spPr>
+        <p:txBody>
+          <a:bodyPr wrap="square" anchor="t" lIns="0" rIns="0" tIns="0" bIns="0"/>
+          <a:lstStyle/>
+          <a:p>
+            <a:pPr algn="l"/>
+            <a:r>
+              <a:rPr sz="2200" b="0" i="0">
+                <a:solidFill>
+                  <a:srgbClr val="202122"/>
+                </a:solidFill>
+                <a:latin typeface="Calibri"/>
+              </a:rPr>
+              <a:t>Why use standard parts?</a:t>
+            </a:r>
+          </a:p>
+        </p:txBody>
+      </p:sp>
+      <p:sp>
+        <p:nvSpPr>
+          <p:cNvPr id="10" name="Oval 9"/>
+          <p:cNvSpPr/>
+          <p:nvPr/>
+        </p:nvSpPr>
+        <p:spPr>
+          <a:xfrm>
+            <a:off x="548640" y="4009644"/>
+            <a:ext cx="411480" cy="411480"/>
+          </a:xfrm>
+          <a:prstGeom prst="ellipse">
+            <a:avLst/>
+          </a:prstGeom>
+          <a:solidFill>
+            <a:srgbClr val="E0463A"/>
+          </a:solidFill>
+          <a:ln>
+            <a:noFill/>
+          </a:ln>
+          <a:effectLst/>
+        </p:spPr>
+        <p:style>
+          <a:lnRef idx="1">
+            <a:schemeClr val="accent1"/>
+          </a:lnRef>
+          <a:fillRef idx="3">
+            <a:schemeClr val="accent1"/>
+          </a:fillRef>
+          <a:effectRef idx="2">
+            <a:schemeClr val="accent1"/>
+          </a:effectRef>
+          <a:fontRef idx="minor">
+            <a:schemeClr val="lt1"/>
+          </a:fontRef>
+        </p:style>
+        <p:txBody>
+          <a:bodyPr rtlCol="0" anchor="ctr" lIns="0" rIns="0" tIns="0" bIns="0"/>
+          <a:lstStyle/>
+          <a:p>
+            <a:pPr algn="ctr"/>
+            <a:r>
+              <a:rPr sz="1400" b="1">
+                <a:solidFill>
+                  <a:srgbClr val="FFFFFF"/>
+                </a:solidFill>
+                <a:latin typeface="Calibri"/>
+              </a:rPr>
+              <a:t>3</a:t>
+            </a:r>
+          </a:p>
+        </p:txBody>
+      </p:sp>
+      <p:sp>
+        <p:nvSpPr>
+          <p:cNvPr id="11" name="TextBox 10"/>
+          <p:cNvSpPr txBox="1"/>
+          <p:nvPr/>
+        </p:nvSpPr>
+        <p:spPr>
+          <a:xfrm>
+            <a:off x="1234440" y="3991356"/>
+            <a:ext cx="10408615" cy="1030986"/>
+          </a:xfrm>
+          <a:prstGeom prst="rect">
+            <a:avLst/>
+          </a:prstGeom>
+          <a:noFill/>
+        </p:spPr>
+        <p:txBody>
+          <a:bodyPr wrap="square" anchor="t" lIns="0" rIns="0" tIns="0" bIns="0"/>
+          <a:lstStyle/>
+          <a:p>
+            <a:pPr algn="l"/>
+            <a:r>
+              <a:rPr sz="2200" b="0" i="0">
+                <a:solidFill>
+                  <a:srgbClr val="202122"/>
+                </a:solidFill>
+                <a:latin typeface="Calibri"/>
+              </a:rPr>
+              <a:t>Which welding process suits thin stainless steel with a neat finish?</a:t>
+            </a:r>
+          </a:p>
+        </p:txBody>
+      </p:sp>
+      <p:sp>
+        <p:nvSpPr>
+          <p:cNvPr id="12" name="Oval 11"/>
+          <p:cNvSpPr/>
+          <p:nvPr/>
+        </p:nvSpPr>
+        <p:spPr>
+          <a:xfrm>
+            <a:off x="548640" y="5205221"/>
+            <a:ext cx="411480" cy="411480"/>
+          </a:xfrm>
+          <a:prstGeom prst="ellipse">
+            <a:avLst/>
+          </a:prstGeom>
+          <a:solidFill>
+            <a:srgbClr val="E0463A"/>
+          </a:solidFill>
+          <a:ln>
+            <a:noFill/>
+          </a:ln>
+          <a:effectLst/>
+        </p:spPr>
+        <p:style>
+          <a:lnRef idx="1">
+            <a:schemeClr val="accent1"/>
+          </a:lnRef>
+          <a:fillRef idx="3">
+            <a:schemeClr val="accent1"/>
+          </a:fillRef>
+          <a:effectRef idx="2">
+            <a:schemeClr val="accent1"/>
+          </a:effectRef>
+          <a:fontRef idx="minor">
+            <a:schemeClr val="lt1"/>
+          </a:fontRef>
+        </p:style>
+        <p:txBody>
+          <a:bodyPr rtlCol="0" anchor="ctr" lIns="0" rIns="0" tIns="0" bIns="0"/>
+          <a:lstStyle/>
+          <a:p>
+            <a:pPr algn="ctr"/>
+            <a:r>
+              <a:rPr sz="1400" b="1">
+                <a:solidFill>
+                  <a:srgbClr val="FFFFFF"/>
+                </a:solidFill>
+                <a:latin typeface="Calibri"/>
+              </a:rPr>
+              <a:t>4</a:t>
+            </a:r>
+          </a:p>
+        </p:txBody>
+      </p:sp>
+      <p:sp>
+        <p:nvSpPr>
+          <p:cNvPr id="13" name="TextBox 12"/>
+          <p:cNvSpPr txBox="1"/>
+          <p:nvPr/>
+        </p:nvSpPr>
+        <p:spPr>
+          <a:xfrm>
+            <a:off x="1234440" y="5186933"/>
+            <a:ext cx="10408615" cy="1030986"/>
+          </a:xfrm>
+          <a:prstGeom prst="rect">
+            <a:avLst/>
+          </a:prstGeom>
+          <a:noFill/>
+        </p:spPr>
+        <p:txBody>
+          <a:bodyPr wrap="square" anchor="t" lIns="0" rIns="0" tIns="0" bIns="0"/>
+          <a:lstStyle/>
+          <a:p>
+            <a:pPr algn="l"/>
+            <a:r>
+              <a:rPr sz="2200" b="0" i="0">
+                <a:solidFill>
+                  <a:srgbClr val="202122"/>
+                </a:solidFill>
+                <a:latin typeface="Calibri"/>
+              </a:rPr>
+              <a:t>Why do tolerances matter for assembly?</a:t>
+            </a:r>
+          </a:p>
+        </p:txBody>
+      </p:sp>
+    </p:spTree>
+  </p:cSld>
+  <p:clrMapOvr>
+    <a:masterClrMapping/>
+  </p:clrMapOvr>
+</p:sld>
+</file>
+
+<file path=ppt/slides/slide11.xml><?xml version="1.0" encoding="utf-8"?>
+<p:sld xmlns:a="http://schemas.openxmlformats.org/drawingml/2006/main" xmlns:p="http://schemas.openxmlformats.org/presentationml/2006/main" xmlns:r="http://schemas.openxmlformats.org/officeDocument/2006/relationships">
+  <p:cSld>
+    <p:bg>
+      <p:bgPr>
+        <a:solidFill>
+          <a:srgbClr val="FFFFFF"/>
+        </a:solidFill>
+        <a:effectLst/>
+      </p:bgPr>
+    </p:bg>
+    <p:spTree>
+      <p:nvGrpSpPr>
+        <p:cNvPr id="1" name=""/>
+        <p:cNvGrpSpPr/>
+        <p:nvPr/>
+      </p:nvGrpSpPr>
+      <p:grpSpPr/>
+      <p:sp>
+        <p:nvSpPr>
+          <p:cNvPr id="2" name="TextBox 1"/>
+          <p:cNvSpPr txBox="1"/>
+          <p:nvPr/>
+        </p:nvSpPr>
+        <p:spPr>
+          <a:xfrm>
+            <a:off x="548640" y="320040"/>
+            <a:ext cx="11094415" cy="274320"/>
+          </a:xfrm>
+          <a:prstGeom prst="rect">
+            <a:avLst/>
+          </a:prstGeom>
+          <a:noFill/>
+        </p:spPr>
+        <p:txBody>
+          <a:bodyPr wrap="square" anchor="t" lIns="0" rIns="0" tIns="0" bIns="0"/>
+          <a:lstStyle/>
+          <a:p>
+            <a:pPr algn="l"/>
+            <a:r>
+              <a:rPr sz="1100" b="1" i="0">
+                <a:solidFill>
+                  <a:srgbClr val="54595D"/>
+                </a:solidFill>
+                <a:latin typeface="Calibri"/>
+              </a:rPr>
+              <a:t>MECHANICAL ENGINEERING  ·  Mechanical: Knowledge criteria</a:t>
+            </a:r>
+          </a:p>
+        </p:txBody>
+      </p:sp>
+      <p:sp>
+        <p:nvSpPr>
+          <p:cNvPr id="3" name="TextBox 2"/>
+          <p:cNvSpPr txBox="1"/>
+          <p:nvPr/>
+        </p:nvSpPr>
+        <p:spPr>
+          <a:xfrm>
+            <a:off x="548640" y="566928"/>
+            <a:ext cx="11094415" cy="822960"/>
+          </a:xfrm>
+          <a:prstGeom prst="rect">
+            <a:avLst/>
+          </a:prstGeom>
+          <a:noFill/>
+        </p:spPr>
+        <p:txBody>
+          <a:bodyPr wrap="square" anchor="ctr" lIns="0" rIns="0" tIns="0" bIns="0"/>
+          <a:lstStyle/>
+          <a:p>
+            <a:pPr algn="l"/>
+            <a:r>
+              <a:rPr sz="3200" b="1" i="0">
+                <a:solidFill>
+                  <a:srgbClr val="03306E"/>
+                </a:solidFill>
+                <a:latin typeface="Cambria"/>
+              </a:rPr>
+              <a:t>Answers</a:t>
+            </a:r>
+          </a:p>
+        </p:txBody>
+      </p:sp>
+      <p:sp>
+        <p:nvSpPr>
+          <p:cNvPr id="4" name="TextBox 3"/>
+          <p:cNvSpPr txBox="1"/>
+          <p:nvPr/>
+        </p:nvSpPr>
+        <p:spPr>
+          <a:xfrm>
+            <a:off x="548640" y="6446520"/>
+            <a:ext cx="8229600" cy="274320"/>
+          </a:xfrm>
+          <a:prstGeom prst="rect">
+            <a:avLst/>
+          </a:prstGeom>
+          <a:noFill/>
+        </p:spPr>
+        <p:txBody>
+          <a:bodyPr wrap="square" anchor="t" lIns="0" rIns="0" tIns="0" bIns="0"/>
+          <a:lstStyle/>
+          <a:p>
+            <a:pPr algn="l"/>
+            <a:r>
+              <a:rPr sz="1000" b="0" i="0">
+                <a:solidFill>
+                  <a:srgbClr val="54595D"/>
+                </a:solidFill>
+                <a:latin typeface="Calibri"/>
+              </a:rPr>
+              <a:t>Design and Development for Engineering and Manufacturing T Level  ·  Materials, Standard Parts and Manufacturing Processes</a:t>
+            </a:r>
+          </a:p>
+        </p:txBody>
+      </p:sp>
+      <p:sp>
+        <p:nvSpPr>
+          <p:cNvPr id="5" name="TextBox 4"/>
+          <p:cNvSpPr txBox="1"/>
+          <p:nvPr/>
+        </p:nvSpPr>
+        <p:spPr>
+          <a:xfrm>
+            <a:off x="10728655" y="6446520"/>
+            <a:ext cx="914400" cy="274320"/>
+          </a:xfrm>
+          <a:prstGeom prst="rect">
+            <a:avLst/>
+          </a:prstGeom>
+          <a:noFill/>
+        </p:spPr>
+        <p:txBody>
+          <a:bodyPr wrap="square" anchor="t" lIns="0" rIns="0" tIns="0" bIns="0"/>
+          <a:lstStyle/>
+          <a:p>
+            <a:pPr algn="r"/>
+            <a:r>
+              <a:rPr sz="1000" b="0" i="0">
+                <a:solidFill>
+                  <a:srgbClr val="54595D"/>
+                </a:solidFill>
+                <a:latin typeface="Calibri"/>
+              </a:rPr>
+              <a:t>11</a:t>
+            </a:r>
+          </a:p>
+        </p:txBody>
+      </p:sp>
+      <p:sp>
+        <p:nvSpPr>
+          <p:cNvPr id="6" name="Oval 5"/>
+          <p:cNvSpPr/>
+          <p:nvPr/>
+        </p:nvSpPr>
+        <p:spPr>
+          <a:xfrm>
+            <a:off x="548640" y="1618488"/>
+            <a:ext cx="411480" cy="411480"/>
+          </a:xfrm>
+          <a:prstGeom prst="ellipse">
+            <a:avLst/>
+          </a:prstGeom>
+          <a:solidFill>
+            <a:srgbClr val="E0463A"/>
+          </a:solidFill>
+          <a:ln>
+            <a:noFill/>
+          </a:ln>
+          <a:effectLst/>
+        </p:spPr>
+        <p:style>
+          <a:lnRef idx="1">
+            <a:schemeClr val="accent1"/>
+          </a:lnRef>
+          <a:fillRef idx="3">
+            <a:schemeClr val="accent1"/>
+          </a:fillRef>
+          <a:effectRef idx="2">
+            <a:schemeClr val="accent1"/>
+          </a:effectRef>
+          <a:fontRef idx="minor">
+            <a:schemeClr val="lt1"/>
+          </a:fontRef>
+        </p:style>
+        <p:txBody>
+          <a:bodyPr rtlCol="0" anchor="ctr" lIns="0" rIns="0" tIns="0" bIns="0"/>
+          <a:lstStyle/>
+          <a:p>
+            <a:pPr algn="ctr"/>
+            <a:r>
+              <a:rPr sz="1400" b="1">
+                <a:solidFill>
+                  <a:srgbClr val="FFFFFF"/>
+                </a:solidFill>
+                <a:latin typeface="Calibri"/>
+              </a:rPr>
+              <a:t>1</a:t>
+            </a:r>
+          </a:p>
+        </p:txBody>
+      </p:sp>
+      <p:sp>
+        <p:nvSpPr>
+          <p:cNvPr id="7" name="TextBox 6"/>
+          <p:cNvSpPr txBox="1"/>
+          <p:nvPr/>
+        </p:nvSpPr>
+        <p:spPr>
+          <a:xfrm>
+            <a:off x="1234440" y="1600200"/>
+            <a:ext cx="10408615" cy="1030986"/>
+          </a:xfrm>
+          <a:prstGeom prst="rect">
+            <a:avLst/>
+          </a:prstGeom>
+          <a:noFill/>
+        </p:spPr>
+        <p:txBody>
+          <a:bodyPr wrap="square" anchor="t" lIns="0" rIns="0" tIns="0" bIns="0"/>
+          <a:lstStyle/>
+          <a:p>
+            <a:pPr algn="l"/>
+            <a:r>
+              <a:rPr sz="1800" b="0" i="0">
+                <a:solidFill>
+                  <a:srgbClr val="54595D"/>
+                </a:solidFill>
+                <a:latin typeface="Calibri"/>
+              </a:rPr>
+              <a:t>What is a factor of safety?</a:t>
+            </a:r>
+          </a:p>
+          <a:p>
+            <a:r>
+              <a:rPr sz="1800" b="1">
+                <a:solidFill>
+                  <a:srgbClr val="03306E"/>
+                </a:solidFill>
+                <a:latin typeface="Calibri"/>
+              </a:rPr>
+              <a:t>The ratio of a design's strength to the load it is expected to carry.</a:t>
+            </a:r>
+          </a:p>
+        </p:txBody>
+      </p:sp>
+      <p:sp>
+        <p:nvSpPr>
+          <p:cNvPr id="8" name="Oval 7"/>
+          <p:cNvSpPr/>
+          <p:nvPr/>
+        </p:nvSpPr>
+        <p:spPr>
+          <a:xfrm>
+            <a:off x="548640" y="2814066"/>
+            <a:ext cx="411480" cy="411480"/>
+          </a:xfrm>
+          <a:prstGeom prst="ellipse">
+            <a:avLst/>
+          </a:prstGeom>
+          <a:solidFill>
+            <a:srgbClr val="E0463A"/>
+          </a:solidFill>
+          <a:ln>
+            <a:noFill/>
+          </a:ln>
+          <a:effectLst/>
+        </p:spPr>
+        <p:style>
+          <a:lnRef idx="1">
+            <a:schemeClr val="accent1"/>
+          </a:lnRef>
+          <a:fillRef idx="3">
+            <a:schemeClr val="accent1"/>
+          </a:fillRef>
+          <a:effectRef idx="2">
+            <a:schemeClr val="accent1"/>
+          </a:effectRef>
+          <a:fontRef idx="minor">
+            <a:schemeClr val="lt1"/>
+          </a:fontRef>
+        </p:style>
+        <p:txBody>
+          <a:bodyPr rtlCol="0" anchor="ctr" lIns="0" rIns="0" tIns="0" bIns="0"/>
+          <a:lstStyle/>
+          <a:p>
+            <a:pPr algn="ctr"/>
+            <a:r>
+              <a:rPr sz="1400" b="1">
+                <a:solidFill>
+                  <a:srgbClr val="FFFFFF"/>
+                </a:solidFill>
+                <a:latin typeface="Calibri"/>
+              </a:rPr>
+              <a:t>2</a:t>
+            </a:r>
+          </a:p>
+        </p:txBody>
+      </p:sp>
+      <p:sp>
+        <p:nvSpPr>
+          <p:cNvPr id="9" name="TextBox 8"/>
+          <p:cNvSpPr txBox="1"/>
+          <p:nvPr/>
+        </p:nvSpPr>
+        <p:spPr>
+          <a:xfrm>
+            <a:off x="1234440" y="2795778"/>
+            <a:ext cx="10408615" cy="1030986"/>
+          </a:xfrm>
+          <a:prstGeom prst="rect">
+            <a:avLst/>
+          </a:prstGeom>
+          <a:noFill/>
+        </p:spPr>
+        <p:txBody>
+          <a:bodyPr wrap="square" anchor="t" lIns="0" rIns="0" tIns="0" bIns="0"/>
+          <a:lstStyle/>
+          <a:p>
+            <a:pPr algn="l"/>
+            <a:r>
+              <a:rPr sz="1800" b="0" i="0">
+                <a:solidFill>
+                  <a:srgbClr val="54595D"/>
+                </a:solidFill>
+                <a:latin typeface="Calibri"/>
+              </a:rPr>
+              <a:t>Why use standard parts?</a:t>
+            </a:r>
+          </a:p>
+          <a:p>
+            <a:r>
+              <a:rPr sz="1800" b="1">
+                <a:solidFill>
+                  <a:srgbClr val="03306E"/>
+                </a:solidFill>
+                <a:latin typeface="Calibri"/>
+              </a:rPr>
+              <a:t>Cheaper, proven, easy to replace and source.</a:t>
+            </a:r>
+          </a:p>
+        </p:txBody>
+      </p:sp>
+      <p:sp>
+        <p:nvSpPr>
+          <p:cNvPr id="10" name="Oval 9"/>
+          <p:cNvSpPr/>
+          <p:nvPr/>
+        </p:nvSpPr>
+        <p:spPr>
+          <a:xfrm>
+            <a:off x="548640" y="4009644"/>
+            <a:ext cx="411480" cy="411480"/>
+          </a:xfrm>
+          <a:prstGeom prst="ellipse">
+            <a:avLst/>
+          </a:prstGeom>
+          <a:solidFill>
+            <a:srgbClr val="E0463A"/>
+          </a:solidFill>
+          <a:ln>
+            <a:noFill/>
+          </a:ln>
+          <a:effectLst/>
+        </p:spPr>
+        <p:style>
+          <a:lnRef idx="1">
+            <a:schemeClr val="accent1"/>
+          </a:lnRef>
+          <a:fillRef idx="3">
+            <a:schemeClr val="accent1"/>
+          </a:fillRef>
+          <a:effectRef idx="2">
+            <a:schemeClr val="accent1"/>
+          </a:effectRef>
+          <a:fontRef idx="minor">
+            <a:schemeClr val="lt1"/>
+          </a:fontRef>
+        </p:style>
+        <p:txBody>
+          <a:bodyPr rtlCol="0" anchor="ctr" lIns="0" rIns="0" tIns="0" bIns="0"/>
+          <a:lstStyle/>
+          <a:p>
+            <a:pPr algn="ctr"/>
+            <a:r>
+              <a:rPr sz="1400" b="1">
+                <a:solidFill>
+                  <a:srgbClr val="FFFFFF"/>
+                </a:solidFill>
+                <a:latin typeface="Calibri"/>
+              </a:rPr>
+              <a:t>3</a:t>
+            </a:r>
+          </a:p>
+        </p:txBody>
+      </p:sp>
+      <p:sp>
+        <p:nvSpPr>
+          <p:cNvPr id="11" name="TextBox 10"/>
+          <p:cNvSpPr txBox="1"/>
+          <p:nvPr/>
+        </p:nvSpPr>
+        <p:spPr>
+          <a:xfrm>
+            <a:off x="1234440" y="3991356"/>
+            <a:ext cx="10408615" cy="1030986"/>
+          </a:xfrm>
+          <a:prstGeom prst="rect">
+            <a:avLst/>
+          </a:prstGeom>
+          <a:noFill/>
+        </p:spPr>
+        <p:txBody>
+          <a:bodyPr wrap="square" anchor="t" lIns="0" rIns="0" tIns="0" bIns="0"/>
+          <a:lstStyle/>
+          <a:p>
+            <a:pPr algn="l"/>
+            <a:r>
+              <a:rPr sz="1800" b="0" i="0">
+                <a:solidFill>
+                  <a:srgbClr val="54595D"/>
+                </a:solidFill>
+                <a:latin typeface="Calibri"/>
+              </a:rPr>
+              <a:t>Which welding process suits thin stainless steel with a neat finish?</a:t>
+            </a:r>
+          </a:p>
+          <a:p>
+            <a:r>
+              <a:rPr sz="1800" b="1">
+                <a:solidFill>
+                  <a:srgbClr val="03306E"/>
+                </a:solidFill>
+                <a:latin typeface="Calibri"/>
+              </a:rPr>
+              <a:t>TIG.</a:t>
+            </a:r>
+          </a:p>
+        </p:txBody>
+      </p:sp>
+      <p:sp>
+        <p:nvSpPr>
+          <p:cNvPr id="12" name="Oval 11"/>
+          <p:cNvSpPr/>
+          <p:nvPr/>
+        </p:nvSpPr>
+        <p:spPr>
+          <a:xfrm>
+            <a:off x="548640" y="5205221"/>
+            <a:ext cx="411480" cy="411480"/>
+          </a:xfrm>
+          <a:prstGeom prst="ellipse">
+            <a:avLst/>
+          </a:prstGeom>
+          <a:solidFill>
+            <a:srgbClr val="E0463A"/>
+          </a:solidFill>
+          <a:ln>
+            <a:noFill/>
+          </a:ln>
+          <a:effectLst/>
+        </p:spPr>
+        <p:style>
+          <a:lnRef idx="1">
+            <a:schemeClr val="accent1"/>
+          </a:lnRef>
+          <a:fillRef idx="3">
+            <a:schemeClr val="accent1"/>
+          </a:fillRef>
+          <a:effectRef idx="2">
+            <a:schemeClr val="accent1"/>
+          </a:effectRef>
+          <a:fontRef idx="minor">
+            <a:schemeClr val="lt1"/>
+          </a:fontRef>
+        </p:style>
+        <p:txBody>
+          <a:bodyPr rtlCol="0" anchor="ctr" lIns="0" rIns="0" tIns="0" bIns="0"/>
+          <a:lstStyle/>
+          <a:p>
+            <a:pPr algn="ctr"/>
+            <a:r>
+              <a:rPr sz="1400" b="1">
+                <a:solidFill>
+                  <a:srgbClr val="FFFFFF"/>
+                </a:solidFill>
+                <a:latin typeface="Calibri"/>
+              </a:rPr>
+              <a:t>4</a:t>
+            </a:r>
+          </a:p>
+        </p:txBody>
+      </p:sp>
+      <p:sp>
+        <p:nvSpPr>
+          <p:cNvPr id="13" name="TextBox 12"/>
+          <p:cNvSpPr txBox="1"/>
+          <p:nvPr/>
+        </p:nvSpPr>
+        <p:spPr>
+          <a:xfrm>
+            <a:off x="1234440" y="5186933"/>
+            <a:ext cx="10408615" cy="1030986"/>
+          </a:xfrm>
+          <a:prstGeom prst="rect">
+            <a:avLst/>
+          </a:prstGeom>
+          <a:noFill/>
+        </p:spPr>
+        <p:txBody>
+          <a:bodyPr wrap="square" anchor="t" lIns="0" rIns="0" tIns="0" bIns="0"/>
+          <a:lstStyle/>
+          <a:p>
+            <a:pPr algn="l"/>
+            <a:r>
+              <a:rPr sz="1800" b="0" i="0">
+                <a:solidFill>
+                  <a:srgbClr val="54595D"/>
+                </a:solidFill>
+                <a:latin typeface="Calibri"/>
+              </a:rPr>
+              <a:t>Why do tolerances matter for assembly?</a:t>
+            </a:r>
+          </a:p>
+          <a:p>
+            <a:r>
+              <a:rPr sz="1800" b="1">
+                <a:solidFill>
+                  <a:srgbClr val="03306E"/>
+                </a:solidFill>
+                <a:latin typeface="Calibri"/>
+              </a:rPr>
+              <a:t>Parts must fit together as intended.</a:t>
+            </a:r>
+          </a:p>
+        </p:txBody>
+      </p:sp>
+    </p:spTree>
+  </p:cSld>
+  <p:clrMapOvr>
+    <a:masterClrMapping/>
+  </p:clrMapOvr>
+</p:sld>
+</file>
+
+<file path=ppt/slides/slide12.xml><?xml version="1.0" encoding="utf-8"?>
+<p:sld xmlns:a="http://schemas.openxmlformats.org/drawingml/2006/main" xmlns:p="http://schemas.openxmlformats.org/presentationml/2006/main" xmlns:r="http://schemas.openxmlformats.org/officeDocument/2006/relationships">
+  <p:cSld>
+    <p:bg>
+      <p:bgPr>
+        <a:solidFill>
+          <a:srgbClr val="FFFFFF"/>
+        </a:solidFill>
+        <a:effectLst/>
+      </p:bgPr>
+    </p:bg>
+    <p:spTree>
+      <p:nvGrpSpPr>
+        <p:cNvPr id="1" name=""/>
+        <p:cNvGrpSpPr/>
+        <p:nvPr/>
+      </p:nvGrpSpPr>
+      <p:grpSpPr/>
+      <p:sp>
+        <p:nvSpPr>
+          <p:cNvPr id="2" name="TextBox 1"/>
+          <p:cNvSpPr txBox="1"/>
+          <p:nvPr/>
+        </p:nvSpPr>
+        <p:spPr>
+          <a:xfrm>
+            <a:off x="548640" y="320040"/>
+            <a:ext cx="11094415" cy="274320"/>
+          </a:xfrm>
+          <a:prstGeom prst="rect">
+            <a:avLst/>
+          </a:prstGeom>
+          <a:noFill/>
+        </p:spPr>
+        <p:txBody>
+          <a:bodyPr wrap="square" anchor="t" lIns="0" rIns="0" tIns="0" bIns="0"/>
+          <a:lstStyle/>
+          <a:p>
+            <a:pPr algn="l"/>
+            <a:r>
+              <a:rPr sz="1100" b="1" i="0">
+                <a:solidFill>
+                  <a:srgbClr val="54595D"/>
+                </a:solidFill>
+                <a:latin typeface="Calibri"/>
+              </a:rPr>
+              <a:t>MECHANICAL ENGINEERING  ·  Mechanical: Knowledge criteria</a:t>
+            </a:r>
+          </a:p>
+        </p:txBody>
+      </p:sp>
+      <p:sp>
+        <p:nvSpPr>
+          <p:cNvPr id="3" name="TextBox 2"/>
+          <p:cNvSpPr txBox="1"/>
+          <p:nvPr/>
+        </p:nvSpPr>
+        <p:spPr>
+          <a:xfrm>
+            <a:off x="548640" y="566928"/>
+            <a:ext cx="11094415" cy="822960"/>
+          </a:xfrm>
+          <a:prstGeom prst="rect">
+            <a:avLst/>
+          </a:prstGeom>
+          <a:noFill/>
+        </p:spPr>
+        <p:txBody>
+          <a:bodyPr wrap="square" anchor="ctr" lIns="0" rIns="0" tIns="0" bIns="0"/>
+          <a:lstStyle/>
+          <a:p>
+            <a:pPr algn="l"/>
+            <a:r>
+              <a:rPr sz="3200" b="1" i="0">
+                <a:solidFill>
+                  <a:srgbClr val="03306E"/>
+                </a:solidFill>
+                <a:latin typeface="Cambria"/>
+              </a:rPr>
+              <a:t>Activity: Process selection</a:t>
+            </a:r>
+          </a:p>
+        </p:txBody>
+      </p:sp>
+      <p:sp>
+        <p:nvSpPr>
+          <p:cNvPr id="4" name="TextBox 3"/>
+          <p:cNvSpPr txBox="1"/>
+          <p:nvPr/>
+        </p:nvSpPr>
+        <p:spPr>
+          <a:xfrm>
+            <a:off x="548640" y="6446520"/>
+            <a:ext cx="8229600" cy="274320"/>
+          </a:xfrm>
+          <a:prstGeom prst="rect">
+            <a:avLst/>
+          </a:prstGeom>
+          <a:noFill/>
+        </p:spPr>
+        <p:txBody>
+          <a:bodyPr wrap="square" anchor="t" lIns="0" rIns="0" tIns="0" bIns="0"/>
+          <a:lstStyle/>
+          <a:p>
+            <a:pPr algn="l"/>
+            <a:r>
+              <a:rPr sz="1000" b="0" i="0">
+                <a:solidFill>
+                  <a:srgbClr val="54595D"/>
+                </a:solidFill>
+                <a:latin typeface="Calibri"/>
+              </a:rPr>
+              <a:t>Design and Development for Engineering and Manufacturing T Level  ·  Materials, Standard Parts and Manufacturing Processes</a:t>
+            </a:r>
+          </a:p>
+        </p:txBody>
+      </p:sp>
+      <p:sp>
+        <p:nvSpPr>
+          <p:cNvPr id="5" name="TextBox 4"/>
+          <p:cNvSpPr txBox="1"/>
+          <p:nvPr/>
+        </p:nvSpPr>
+        <p:spPr>
+          <a:xfrm>
+            <a:off x="10728655" y="6446520"/>
+            <a:ext cx="914400" cy="274320"/>
+          </a:xfrm>
+          <a:prstGeom prst="rect">
+            <a:avLst/>
+          </a:prstGeom>
+          <a:noFill/>
+        </p:spPr>
+        <p:txBody>
+          <a:bodyPr wrap="square" anchor="t" lIns="0" rIns="0" tIns="0" bIns="0"/>
+          <a:lstStyle/>
+          <a:p>
+            <a:pPr algn="r"/>
+            <a:r>
+              <a:rPr sz="1000" b="0" i="0">
+                <a:solidFill>
+                  <a:srgbClr val="54595D"/>
+                </a:solidFill>
+                <a:latin typeface="Calibri"/>
+              </a:rPr>
+              <a:t>12</a:t>
+            </a:r>
+          </a:p>
+        </p:txBody>
+      </p:sp>
+      <p:sp>
+        <p:nvSpPr>
+          <p:cNvPr id="6" name="Rounded Rectangle 5"/>
+          <p:cNvSpPr/>
+          <p:nvPr/>
+        </p:nvSpPr>
+        <p:spPr>
+          <a:xfrm>
+            <a:off x="548640" y="1508760"/>
+            <a:ext cx="2011680" cy="457200"/>
+          </a:xfrm>
+          <a:prstGeom prst="roundRect">
+            <a:avLst>
+              <a:gd name="adj" fmla="val 50000"/>
+            </a:avLst>
+          </a:prstGeom>
+          <a:solidFill>
+            <a:srgbClr val="E0463A"/>
+          </a:solidFill>
+          <a:ln>
+            <a:noFill/>
+          </a:ln>
+          <a:effectLst/>
+        </p:spPr>
+        <p:style>
+          <a:lnRef idx="1">
+            <a:schemeClr val="accent1"/>
+          </a:lnRef>
+          <a:fillRef idx="3">
+            <a:schemeClr val="accent1"/>
+          </a:fillRef>
+          <a:effectRef idx="2">
+            <a:schemeClr val="accent1"/>
+          </a:effectRef>
+          <a:fontRef idx="minor">
+            <a:schemeClr val="lt1"/>
+          </a:fontRef>
+        </p:style>
+        <p:txBody>
+          <a:bodyPr rtlCol="0" anchor="ctr"/>
+          <a:lstStyle/>
+          <a:p/>
+        </p:txBody>
+      </p:sp>
+      <p:sp>
+        <p:nvSpPr>
+          <p:cNvPr id="7" name="TextBox 6"/>
+          <p:cNvSpPr txBox="1"/>
+          <p:nvPr/>
+        </p:nvSpPr>
+        <p:spPr>
+          <a:xfrm>
+            <a:off x="548640" y="1508760"/>
+            <a:ext cx="2011680" cy="457200"/>
+          </a:xfrm>
+          <a:prstGeom prst="rect">
+            <a:avLst/>
+          </a:prstGeom>
+          <a:noFill/>
+        </p:spPr>
+        <p:txBody>
+          <a:bodyPr wrap="square" anchor="ctr" lIns="0" rIns="0" tIns="0" bIns="0"/>
+          <a:lstStyle/>
+          <a:p>
+            <a:pPr algn="ctr"/>
+            <a:r>
+              <a:rPr sz="1400" b="1" i="0">
+                <a:solidFill>
+                  <a:srgbClr val="FFFFFF"/>
+                </a:solidFill>
+                <a:latin typeface="Calibri"/>
+              </a:rPr>
+              <a:t>25 minutes</a:t>
+            </a:r>
+          </a:p>
+        </p:txBody>
+      </p:sp>
+      <p:sp>
+        <p:nvSpPr>
+          <p:cNvPr id="8" name="TextBox 7"/>
+          <p:cNvSpPr txBox="1"/>
+          <p:nvPr/>
+        </p:nvSpPr>
+        <p:spPr>
+          <a:xfrm>
+            <a:off x="2743200" y="1508760"/>
+            <a:ext cx="4754880" cy="457200"/>
+          </a:xfrm>
+          <a:prstGeom prst="rect">
+            <a:avLst/>
+          </a:prstGeom>
+          <a:noFill/>
+        </p:spPr>
+        <p:txBody>
+          <a:bodyPr wrap="square" anchor="ctr" lIns="0" rIns="0" tIns="0" bIns="0"/>
+          <a:lstStyle/>
+          <a:p>
+            <a:pPr algn="l"/>
+            <a:r>
+              <a:rPr sz="1400" b="0" i="1">
+                <a:solidFill>
+                  <a:srgbClr val="54595D"/>
+                </a:solidFill>
+                <a:latin typeface="Calibri"/>
+              </a:rPr>
+              <a:t>Pairs</a:t>
+            </a:r>
+          </a:p>
+        </p:txBody>
+      </p:sp>
+      <p:sp>
+        <p:nvSpPr>
+          <p:cNvPr id="9" name="Oval 8"/>
+          <p:cNvSpPr/>
+          <p:nvPr/>
+        </p:nvSpPr>
+        <p:spPr>
+          <a:xfrm>
+            <a:off x="548640" y="2482596"/>
+            <a:ext cx="384048" cy="384048"/>
+          </a:xfrm>
+          <a:prstGeom prst="ellipse">
+            <a:avLst/>
+          </a:prstGeom>
+          <a:solidFill>
+            <a:srgbClr val="0645AD"/>
+          </a:solidFill>
+          <a:ln>
+            <a:noFill/>
+          </a:ln>
+          <a:effectLst/>
+        </p:spPr>
+        <p:style>
+          <a:lnRef idx="1">
+            <a:schemeClr val="accent1"/>
+          </a:lnRef>
+          <a:fillRef idx="3">
+            <a:schemeClr val="accent1"/>
+          </a:fillRef>
+          <a:effectRef idx="2">
+            <a:schemeClr val="accent1"/>
+          </a:effectRef>
+          <a:fontRef idx="minor">
+            <a:schemeClr val="lt1"/>
+          </a:fontRef>
+        </p:style>
+        <p:txBody>
+          <a:bodyPr rtlCol="0" anchor="ctr" lIns="0" rIns="0" tIns="0" bIns="0"/>
+          <a:lstStyle/>
+          <a:p>
+            <a:pPr algn="ctr"/>
+            <a:r>
+              <a:rPr sz="1300" b="1">
+                <a:solidFill>
+                  <a:srgbClr val="FFFFFF"/>
+                </a:solidFill>
+                <a:latin typeface="Calibri"/>
+              </a:rPr>
+              <a:t>1</a:t>
+            </a:r>
+          </a:p>
+        </p:txBody>
+      </p:sp>
+      <p:sp>
+        <p:nvSpPr>
+          <p:cNvPr id="10" name="TextBox 9"/>
+          <p:cNvSpPr txBox="1"/>
+          <p:nvPr/>
+        </p:nvSpPr>
+        <p:spPr>
+          <a:xfrm>
+            <a:off x="1143000" y="2240280"/>
+            <a:ext cx="5943600" cy="868680"/>
+          </a:xfrm>
+          <a:prstGeom prst="rect">
+            <a:avLst/>
+          </a:prstGeom>
+          <a:noFill/>
+        </p:spPr>
+        <p:txBody>
+          <a:bodyPr wrap="square" anchor="ctr" lIns="0" rIns="0" tIns="0" bIns="0"/>
+          <a:lstStyle/>
+          <a:p>
+            <a:pPr algn="l"/>
+            <a:r>
+              <a:rPr sz="1700" b="0" i="0">
+                <a:solidFill>
+                  <a:srgbClr val="202122"/>
+                </a:solidFill>
+                <a:latin typeface="Calibri"/>
+              </a:rPr>
+              <a:t>Three parts: a one-off prototype bracket, 10,000 plastic clips, and a steel frame.</a:t>
+            </a:r>
+          </a:p>
+        </p:txBody>
+      </p:sp>
+      <p:sp>
+        <p:nvSpPr>
+          <p:cNvPr id="11" name="Oval 10"/>
+          <p:cNvSpPr/>
+          <p:nvPr/>
+        </p:nvSpPr>
+        <p:spPr>
+          <a:xfrm>
+            <a:off x="548640" y="3461004"/>
+            <a:ext cx="384048" cy="384048"/>
+          </a:xfrm>
+          <a:prstGeom prst="ellipse">
+            <a:avLst/>
+          </a:prstGeom>
+          <a:solidFill>
+            <a:srgbClr val="0645AD"/>
+          </a:solidFill>
+          <a:ln>
+            <a:noFill/>
+          </a:ln>
+          <a:effectLst/>
+        </p:spPr>
+        <p:style>
+          <a:lnRef idx="1">
+            <a:schemeClr val="accent1"/>
+          </a:lnRef>
+          <a:fillRef idx="3">
+            <a:schemeClr val="accent1"/>
+          </a:fillRef>
+          <a:effectRef idx="2">
+            <a:schemeClr val="accent1"/>
+          </a:effectRef>
+          <a:fontRef idx="minor">
+            <a:schemeClr val="lt1"/>
+          </a:fontRef>
+        </p:style>
+        <p:txBody>
+          <a:bodyPr rtlCol="0" anchor="ctr" lIns="0" rIns="0" tIns="0" bIns="0"/>
+          <a:lstStyle/>
+          <a:p>
+            <a:pPr algn="ctr"/>
+            <a:r>
+              <a:rPr sz="1300" b="1">
+                <a:solidFill>
+                  <a:srgbClr val="FFFFFF"/>
+                </a:solidFill>
+                <a:latin typeface="Calibri"/>
+              </a:rPr>
+              <a:t>2</a:t>
+            </a:r>
+          </a:p>
+        </p:txBody>
+      </p:sp>
+      <p:sp>
+        <p:nvSpPr>
+          <p:cNvPr id="12" name="TextBox 11"/>
+          <p:cNvSpPr txBox="1"/>
+          <p:nvPr/>
+        </p:nvSpPr>
+        <p:spPr>
+          <a:xfrm>
+            <a:off x="1143000" y="3218688"/>
+            <a:ext cx="5943600" cy="868680"/>
+          </a:xfrm>
+          <a:prstGeom prst="rect">
+            <a:avLst/>
+          </a:prstGeom>
+          <a:noFill/>
+        </p:spPr>
+        <p:txBody>
+          <a:bodyPr wrap="square" anchor="ctr" lIns="0" rIns="0" tIns="0" bIns="0"/>
+          <a:lstStyle/>
+          <a:p>
+            <a:pPr algn="l"/>
+            <a:r>
+              <a:rPr sz="1700" b="0" i="0">
+                <a:solidFill>
+                  <a:srgbClr val="202122"/>
+                </a:solidFill>
+                <a:latin typeface="Calibri"/>
+              </a:rPr>
+              <a:t>Choose a material and process for each.</a:t>
+            </a:r>
+          </a:p>
+        </p:txBody>
+      </p:sp>
+      <p:sp>
+        <p:nvSpPr>
+          <p:cNvPr id="13" name="Oval 12"/>
+          <p:cNvSpPr/>
+          <p:nvPr/>
+        </p:nvSpPr>
+        <p:spPr>
+          <a:xfrm>
+            <a:off x="548640" y="4439412"/>
+            <a:ext cx="384048" cy="384048"/>
+          </a:xfrm>
+          <a:prstGeom prst="ellipse">
+            <a:avLst/>
+          </a:prstGeom>
+          <a:solidFill>
+            <a:srgbClr val="0645AD"/>
+          </a:solidFill>
+          <a:ln>
+            <a:noFill/>
+          </a:ln>
+          <a:effectLst/>
+        </p:spPr>
+        <p:style>
+          <a:lnRef idx="1">
+            <a:schemeClr val="accent1"/>
+          </a:lnRef>
+          <a:fillRef idx="3">
+            <a:schemeClr val="accent1"/>
+          </a:fillRef>
+          <a:effectRef idx="2">
+            <a:schemeClr val="accent1"/>
+          </a:effectRef>
+          <a:fontRef idx="minor">
+            <a:schemeClr val="lt1"/>
+          </a:fontRef>
+        </p:style>
+        <p:txBody>
+          <a:bodyPr rtlCol="0" anchor="ctr" lIns="0" rIns="0" tIns="0" bIns="0"/>
+          <a:lstStyle/>
+          <a:p>
+            <a:pPr algn="ctr"/>
+            <a:r>
+              <a:rPr sz="1300" b="1">
+                <a:solidFill>
+                  <a:srgbClr val="FFFFFF"/>
+                </a:solidFill>
+                <a:latin typeface="Calibri"/>
+              </a:rPr>
+              <a:t>3</a:t>
+            </a:r>
+          </a:p>
+        </p:txBody>
+      </p:sp>
+      <p:sp>
+        <p:nvSpPr>
+          <p:cNvPr id="14" name="TextBox 13"/>
+          <p:cNvSpPr txBox="1"/>
+          <p:nvPr/>
+        </p:nvSpPr>
+        <p:spPr>
+          <a:xfrm>
+            <a:off x="1143000" y="4197096"/>
+            <a:ext cx="5943600" cy="868680"/>
+          </a:xfrm>
+          <a:prstGeom prst="rect">
+            <a:avLst/>
+          </a:prstGeom>
+          <a:noFill/>
+        </p:spPr>
+        <p:txBody>
+          <a:bodyPr wrap="square" anchor="ctr" lIns="0" rIns="0" tIns="0" bIns="0"/>
+          <a:lstStyle/>
+          <a:p>
+            <a:pPr algn="l"/>
+            <a:r>
+              <a:rPr sz="1700" b="0" i="0">
+                <a:solidFill>
+                  <a:srgbClr val="202122"/>
+                </a:solidFill>
+                <a:latin typeface="Calibri"/>
+              </a:rPr>
+              <a:t>Name any standard parts you would buy in.</a:t>
+            </a:r>
+          </a:p>
+        </p:txBody>
+      </p:sp>
+      <p:sp>
+        <p:nvSpPr>
+          <p:cNvPr id="15" name="Oval 14"/>
+          <p:cNvSpPr/>
+          <p:nvPr/>
+        </p:nvSpPr>
+        <p:spPr>
+          <a:xfrm>
+            <a:off x="548640" y="5417820"/>
+            <a:ext cx="384048" cy="384048"/>
+          </a:xfrm>
+          <a:prstGeom prst="ellipse">
+            <a:avLst/>
+          </a:prstGeom>
+          <a:solidFill>
+            <a:srgbClr val="0645AD"/>
+          </a:solidFill>
+          <a:ln>
+            <a:noFill/>
+          </a:ln>
+          <a:effectLst/>
+        </p:spPr>
+        <p:style>
+          <a:lnRef idx="1">
+            <a:schemeClr val="accent1"/>
+          </a:lnRef>
+          <a:fillRef idx="3">
+            <a:schemeClr val="accent1"/>
+          </a:fillRef>
+          <a:effectRef idx="2">
+            <a:schemeClr val="accent1"/>
+          </a:effectRef>
+          <a:fontRef idx="minor">
+            <a:schemeClr val="lt1"/>
+          </a:fontRef>
+        </p:style>
+        <p:txBody>
+          <a:bodyPr rtlCol="0" anchor="ctr" lIns="0" rIns="0" tIns="0" bIns="0"/>
+          <a:lstStyle/>
+          <a:p>
+            <a:pPr algn="ctr"/>
+            <a:r>
+              <a:rPr sz="1300" b="1">
+                <a:solidFill>
+                  <a:srgbClr val="FFFFFF"/>
+                </a:solidFill>
+                <a:latin typeface="Calibri"/>
+              </a:rPr>
+              <a:t>4</a:t>
+            </a:r>
+          </a:p>
+        </p:txBody>
+      </p:sp>
+      <p:sp>
+        <p:nvSpPr>
+          <p:cNvPr id="16" name="TextBox 15"/>
+          <p:cNvSpPr txBox="1"/>
+          <p:nvPr/>
+        </p:nvSpPr>
+        <p:spPr>
+          <a:xfrm>
+            <a:off x="1143000" y="5175504"/>
+            <a:ext cx="5943600" cy="868680"/>
+          </a:xfrm>
+          <a:prstGeom prst="rect">
+            <a:avLst/>
+          </a:prstGeom>
+          <a:noFill/>
+        </p:spPr>
+        <p:txBody>
+          <a:bodyPr wrap="square" anchor="ctr" lIns="0" rIns="0" tIns="0" bIns="0"/>
+          <a:lstStyle/>
+          <a:p>
+            <a:pPr algn="l"/>
+            <a:r>
+              <a:rPr sz="1700" b="0" i="0">
+                <a:solidFill>
+                  <a:srgbClr val="202122"/>
+                </a:solidFill>
+                <a:latin typeface="Calibri"/>
+              </a:rPr>
+              <a:t>Justify each choice.</a:t>
+            </a:r>
+          </a:p>
+        </p:txBody>
+      </p:sp>
+      <p:sp>
+        <p:nvSpPr>
+          <p:cNvPr id="17" name="Rounded Rectangle 16"/>
+          <p:cNvSpPr/>
+          <p:nvPr/>
+        </p:nvSpPr>
+        <p:spPr>
+          <a:xfrm>
+            <a:off x="7772400" y="1508760"/>
+            <a:ext cx="3867912" cy="4572000"/>
+          </a:xfrm>
+          <a:prstGeom prst="roundRect">
+            <a:avLst>
+              <a:gd name="adj" fmla="val 8000"/>
+            </a:avLst>
+          </a:prstGeom>
+          <a:solidFill>
+            <a:srgbClr val="EAF3FF"/>
+          </a:solidFill>
+          <a:ln>
+            <a:noFill/>
+          </a:ln>
+          <a:effectLst/>
+        </p:spPr>
+        <p:style>
+          <a:lnRef idx="1">
+            <a:schemeClr val="accent1"/>
+          </a:lnRef>
+          <a:fillRef idx="3">
+            <a:schemeClr val="accent1"/>
+          </a:fillRef>
+          <a:effectRef idx="2">
+            <a:schemeClr val="accent1"/>
+          </a:effectRef>
+          <a:fontRef idx="minor">
+            <a:schemeClr val="lt1"/>
+          </a:fontRef>
+        </p:style>
+        <p:txBody>
+          <a:bodyPr rtlCol="0" anchor="ctr"/>
+          <a:lstStyle/>
+          <a:p/>
+        </p:txBody>
+      </p:sp>
+      <p:sp>
+        <p:nvSpPr>
+          <p:cNvPr id="18" name="TextBox 17"/>
+          <p:cNvSpPr txBox="1"/>
+          <p:nvPr/>
+        </p:nvSpPr>
+        <p:spPr>
+          <a:xfrm>
+            <a:off x="8046720" y="1737360"/>
+            <a:ext cx="3291840" cy="365760"/>
+          </a:xfrm>
+          <a:prstGeom prst="rect">
+            <a:avLst/>
+          </a:prstGeom>
+          <a:noFill/>
+        </p:spPr>
+        <p:txBody>
+          <a:bodyPr wrap="square" anchor="t" lIns="0" rIns="0" tIns="0" bIns="0"/>
+          <a:lstStyle/>
+          <a:p>
+            <a:pPr algn="l"/>
+            <a:r>
+              <a:rPr sz="1300" b="1" i="0">
+                <a:solidFill>
+                  <a:srgbClr val="0645AD"/>
+                </a:solidFill>
+                <a:latin typeface="Calibri"/>
+              </a:rPr>
+              <a:t>SUCCESS CRITERIA</a:t>
+            </a:r>
+          </a:p>
+        </p:txBody>
+      </p:sp>
+      <p:sp>
+        <p:nvSpPr>
+          <p:cNvPr id="19" name="TextBox 18"/>
+          <p:cNvSpPr txBox="1"/>
+          <p:nvPr/>
+        </p:nvSpPr>
+        <p:spPr>
+          <a:xfrm>
+            <a:off x="8046720" y="2240280"/>
+            <a:ext cx="3337560" cy="3657600"/>
+          </a:xfrm>
+          <a:prstGeom prst="rect">
+            <a:avLst/>
+          </a:prstGeom>
+          <a:noFill/>
+        </p:spPr>
+        <p:txBody>
+          <a:bodyPr wrap="square" lIns="0" rIns="0" tIns="0" bIns="0">
+            <a:spAutoFit/>
+          </a:bodyPr>
+          <a:lstStyle/>
+          <a:p>
+            <a:pPr marL="274320" indent="-274320">
+              <a:spcAft>
+                <a:spcPts val="810"/>
+              </a:spcAft>
+              <a:buClr>
+                <a:srgbClr val="0645AD"/>
+              </a:buClr>
+              <a:buFont typeface="Arial"/>
+              <a:buChar char="•"/>
+            </a:pPr>
+            <a:r>
+              <a:rPr sz="1800" b="0">
+                <a:solidFill>
+                  <a:srgbClr val="202122"/>
+                </a:solidFill>
+                <a:latin typeface="Calibri"/>
+              </a:rPr>
+              <a:t>Process suits the quantity</a:t>
+            </a:r>
+          </a:p>
+          <a:p>
+            <a:pPr marL="274320" indent="-274320">
+              <a:spcAft>
+                <a:spcPts val="810"/>
+              </a:spcAft>
+              <a:buClr>
+                <a:srgbClr val="0645AD"/>
+              </a:buClr>
+              <a:buFont typeface="Arial"/>
+              <a:buChar char="•"/>
+            </a:pPr>
+            <a:r>
+              <a:rPr sz="1800" b="0">
+                <a:solidFill>
+                  <a:srgbClr val="202122"/>
+                </a:solidFill>
+                <a:latin typeface="Calibri"/>
+              </a:rPr>
+              <a:t>Material suits the function</a:t>
+            </a:r>
+          </a:p>
+          <a:p>
+            <a:pPr marL="274320" indent="-274320">
+              <a:spcAft>
+                <a:spcPts val="810"/>
+              </a:spcAft>
+              <a:buClr>
+                <a:srgbClr val="0645AD"/>
+              </a:buClr>
+              <a:buFont typeface="Arial"/>
+              <a:buChar char="•"/>
+            </a:pPr>
+            <a:r>
+              <a:rPr sz="1800" b="0">
+                <a:solidFill>
+                  <a:srgbClr val="202122"/>
+                </a:solidFill>
+                <a:latin typeface="Calibri"/>
+              </a:rPr>
+              <a:t>Standard parts sensibly used</a:t>
+            </a:r>
+          </a:p>
+        </p:txBody>
+      </p:sp>
+    </p:spTree>
+  </p:cSld>
+  <p:clrMapOvr>
+    <a:masterClrMapping/>
+  </p:clrMapOvr>
+</p:sld>
+</file>
+
+<file path=ppt/slides/slide13.xml><?xml version="1.0" encoding="utf-8"?>
+<p:sld xmlns:a="http://schemas.openxmlformats.org/drawingml/2006/main" xmlns:p="http://schemas.openxmlformats.org/presentationml/2006/main" xmlns:r="http://schemas.openxmlformats.org/officeDocument/2006/relationships">
+  <p:cSld>
+    <p:bg>
+      <p:bgPr>
+        <a:solidFill>
+          <a:srgbClr val="03306E"/>
+        </a:solidFill>
+        <a:effectLst/>
+      </p:bgPr>
+    </p:bg>
+    <p:spTree>
+      <p:nvGrpSpPr>
+        <p:cNvPr id="1" name=""/>
+        <p:cNvGrpSpPr/>
+        <p:nvPr/>
+      </p:nvGrpSpPr>
+      <p:grpSpPr/>
+      <p:sp>
+        <p:nvSpPr>
+          <p:cNvPr id="2" name="TextBox 1"/>
+          <p:cNvSpPr txBox="1"/>
+          <p:nvPr/>
+        </p:nvSpPr>
+        <p:spPr>
+          <a:xfrm>
+            <a:off x="548640" y="320040"/>
+            <a:ext cx="11094415" cy="274320"/>
+          </a:xfrm>
+          <a:prstGeom prst="rect">
+            <a:avLst/>
+          </a:prstGeom>
+          <a:noFill/>
+        </p:spPr>
+        <p:txBody>
+          <a:bodyPr wrap="square" anchor="t" lIns="0" rIns="0" tIns="0" bIns="0"/>
+          <a:lstStyle/>
+          <a:p>
+            <a:pPr algn="l"/>
+            <a:r>
+              <a:rPr sz="1100" b="1" i="0">
+                <a:solidFill>
+                  <a:srgbClr val="A9C8F0"/>
+                </a:solidFill>
+                <a:latin typeface="Calibri"/>
+              </a:rPr>
+              <a:t>MECHANICAL ENGINEERING  ·  Mechanical: Knowledge criteria</a:t>
+            </a:r>
+          </a:p>
+        </p:txBody>
+      </p:sp>
+      <p:sp>
+        <p:nvSpPr>
+          <p:cNvPr id="3" name="TextBox 2"/>
+          <p:cNvSpPr txBox="1"/>
+          <p:nvPr/>
+        </p:nvSpPr>
+        <p:spPr>
+          <a:xfrm>
+            <a:off x="548640" y="566928"/>
+            <a:ext cx="11094415" cy="822960"/>
+          </a:xfrm>
+          <a:prstGeom prst="rect">
+            <a:avLst/>
+          </a:prstGeom>
+          <a:noFill/>
+        </p:spPr>
+        <p:txBody>
+          <a:bodyPr wrap="square" anchor="ctr" lIns="0" rIns="0" tIns="0" bIns="0"/>
+          <a:lstStyle/>
+          <a:p>
+            <a:pPr algn="l"/>
+            <a:r>
+              <a:rPr sz="3200" b="1" i="0">
+                <a:solidFill>
+                  <a:srgbClr val="FFFFFF"/>
+                </a:solidFill>
+                <a:latin typeface="Cambria"/>
+              </a:rPr>
+              <a:t>Exit ticket</a:t>
+            </a:r>
+          </a:p>
+        </p:txBody>
+      </p:sp>
+      <p:sp>
+        <p:nvSpPr>
+          <p:cNvPr id="4" name="Oval 3"/>
+          <p:cNvSpPr/>
+          <p:nvPr/>
+        </p:nvSpPr>
+        <p:spPr>
+          <a:xfrm>
+            <a:off x="548640" y="1737360"/>
+            <a:ext cx="502920" cy="502920"/>
+          </a:xfrm>
+          <a:prstGeom prst="ellipse">
+            <a:avLst/>
+          </a:prstGeom>
+          <a:solidFill>
+            <a:srgbClr val="E0463A"/>
+          </a:solidFill>
+          <a:ln>
+            <a:noFill/>
+          </a:ln>
+          <a:effectLst/>
+        </p:spPr>
+        <p:style>
+          <a:lnRef idx="1">
+            <a:schemeClr val="accent1"/>
+          </a:lnRef>
+          <a:fillRef idx="3">
+            <a:schemeClr val="accent1"/>
+          </a:fillRef>
+          <a:effectRef idx="2">
+            <a:schemeClr val="accent1"/>
+          </a:effectRef>
+          <a:fontRef idx="minor">
+            <a:schemeClr val="lt1"/>
+          </a:fontRef>
+        </p:style>
+        <p:txBody>
+          <a:bodyPr rtlCol="0" anchor="ctr" lIns="0" rIns="0" tIns="0" bIns="0"/>
+          <a:lstStyle/>
+          <a:p>
+            <a:pPr algn="ctr"/>
+            <a:r>
+              <a:rPr sz="1700" b="1">
+                <a:solidFill>
+                  <a:srgbClr val="FFFFFF"/>
+                </a:solidFill>
+                <a:latin typeface="Calibri"/>
+              </a:rPr>
+              <a:t>1</a:t>
+            </a:r>
+          </a:p>
+        </p:txBody>
+      </p:sp>
+      <p:sp>
+        <p:nvSpPr>
+          <p:cNvPr id="5" name="TextBox 4"/>
+          <p:cNvSpPr txBox="1"/>
+          <p:nvPr/>
+        </p:nvSpPr>
+        <p:spPr>
+          <a:xfrm>
+            <a:off x="1325880" y="1645920"/>
+            <a:ext cx="6583680" cy="822960"/>
+          </a:xfrm>
+          <a:prstGeom prst="rect">
+            <a:avLst/>
+          </a:prstGeom>
+          <a:noFill/>
+        </p:spPr>
+        <p:txBody>
+          <a:bodyPr wrap="square" anchor="ctr" lIns="0" rIns="0" tIns="0" bIns="0"/>
+          <a:lstStyle/>
+          <a:p>
+            <a:pPr algn="l"/>
+            <a:r>
+              <a:rPr sz="2000" b="0" i="0">
+                <a:solidFill>
+                  <a:srgbClr val="FFFFFF"/>
+                </a:solidFill>
+                <a:latin typeface="Calibri"/>
+              </a:rPr>
+              <a:t>When is 3D printing the best process?</a:t>
+            </a:r>
+          </a:p>
+        </p:txBody>
+      </p:sp>
+      <p:sp>
+        <p:nvSpPr>
+          <p:cNvPr id="6" name="Oval 5"/>
+          <p:cNvSpPr/>
+          <p:nvPr/>
+        </p:nvSpPr>
+        <p:spPr>
+          <a:xfrm>
+            <a:off x="548640" y="2697480"/>
+            <a:ext cx="502920" cy="502920"/>
+          </a:xfrm>
+          <a:prstGeom prst="ellipse">
+            <a:avLst/>
+          </a:prstGeom>
+          <a:solidFill>
+            <a:srgbClr val="E0463A"/>
+          </a:solidFill>
+          <a:ln>
+            <a:noFill/>
+          </a:ln>
+          <a:effectLst/>
+        </p:spPr>
+        <p:style>
+          <a:lnRef idx="1">
+            <a:schemeClr val="accent1"/>
+          </a:lnRef>
+          <a:fillRef idx="3">
+            <a:schemeClr val="accent1"/>
+          </a:fillRef>
+          <a:effectRef idx="2">
+            <a:schemeClr val="accent1"/>
+          </a:effectRef>
+          <a:fontRef idx="minor">
+            <a:schemeClr val="lt1"/>
+          </a:fontRef>
+        </p:style>
+        <p:txBody>
+          <a:bodyPr rtlCol="0" anchor="ctr" lIns="0" rIns="0" tIns="0" bIns="0"/>
+          <a:lstStyle/>
+          <a:p>
+            <a:pPr algn="ctr"/>
+            <a:r>
+              <a:rPr sz="1700" b="1">
+                <a:solidFill>
+                  <a:srgbClr val="FFFFFF"/>
+                </a:solidFill>
+                <a:latin typeface="Calibri"/>
+              </a:rPr>
+              <a:t>2</a:t>
+            </a:r>
+          </a:p>
+        </p:txBody>
+      </p:sp>
+      <p:sp>
+        <p:nvSpPr>
+          <p:cNvPr id="7" name="TextBox 6"/>
+          <p:cNvSpPr txBox="1"/>
+          <p:nvPr/>
+        </p:nvSpPr>
+        <p:spPr>
+          <a:xfrm>
+            <a:off x="1325880" y="2606040"/>
+            <a:ext cx="6583680" cy="822960"/>
+          </a:xfrm>
+          <a:prstGeom prst="rect">
+            <a:avLst/>
+          </a:prstGeom>
+          <a:noFill/>
+        </p:spPr>
+        <p:txBody>
+          <a:bodyPr wrap="square" anchor="ctr" lIns="0" rIns="0" tIns="0" bIns="0"/>
+          <a:lstStyle/>
+          <a:p>
+            <a:pPr algn="l"/>
+            <a:r>
+              <a:rPr sz="2000" b="0" i="0">
+                <a:solidFill>
+                  <a:srgbClr val="FFFFFF"/>
+                </a:solidFill>
+                <a:latin typeface="Calibri"/>
+              </a:rPr>
+              <a:t>What is the difference between MIG and TIG?</a:t>
+            </a:r>
+          </a:p>
+        </p:txBody>
+      </p:sp>
+      <p:sp>
+        <p:nvSpPr>
+          <p:cNvPr id="8" name="Oval 7"/>
+          <p:cNvSpPr/>
+          <p:nvPr/>
+        </p:nvSpPr>
+        <p:spPr>
+          <a:xfrm>
+            <a:off x="548640" y="3657600"/>
+            <a:ext cx="502920" cy="502920"/>
+          </a:xfrm>
+          <a:prstGeom prst="ellipse">
+            <a:avLst/>
+          </a:prstGeom>
+          <a:solidFill>
+            <a:srgbClr val="E0463A"/>
+          </a:solidFill>
+          <a:ln>
+            <a:noFill/>
+          </a:ln>
+          <a:effectLst/>
+        </p:spPr>
+        <p:style>
+          <a:lnRef idx="1">
+            <a:schemeClr val="accent1"/>
+          </a:lnRef>
+          <a:fillRef idx="3">
+            <a:schemeClr val="accent1"/>
+          </a:fillRef>
+          <a:effectRef idx="2">
+            <a:schemeClr val="accent1"/>
+          </a:effectRef>
+          <a:fontRef idx="minor">
+            <a:schemeClr val="lt1"/>
+          </a:fontRef>
+        </p:style>
+        <p:txBody>
+          <a:bodyPr rtlCol="0" anchor="ctr" lIns="0" rIns="0" tIns="0" bIns="0"/>
+          <a:lstStyle/>
+          <a:p>
+            <a:pPr algn="ctr"/>
+            <a:r>
+              <a:rPr sz="1700" b="1">
+                <a:solidFill>
+                  <a:srgbClr val="FFFFFF"/>
+                </a:solidFill>
+                <a:latin typeface="Calibri"/>
+              </a:rPr>
+              <a:t>3</a:t>
+            </a:r>
+          </a:p>
+        </p:txBody>
+      </p:sp>
+      <p:sp>
+        <p:nvSpPr>
+          <p:cNvPr id="9" name="TextBox 8"/>
+          <p:cNvSpPr txBox="1"/>
+          <p:nvPr/>
+        </p:nvSpPr>
+        <p:spPr>
+          <a:xfrm>
+            <a:off x="1325880" y="3566160"/>
+            <a:ext cx="6583680" cy="822960"/>
+          </a:xfrm>
+          <a:prstGeom prst="rect">
+            <a:avLst/>
+          </a:prstGeom>
+          <a:noFill/>
+        </p:spPr>
+        <p:txBody>
+          <a:bodyPr wrap="square" anchor="ctr" lIns="0" rIns="0" tIns="0" bIns="0"/>
+          <a:lstStyle/>
+          <a:p>
+            <a:pPr algn="l"/>
+            <a:r>
+              <a:rPr sz="2000" b="0" i="0">
+                <a:solidFill>
+                  <a:srgbClr val="FFFFFF"/>
+                </a:solidFill>
+                <a:latin typeface="Calibri"/>
+              </a:rPr>
+              <a:t>Why choose a polymer over a metal?</a:t>
+            </a:r>
+          </a:p>
+        </p:txBody>
+      </p:sp>
+      <p:sp>
+        <p:nvSpPr>
+          <p:cNvPr id="10" name="Rounded Rectangle 9"/>
+          <p:cNvSpPr/>
+          <p:nvPr/>
+        </p:nvSpPr>
+        <p:spPr>
+          <a:xfrm>
+            <a:off x="8229600" y="1645920"/>
+            <a:ext cx="3410712" cy="2926080"/>
+          </a:xfrm>
+          <a:prstGeom prst="roundRect">
+            <a:avLst>
+              <a:gd name="adj" fmla="val 8000"/>
+            </a:avLst>
+          </a:prstGeom>
+          <a:solidFill>
+            <a:srgbClr val="0645AD"/>
+          </a:solidFill>
+          <a:ln>
+            <a:noFill/>
+          </a:ln>
+          <a:effectLst/>
+        </p:spPr>
+        <p:style>
+          <a:lnRef idx="1">
+            <a:schemeClr val="accent1"/>
+          </a:lnRef>
+          <a:fillRef idx="3">
+            <a:schemeClr val="accent1"/>
+          </a:fillRef>
+          <a:effectRef idx="2">
+            <a:schemeClr val="accent1"/>
+          </a:effectRef>
+          <a:fontRef idx="minor">
+            <a:schemeClr val="lt1"/>
+          </a:fontRef>
+        </p:style>
+        <p:txBody>
+          <a:bodyPr rtlCol="0" anchor="ctr"/>
+          <a:lstStyle/>
+          <a:p/>
+        </p:txBody>
+      </p:sp>
+      <p:sp>
+        <p:nvSpPr>
+          <p:cNvPr id="11" name="TextBox 10"/>
+          <p:cNvSpPr txBox="1"/>
+          <p:nvPr/>
+        </p:nvSpPr>
+        <p:spPr>
+          <a:xfrm>
+            <a:off x="8503920" y="1874519"/>
+            <a:ext cx="2926080" cy="365760"/>
+          </a:xfrm>
+          <a:prstGeom prst="rect">
+            <a:avLst/>
+          </a:prstGeom>
+          <a:noFill/>
+        </p:spPr>
+        <p:txBody>
+          <a:bodyPr wrap="square" anchor="t" lIns="0" rIns="0" tIns="0" bIns="0"/>
+          <a:lstStyle/>
+          <a:p>
+            <a:pPr algn="l"/>
+            <a:r>
+              <a:rPr sz="1300" b="1" i="0">
+                <a:solidFill>
+                  <a:srgbClr val="A9C8F0"/>
+                </a:solidFill>
+                <a:latin typeface="Calibri"/>
+              </a:rPr>
+              <a:t>REVISE THIS TOPIC</a:t>
+            </a:r>
+          </a:p>
+        </p:txBody>
+      </p:sp>
+      <p:sp>
+        <p:nvSpPr>
+          <p:cNvPr id="12" name="TextBox 11"/>
+          <p:cNvSpPr txBox="1"/>
+          <p:nvPr/>
+        </p:nvSpPr>
+        <p:spPr>
+          <a:xfrm>
+            <a:off x="8503920" y="2286000"/>
+            <a:ext cx="2926080" cy="548640"/>
+          </a:xfrm>
+          <a:prstGeom prst="rect">
+            <a:avLst/>
+          </a:prstGeom>
+          <a:noFill/>
+        </p:spPr>
+        <p:txBody>
+          <a:bodyPr wrap="square" anchor="t" lIns="0" rIns="0" tIns="0" bIns="0"/>
+          <a:lstStyle/>
+          <a:p>
+            <a:pPr algn="l"/>
+            <a:r>
+              <a:rPr sz="1400" b="0" i="0">
+                <a:solidFill>
+                  <a:srgbClr val="FFFFFF"/>
+                </a:solidFill>
+                <a:latin typeface="Calibri"/>
+              </a:rPr>
+              <a:t>Revision notes for this lesson are on the study wiki:</a:t>
+            </a:r>
+          </a:p>
+        </p:txBody>
+      </p:sp>
+      <p:sp>
+        <p:nvSpPr>
+          <p:cNvPr id="13" name="TextBox 12"/>
+          <p:cNvSpPr txBox="1"/>
+          <p:nvPr/>
+        </p:nvSpPr>
+        <p:spPr>
+          <a:xfrm>
+            <a:off x="8503920" y="2926080"/>
+            <a:ext cx="2926080" cy="1463040"/>
+          </a:xfrm>
+          <a:prstGeom prst="rect">
+            <a:avLst/>
+          </a:prstGeom>
+          <a:noFill/>
+        </p:spPr>
+        <p:txBody>
+          <a:bodyPr wrap="square" anchor="t" lIns="0" rIns="0" tIns="0" bIns="0"/>
+          <a:lstStyle/>
+          <a:p>
+            <a:pPr algn="l"/>
+            <a:r>
+              <a:rPr sz="2000" b="1" i="0">
+                <a:solidFill>
+                  <a:srgbClr val="FFFFFF"/>
+                </a:solidFill>
+                <a:latin typeface="Cambria"/>
+              </a:rPr>
+              <a:t>Knowledge Criteria</a:t>
+            </a:r>
+          </a:p>
+        </p:txBody>
+      </p:sp>
+      <p:sp>
+        <p:nvSpPr>
+          <p:cNvPr id="14" name="TextBox 13"/>
+          <p:cNvSpPr txBox="1"/>
+          <p:nvPr/>
+        </p:nvSpPr>
+        <p:spPr>
+          <a:xfrm>
+            <a:off x="548640" y="5669280"/>
+            <a:ext cx="11094415" cy="548640"/>
+          </a:xfrm>
+          <a:prstGeom prst="rect">
+            <a:avLst/>
+          </a:prstGeom>
+          <a:noFill/>
+        </p:spPr>
+        <p:txBody>
+          <a:bodyPr wrap="square" anchor="t" lIns="0" rIns="0" tIns="0" bIns="0"/>
+          <a:lstStyle/>
+          <a:p>
+            <a:pPr algn="l"/>
+            <a:r>
+              <a:rPr sz="1200" b="0" i="0">
+                <a:solidFill>
+                  <a:srgbClr val="A9C8F0"/>
+                </a:solidFill>
+                <a:latin typeface="Calibri"/>
+              </a:rPr>
+              <a:t>https://lana6478.github.io/T-level-Design-Development-Engineering-Manufacturing/#/02-occupational-specialism/01-knowledge-criteria.md</a:t>
+            </a:r>
+          </a:p>
+        </p:txBody>
+      </p:sp>
+    </p:spTree>
+  </p:cSld>
+  <p:clrMapOvr>
+    <a:masterClrMapping/>
+  </p:clrMapOvr>
+</p:sld>
+</file>
+
 <file path=ppt/slides/slide2.xml><?xml version="1.0" encoding="utf-8"?>
 <p:sld xmlns:a="http://schemas.openxmlformats.org/drawingml/2006/main" xmlns:p="http://schemas.openxmlformats.org/presentationml/2006/main" xmlns:r="http://schemas.openxmlformats.org/officeDocument/2006/relationships">
   <p:cSld>
@@ -4842,22 +7365,93 @@
       </p:sp>
       <p:sp>
         <p:nvSpPr>
-          <p:cNvPr id="6" name="Rounded Rectangle 5"/>
+          <p:cNvPr id="6" name="TextBox 5"/>
+          <p:cNvSpPr txBox="1"/>
+          <p:nvPr/>
+        </p:nvSpPr>
+        <p:spPr>
+          <a:xfrm>
+            <a:off x="548640" y="1554480"/>
+            <a:ext cx="6720840" cy="4617720"/>
+          </a:xfrm>
+          <a:prstGeom prst="rect">
+            <a:avLst/>
+          </a:prstGeom>
+          <a:noFill/>
+        </p:spPr>
+        <p:txBody>
+          <a:bodyPr wrap="square" lIns="0" rIns="0" tIns="0" bIns="0">
+            <a:spAutoFit/>
+          </a:bodyPr>
+          <a:lstStyle/>
+          <a:p>
+            <a:pPr>
+              <a:spcAft>
+                <a:spcPts val="1320"/>
+              </a:spcAft>
+            </a:pPr>
+            <a:r>
+              <a:rPr sz="2200" b="0">
+                <a:solidFill>
+                  <a:srgbClr val="202122"/>
+                </a:solidFill>
+                <a:latin typeface="Calibri"/>
+              </a:rPr>
+              <a:t>Choose materials for fitness for purpose (the properties the function needs), availability (standard stock sizes and lead times), risk (the consequences if it fails) and a factor of safety.</a:t>
+            </a:r>
+          </a:p>
+          <a:p>
+            <a:pPr>
+              <a:spcAft>
+                <a:spcPts val="1320"/>
+              </a:spcAft>
+            </a:pPr>
+            <a:r>
+              <a:rPr sz="2200" b="0">
+                <a:solidFill>
+                  <a:srgbClr val="202122"/>
+                </a:solidFill>
+                <a:latin typeface="Calibri"/>
+              </a:rPr>
+              <a:t>A factor of safety designs a part to be stronger than the expected load. A factor of 2 means it could carry twice the working load. Higher factors are used where failure would be dangerous or loads are uncertain.</a:t>
+            </a:r>
+          </a:p>
+          <a:p>
+            <a:pPr>
+              <a:spcAft>
+                <a:spcPts val="1320"/>
+              </a:spcAft>
+            </a:pPr>
+            <a:r>
+              <a:rPr sz="2200" b="0">
+                <a:solidFill>
+                  <a:srgbClr val="202122"/>
+                </a:solidFill>
+                <a:latin typeface="Calibri"/>
+              </a:rPr>
+              <a:t>Material families range from ferrous and non-ferrous metals to thermoplastics, thermosets, elastomers, composites, ceramics and smart materials.</a:t>
+            </a:r>
+          </a:p>
+        </p:txBody>
+      </p:sp>
+      <p:sp>
+        <p:nvSpPr>
+          <p:cNvPr id="7" name="Rounded Rectangle 6"/>
           <p:cNvSpPr/>
           <p:nvPr/>
         </p:nvSpPr>
         <p:spPr>
           <a:xfrm>
-            <a:off x="548640" y="1600200"/>
-            <a:ext cx="5410047" cy="2148840"/>
+            <a:off x="7772400" y="1554480"/>
+            <a:ext cx="3867912" cy="4526280"/>
           </a:xfrm>
           <a:prstGeom prst="roundRect">
             <a:avLst>
-              <a:gd name="adj" fmla="val 6000"/>
+              <a:gd name="adj" fmla="val 8000"/>
             </a:avLst>
           </a:prstGeom>
           <a:solidFill>
-            <a:srgbClr val="EAF3FF"/>
+            <a:srgbClr val="03306E"/>
           </a:solidFill>
           <a:ln>
             <a:noFill/>
@@ -4886,14 +7480,14 @@
       </p:sp>
       <p:sp>
         <p:nvSpPr>
-          <p:cNvPr id="7" name="Oval 6"/>
+          <p:cNvPr id="8" name="Oval 7"/>
           <p:cNvSpPr/>
           <p:nvPr/>
         </p:nvSpPr>
         <p:spPr>
           <a:xfrm>
-            <a:off x="777240" y="1828800"/>
-            <a:ext cx="457200" cy="457200"/>
+            <a:off x="8046720" y="1828800"/>
+            <a:ext cx="548640" cy="548640"/>
           </a:xfrm>
           <a:prstGeom prst="ellipse">
             <a:avLst/>
@@ -4926,46 +7520,13 @@
           <a:p>
             <a:pPr algn="ctr"/>
             <a:r>
-              <a:rPr sz="1500" b="1">
+              <a:rPr sz="1300" b="1">
                 <a:solidFill>
                   <a:srgbClr val="FFFFFF"/>
                 </a:solidFill>
                 <a:latin typeface="Calibri"/>
               </a:rPr>
-              <a:t>1</a:t>
-            </a:r>
-          </a:p>
-        </p:txBody>
-      </p:sp>
-      <p:sp>
-        <p:nvSpPr>
-          <p:cNvPr id="8" name="TextBox 7"/>
-          <p:cNvSpPr txBox="1"/>
-          <p:nvPr/>
-        </p:nvSpPr>
-        <p:spPr>
-          <a:xfrm>
-            <a:off x="1371600" y="1801368"/>
-            <a:ext cx="4404207" cy="512064"/>
-          </a:xfrm>
-          <a:prstGeom prst="rect">
-            <a:avLst/>
-          </a:prstGeom>
-          <a:noFill/>
-        </p:spPr>
-        <p:txBody>
-          <a:bodyPr wrap="square" anchor="ctr" lIns="0" rIns="0" tIns="0" bIns="0"/>
-          <a:lstStyle/>
-          <a:p>
-            <a:pPr algn="l"/>
-            <a:r>
-              <a:rPr sz="1900" b="1" i="0">
-                <a:solidFill>
-                  <a:srgbClr val="03306E"/>
-                </a:solidFill>
-                <a:latin typeface="Calibri"/>
-              </a:rPr>
-              <a:t>Fitness for purpose</a:t>
+              <a:t>e.g.</a:t>
             </a:r>
           </a:p>
         </p:txBody>
@@ -4978,8 +7539,8 @@
         </p:nvSpPr>
         <p:spPr>
           <a:xfrm>
-            <a:off x="777240" y="2468880"/>
-            <a:ext cx="4952847" cy="1143000"/>
+            <a:off x="8046720" y="2560320"/>
+            <a:ext cx="3291840" cy="365760"/>
           </a:xfrm>
           <a:prstGeom prst="rect">
             <a:avLst/>
@@ -4992,502 +7553,46 @@
           <a:p>
             <a:pPr algn="l"/>
             <a:r>
-              <a:rPr sz="2000" b="0" i="0">
-                <a:solidFill>
-                  <a:srgbClr val="202122"/>
-                </a:solidFill>
-                <a:latin typeface="Calibri"/>
-              </a:rPr>
-              <a:t>Properties that meet the function.</a:t>
-            </a:r>
-          </a:p>
-        </p:txBody>
-      </p:sp>
-      <p:sp>
-        <p:nvSpPr>
-          <p:cNvPr id="10" name="Rounded Rectangle 9"/>
-          <p:cNvSpPr/>
-          <p:nvPr/>
-        </p:nvSpPr>
-        <p:spPr>
-          <a:xfrm>
-            <a:off x="6233007" y="1600200"/>
-            <a:ext cx="5410047" cy="2148840"/>
-          </a:xfrm>
-          <a:prstGeom prst="roundRect">
-            <a:avLst>
-              <a:gd name="adj" fmla="val 6000"/>
-            </a:avLst>
-          </a:prstGeom>
-          <a:solidFill>
-            <a:srgbClr val="EAF3FF"/>
-          </a:solidFill>
-          <a:ln>
-            <a:noFill/>
-          </a:ln>
-          <a:effectLst/>
-        </p:spPr>
-        <p:style>
-          <a:lnRef idx="1">
-            <a:schemeClr val="accent1"/>
-          </a:lnRef>
-          <a:fillRef idx="3">
-            <a:schemeClr val="accent1"/>
-          </a:fillRef>
-          <a:effectRef idx="2">
-            <a:schemeClr val="accent1"/>
-          </a:effectRef>
-          <a:fontRef idx="minor">
-            <a:schemeClr val="lt1"/>
-          </a:fontRef>
-        </p:style>
-        <p:txBody>
-          <a:bodyPr rtlCol="0" anchor="ctr"/>
-          <a:lstStyle/>
-          <a:p/>
-        </p:txBody>
-      </p:sp>
-      <p:sp>
-        <p:nvSpPr>
-          <p:cNvPr id="11" name="Oval 10"/>
-          <p:cNvSpPr/>
-          <p:nvPr/>
-        </p:nvSpPr>
-        <p:spPr>
-          <a:xfrm>
-            <a:off x="6461607" y="1828800"/>
-            <a:ext cx="457200" cy="457200"/>
-          </a:xfrm>
-          <a:prstGeom prst="ellipse">
-            <a:avLst/>
-          </a:prstGeom>
-          <a:solidFill>
-            <a:srgbClr val="E0463A"/>
-          </a:solidFill>
-          <a:ln>
-            <a:noFill/>
-          </a:ln>
-          <a:effectLst/>
-        </p:spPr>
-        <p:style>
-          <a:lnRef idx="1">
-            <a:schemeClr val="accent1"/>
-          </a:lnRef>
-          <a:fillRef idx="3">
-            <a:schemeClr val="accent1"/>
-          </a:fillRef>
-          <a:effectRef idx="2">
-            <a:schemeClr val="accent1"/>
-          </a:effectRef>
-          <a:fontRef idx="minor">
-            <a:schemeClr val="lt1"/>
-          </a:fontRef>
-        </p:style>
-        <p:txBody>
-          <a:bodyPr rtlCol="0" anchor="ctr" lIns="0" rIns="0" tIns="0" bIns="0"/>
-          <a:lstStyle/>
-          <a:p>
-            <a:pPr algn="ctr"/>
-            <a:r>
-              <a:rPr sz="1500" b="1">
+              <a:rPr sz="1300" b="1" i="0">
+                <a:solidFill>
+                  <a:srgbClr val="A9C8F0"/>
+                </a:solidFill>
+                <a:latin typeface="Calibri"/>
+              </a:rPr>
+              <a:t>EXAMPLE</a:t>
+            </a:r>
+          </a:p>
+        </p:txBody>
+      </p:sp>
+      <p:sp>
+        <p:nvSpPr>
+          <p:cNvPr id="10" name="TextBox 9"/>
+          <p:cNvSpPr txBox="1"/>
+          <p:nvPr/>
+        </p:nvSpPr>
+        <p:spPr>
+          <a:xfrm>
+            <a:off x="8046720" y="2971800"/>
+            <a:ext cx="3291840" cy="2971800"/>
+          </a:xfrm>
+          <a:prstGeom prst="rect">
+            <a:avLst/>
+          </a:prstGeom>
+          <a:noFill/>
+        </p:spPr>
+        <p:txBody>
+          <a:bodyPr wrap="square" anchor="t" lIns="0" rIns="0" tIns="0" bIns="0"/>
+          <a:lstStyle/>
+          <a:p>
+            <a:pPr algn="l"/>
+            <a:r>
+              <a:rPr sz="1900" b="0" i="0">
                 <a:solidFill>
                   <a:srgbClr val="FFFFFF"/>
                 </a:solidFill>
-                <a:latin typeface="Calibri"/>
-              </a:rPr>
-              <a:t>2</a:t>
-            </a:r>
-          </a:p>
-        </p:txBody>
-      </p:sp>
-      <p:sp>
-        <p:nvSpPr>
-          <p:cNvPr id="12" name="TextBox 11"/>
-          <p:cNvSpPr txBox="1"/>
-          <p:nvPr/>
-        </p:nvSpPr>
-        <p:spPr>
-          <a:xfrm>
-            <a:off x="7055967" y="1801368"/>
-            <a:ext cx="4404207" cy="512064"/>
-          </a:xfrm>
-          <a:prstGeom prst="rect">
-            <a:avLst/>
-          </a:prstGeom>
-          <a:noFill/>
-        </p:spPr>
-        <p:txBody>
-          <a:bodyPr wrap="square" anchor="ctr" lIns="0" rIns="0" tIns="0" bIns="0"/>
-          <a:lstStyle/>
-          <a:p>
-            <a:pPr algn="l"/>
-            <a:r>
-              <a:rPr sz="1900" b="1" i="0">
-                <a:solidFill>
-                  <a:srgbClr val="03306E"/>
-                </a:solidFill>
-                <a:latin typeface="Calibri"/>
-              </a:rPr>
-              <a:t>Availability</a:t>
-            </a:r>
-          </a:p>
-        </p:txBody>
-      </p:sp>
-      <p:sp>
-        <p:nvSpPr>
-          <p:cNvPr id="13" name="TextBox 12"/>
-          <p:cNvSpPr txBox="1"/>
-          <p:nvPr/>
-        </p:nvSpPr>
-        <p:spPr>
-          <a:xfrm>
-            <a:off x="6461607" y="2468880"/>
-            <a:ext cx="4952847" cy="1143000"/>
-          </a:xfrm>
-          <a:prstGeom prst="rect">
-            <a:avLst/>
-          </a:prstGeom>
-          <a:noFill/>
-        </p:spPr>
-        <p:txBody>
-          <a:bodyPr wrap="square" anchor="t" lIns="0" rIns="0" tIns="0" bIns="0"/>
-          <a:lstStyle/>
-          <a:p>
-            <a:pPr algn="l"/>
-            <a:r>
-              <a:rPr sz="2000" b="0" i="0">
-                <a:solidFill>
-                  <a:srgbClr val="202122"/>
-                </a:solidFill>
-                <a:latin typeface="Calibri"/>
-              </a:rPr>
-              <a:t>Standard stock forms and lead times.</a:t>
-            </a:r>
-          </a:p>
-        </p:txBody>
-      </p:sp>
-      <p:sp>
-        <p:nvSpPr>
-          <p:cNvPr id="14" name="Rounded Rectangle 13"/>
-          <p:cNvSpPr/>
-          <p:nvPr/>
-        </p:nvSpPr>
-        <p:spPr>
-          <a:xfrm>
-            <a:off x="548640" y="4023360"/>
-            <a:ext cx="5410047" cy="2148840"/>
-          </a:xfrm>
-          <a:prstGeom prst="roundRect">
-            <a:avLst>
-              <a:gd name="adj" fmla="val 6000"/>
-            </a:avLst>
-          </a:prstGeom>
-          <a:solidFill>
-            <a:srgbClr val="EAF3FF"/>
-          </a:solidFill>
-          <a:ln>
-            <a:noFill/>
-          </a:ln>
-          <a:effectLst/>
-        </p:spPr>
-        <p:style>
-          <a:lnRef idx="1">
-            <a:schemeClr val="accent1"/>
-          </a:lnRef>
-          <a:fillRef idx="3">
-            <a:schemeClr val="accent1"/>
-          </a:fillRef>
-          <a:effectRef idx="2">
-            <a:schemeClr val="accent1"/>
-          </a:effectRef>
-          <a:fontRef idx="minor">
-            <a:schemeClr val="lt1"/>
-          </a:fontRef>
-        </p:style>
-        <p:txBody>
-          <a:bodyPr rtlCol="0" anchor="ctr"/>
-          <a:lstStyle/>
-          <a:p/>
-        </p:txBody>
-      </p:sp>
-      <p:sp>
-        <p:nvSpPr>
-          <p:cNvPr id="15" name="Oval 14"/>
-          <p:cNvSpPr/>
-          <p:nvPr/>
-        </p:nvSpPr>
-        <p:spPr>
-          <a:xfrm>
-            <a:off x="777240" y="4251960"/>
-            <a:ext cx="457200" cy="457200"/>
-          </a:xfrm>
-          <a:prstGeom prst="ellipse">
-            <a:avLst/>
-          </a:prstGeom>
-          <a:solidFill>
-            <a:srgbClr val="E0463A"/>
-          </a:solidFill>
-          <a:ln>
-            <a:noFill/>
-          </a:ln>
-          <a:effectLst/>
-        </p:spPr>
-        <p:style>
-          <a:lnRef idx="1">
-            <a:schemeClr val="accent1"/>
-          </a:lnRef>
-          <a:fillRef idx="3">
-            <a:schemeClr val="accent1"/>
-          </a:fillRef>
-          <a:effectRef idx="2">
-            <a:schemeClr val="accent1"/>
-          </a:effectRef>
-          <a:fontRef idx="minor">
-            <a:schemeClr val="lt1"/>
-          </a:fontRef>
-        </p:style>
-        <p:txBody>
-          <a:bodyPr rtlCol="0" anchor="ctr" lIns="0" rIns="0" tIns="0" bIns="0"/>
-          <a:lstStyle/>
-          <a:p>
-            <a:pPr algn="ctr"/>
-            <a:r>
-              <a:rPr sz="1500" b="1">
-                <a:solidFill>
-                  <a:srgbClr val="FFFFFF"/>
-                </a:solidFill>
-                <a:latin typeface="Calibri"/>
-              </a:rPr>
-              <a:t>3</a:t>
-            </a:r>
-          </a:p>
-        </p:txBody>
-      </p:sp>
-      <p:sp>
-        <p:nvSpPr>
-          <p:cNvPr id="16" name="TextBox 15"/>
-          <p:cNvSpPr txBox="1"/>
-          <p:nvPr/>
-        </p:nvSpPr>
-        <p:spPr>
-          <a:xfrm>
-            <a:off x="1371600" y="4224528"/>
-            <a:ext cx="4404207" cy="512064"/>
-          </a:xfrm>
-          <a:prstGeom prst="rect">
-            <a:avLst/>
-          </a:prstGeom>
-          <a:noFill/>
-        </p:spPr>
-        <p:txBody>
-          <a:bodyPr wrap="square" anchor="ctr" lIns="0" rIns="0" tIns="0" bIns="0"/>
-          <a:lstStyle/>
-          <a:p>
-            <a:pPr algn="l"/>
-            <a:r>
-              <a:rPr sz="1900" b="1" i="0">
-                <a:solidFill>
-                  <a:srgbClr val="03306E"/>
-                </a:solidFill>
-                <a:latin typeface="Calibri"/>
-              </a:rPr>
-              <a:t>Risk</a:t>
-            </a:r>
-          </a:p>
-        </p:txBody>
-      </p:sp>
-      <p:sp>
-        <p:nvSpPr>
-          <p:cNvPr id="17" name="TextBox 16"/>
-          <p:cNvSpPr txBox="1"/>
-          <p:nvPr/>
-        </p:nvSpPr>
-        <p:spPr>
-          <a:xfrm>
-            <a:off x="777240" y="4892040"/>
-            <a:ext cx="4952847" cy="1143000"/>
-          </a:xfrm>
-          <a:prstGeom prst="rect">
-            <a:avLst/>
-          </a:prstGeom>
-          <a:noFill/>
-        </p:spPr>
-        <p:txBody>
-          <a:bodyPr wrap="square" anchor="t" lIns="0" rIns="0" tIns="0" bIns="0"/>
-          <a:lstStyle/>
-          <a:p>
-            <a:pPr algn="l"/>
-            <a:r>
-              <a:rPr sz="2000" b="0" i="0">
-                <a:solidFill>
-                  <a:srgbClr val="202122"/>
-                </a:solidFill>
-                <a:latin typeface="Calibri"/>
-              </a:rPr>
-              <a:t>Consequences if it fails.</a:t>
-            </a:r>
-          </a:p>
-        </p:txBody>
-      </p:sp>
-      <p:sp>
-        <p:nvSpPr>
-          <p:cNvPr id="18" name="Rounded Rectangle 17"/>
-          <p:cNvSpPr/>
-          <p:nvPr/>
-        </p:nvSpPr>
-        <p:spPr>
-          <a:xfrm>
-            <a:off x="6233007" y="4023360"/>
-            <a:ext cx="5410047" cy="2148840"/>
-          </a:xfrm>
-          <a:prstGeom prst="roundRect">
-            <a:avLst>
-              <a:gd name="adj" fmla="val 6000"/>
-            </a:avLst>
-          </a:prstGeom>
-          <a:solidFill>
-            <a:srgbClr val="EAF3FF"/>
-          </a:solidFill>
-          <a:ln>
-            <a:noFill/>
-          </a:ln>
-          <a:effectLst/>
-        </p:spPr>
-        <p:style>
-          <a:lnRef idx="1">
-            <a:schemeClr val="accent1"/>
-          </a:lnRef>
-          <a:fillRef idx="3">
-            <a:schemeClr val="accent1"/>
-          </a:fillRef>
-          <a:effectRef idx="2">
-            <a:schemeClr val="accent1"/>
-          </a:effectRef>
-          <a:fontRef idx="minor">
-            <a:schemeClr val="lt1"/>
-          </a:fontRef>
-        </p:style>
-        <p:txBody>
-          <a:bodyPr rtlCol="0" anchor="ctr"/>
-          <a:lstStyle/>
-          <a:p/>
-        </p:txBody>
-      </p:sp>
-      <p:sp>
-        <p:nvSpPr>
-          <p:cNvPr id="19" name="Oval 18"/>
-          <p:cNvSpPr/>
-          <p:nvPr/>
-        </p:nvSpPr>
-        <p:spPr>
-          <a:xfrm>
-            <a:off x="6461607" y="4251960"/>
-            <a:ext cx="457200" cy="457200"/>
-          </a:xfrm>
-          <a:prstGeom prst="ellipse">
-            <a:avLst/>
-          </a:prstGeom>
-          <a:solidFill>
-            <a:srgbClr val="E0463A"/>
-          </a:solidFill>
-          <a:ln>
-            <a:noFill/>
-          </a:ln>
-          <a:effectLst/>
-        </p:spPr>
-        <p:style>
-          <a:lnRef idx="1">
-            <a:schemeClr val="accent1"/>
-          </a:lnRef>
-          <a:fillRef idx="3">
-            <a:schemeClr val="accent1"/>
-          </a:fillRef>
-          <a:effectRef idx="2">
-            <a:schemeClr val="accent1"/>
-          </a:effectRef>
-          <a:fontRef idx="minor">
-            <a:schemeClr val="lt1"/>
-          </a:fontRef>
-        </p:style>
-        <p:txBody>
-          <a:bodyPr rtlCol="0" anchor="ctr" lIns="0" rIns="0" tIns="0" bIns="0"/>
-          <a:lstStyle/>
-          <a:p>
-            <a:pPr algn="ctr"/>
-            <a:r>
-              <a:rPr sz="1500" b="1">
-                <a:solidFill>
-                  <a:srgbClr val="FFFFFF"/>
-                </a:solidFill>
-                <a:latin typeface="Calibri"/>
-              </a:rPr>
-              <a:t>4</a:t>
-            </a:r>
-          </a:p>
-        </p:txBody>
-      </p:sp>
-      <p:sp>
-        <p:nvSpPr>
-          <p:cNvPr id="20" name="TextBox 19"/>
-          <p:cNvSpPr txBox="1"/>
-          <p:nvPr/>
-        </p:nvSpPr>
-        <p:spPr>
-          <a:xfrm>
-            <a:off x="7055967" y="4224528"/>
-            <a:ext cx="4404207" cy="512064"/>
-          </a:xfrm>
-          <a:prstGeom prst="rect">
-            <a:avLst/>
-          </a:prstGeom>
-          <a:noFill/>
-        </p:spPr>
-        <p:txBody>
-          <a:bodyPr wrap="square" anchor="ctr" lIns="0" rIns="0" tIns="0" bIns="0"/>
-          <a:lstStyle/>
-          <a:p>
-            <a:pPr algn="l"/>
-            <a:r>
-              <a:rPr sz="1900" b="1" i="0">
-                <a:solidFill>
-                  <a:srgbClr val="03306E"/>
-                </a:solidFill>
-                <a:latin typeface="Calibri"/>
-              </a:rPr>
-              <a:t>Factor of safety</a:t>
-            </a:r>
-          </a:p>
-        </p:txBody>
-      </p:sp>
-      <p:sp>
-        <p:nvSpPr>
-          <p:cNvPr id="21" name="TextBox 20"/>
-          <p:cNvSpPr txBox="1"/>
-          <p:nvPr/>
-        </p:nvSpPr>
-        <p:spPr>
-          <a:xfrm>
-            <a:off x="6461607" y="4892040"/>
-            <a:ext cx="4952847" cy="1143000"/>
-          </a:xfrm>
-          <a:prstGeom prst="rect">
-            <a:avLst/>
-          </a:prstGeom>
-          <a:noFill/>
-        </p:spPr>
-        <p:txBody>
-          <a:bodyPr wrap="square" anchor="t" lIns="0" rIns="0" tIns="0" bIns="0"/>
-          <a:lstStyle/>
-          <a:p>
-            <a:pPr algn="l"/>
-            <a:r>
-              <a:rPr sz="2000" b="0" i="0">
-                <a:solidFill>
-                  <a:srgbClr val="202122"/>
-                </a:solidFill>
-                <a:latin typeface="Calibri"/>
-              </a:rPr>
-              <a:t>Design for more load than expected, e.g. 2 x the working load.</a:t>
+                <a:latin typeface="Cambria"/>
+              </a:rPr>
+              <a:t>A lifting hook rated for 1 tonne with a factor of safety of 5 is designed not to fail below 5 tonnes.</a:t>
             </a:r>
           </a:p>
         </p:txBody>
@@ -5579,7 +7684,7 @@
                 </a:solidFill>
                 <a:latin typeface="Cambria"/>
               </a:rPr>
-              <a:t>Standard parts</a:t>
+              <a:t>Choosing materials</a:t>
             </a:r>
           </a:p>
         </p:txBody>
@@ -5652,138 +7757,22 @@
       </p:sp>
       <p:sp>
         <p:nvSpPr>
-          <p:cNvPr id="6" name="TextBox 5"/>
-          <p:cNvSpPr txBox="1"/>
+          <p:cNvPr id="6" name="Rounded Rectangle 5"/>
+          <p:cNvSpPr/>
           <p:nvPr/>
         </p:nvSpPr>
         <p:spPr>
           <a:xfrm>
             <a:off x="548640" y="1600200"/>
-            <a:ext cx="6675120" cy="4572000"/>
-          </a:xfrm>
-          <a:prstGeom prst="rect">
-            <a:avLst/>
-          </a:prstGeom>
-          <a:noFill/>
-        </p:spPr>
-        <p:txBody>
-          <a:bodyPr wrap="square" lIns="0" rIns="0" tIns="0" bIns="0">
-            <a:spAutoFit/>
-          </a:bodyPr>
-          <a:lstStyle/>
-          <a:p>
-            <a:pPr marL="274320" indent="-274320">
-              <a:spcAft>
-                <a:spcPts val="1080"/>
-              </a:spcAft>
-              <a:buClr>
-                <a:srgbClr val="0645AD"/>
-              </a:buClr>
-              <a:buFont typeface="Arial"/>
-              <a:buChar char="•"/>
-            </a:pPr>
-            <a:r>
-              <a:rPr sz="2400" b="1">
-                <a:solidFill>
-                  <a:srgbClr val="202122"/>
-                </a:solidFill>
-                <a:latin typeface="Calibri"/>
-              </a:rPr>
-              <a:t>Examples:</a:t>
-            </a:r>
-            <a:r>
-              <a:rPr sz="2400" b="0">
-                <a:solidFill>
-                  <a:srgbClr val="202122"/>
-                </a:solidFill>
-                <a:latin typeface="Calibri"/>
-              </a:rPr>
-              <a:t> valves, sensors, piping, supports and fittings.</a:t>
-            </a:r>
-          </a:p>
-          <a:p>
-            <a:pPr marL="274320" indent="-274320">
-              <a:spcAft>
-                <a:spcPts val="1080"/>
-              </a:spcAft>
-              <a:buClr>
-                <a:srgbClr val="0645AD"/>
-              </a:buClr>
-              <a:buFont typeface="Arial"/>
-              <a:buChar char="•"/>
-            </a:pPr>
-            <a:r>
-              <a:rPr sz="2400" b="0">
-                <a:solidFill>
-                  <a:srgbClr val="202122"/>
-                </a:solidFill>
-                <a:latin typeface="Calibri"/>
-              </a:rPr>
-              <a:t>Cheaper than making your own.</a:t>
-            </a:r>
-          </a:p>
-          <a:p>
-            <a:pPr marL="274320" indent="-274320">
-              <a:spcAft>
-                <a:spcPts val="1080"/>
-              </a:spcAft>
-              <a:buClr>
-                <a:srgbClr val="0645AD"/>
-              </a:buClr>
-              <a:buFont typeface="Arial"/>
-              <a:buChar char="•"/>
-            </a:pPr>
-            <a:r>
-              <a:rPr sz="2400" b="0">
-                <a:solidFill>
-                  <a:srgbClr val="202122"/>
-                </a:solidFill>
-                <a:latin typeface="Calibri"/>
-              </a:rPr>
-              <a:t>Proven quality and known performance.</a:t>
-            </a:r>
-          </a:p>
-          <a:p>
-            <a:pPr marL="274320" indent="-274320">
-              <a:spcAft>
-                <a:spcPts val="1080"/>
-              </a:spcAft>
-              <a:buClr>
-                <a:srgbClr val="0645AD"/>
-              </a:buClr>
-              <a:buFont typeface="Arial"/>
-              <a:buChar char="•"/>
-            </a:pPr>
-            <a:r>
-              <a:rPr sz="2400" b="0">
-                <a:solidFill>
-                  <a:srgbClr val="202122"/>
-                </a:solidFill>
-                <a:latin typeface="Calibri"/>
-              </a:rPr>
-              <a:t>Easy to replace and source.</a:t>
-            </a:r>
-          </a:p>
-        </p:txBody>
-      </p:sp>
-      <p:sp>
-        <p:nvSpPr>
-          <p:cNvPr id="7" name="Rounded Rectangle 6"/>
-          <p:cNvSpPr/>
-          <p:nvPr/>
-        </p:nvSpPr>
-        <p:spPr>
-          <a:xfrm>
-            <a:off x="7772400" y="1600200"/>
-            <a:ext cx="3867912" cy="4434840"/>
+            <a:ext cx="5410047" cy="2148840"/>
           </a:xfrm>
           <a:prstGeom prst="roundRect">
             <a:avLst>
-              <a:gd name="adj" fmla="val 8000"/>
+              <a:gd name="adj" fmla="val 6000"/>
             </a:avLst>
           </a:prstGeom>
           <a:solidFill>
-            <a:srgbClr val="03306E"/>
+            <a:srgbClr val="EAF3FF"/>
           </a:solidFill>
           <a:ln>
             <a:noFill/>
@@ -5812,14 +7801,14 @@
       </p:sp>
       <p:sp>
         <p:nvSpPr>
-          <p:cNvPr id="8" name="Oval 7"/>
+          <p:cNvPr id="7" name="Oval 6"/>
           <p:cNvSpPr/>
           <p:nvPr/>
         </p:nvSpPr>
         <p:spPr>
           <a:xfrm>
-            <a:off x="8046720" y="1874519"/>
-            <a:ext cx="548640" cy="548640"/>
+            <a:off x="777240" y="1828800"/>
+            <a:ext cx="457200" cy="457200"/>
           </a:xfrm>
           <a:prstGeom prst="ellipse">
             <a:avLst/>
@@ -5852,13 +7841,46 @@
           <a:p>
             <a:pPr algn="ctr"/>
             <a:r>
-              <a:rPr sz="2000" b="1">
+              <a:rPr sz="1500" b="1">
                 <a:solidFill>
                   <a:srgbClr val="FFFFFF"/>
                 </a:solidFill>
                 <a:latin typeface="Calibri"/>
               </a:rPr>
-              <a:t>!</a:t>
+              <a:t>1</a:t>
+            </a:r>
+          </a:p>
+        </p:txBody>
+      </p:sp>
+      <p:sp>
+        <p:nvSpPr>
+          <p:cNvPr id="8" name="TextBox 7"/>
+          <p:cNvSpPr txBox="1"/>
+          <p:nvPr/>
+        </p:nvSpPr>
+        <p:spPr>
+          <a:xfrm>
+            <a:off x="1371600" y="1801368"/>
+            <a:ext cx="4404207" cy="512064"/>
+          </a:xfrm>
+          <a:prstGeom prst="rect">
+            <a:avLst/>
+          </a:prstGeom>
+          <a:noFill/>
+        </p:spPr>
+        <p:txBody>
+          <a:bodyPr wrap="square" anchor="ctr" lIns="0" rIns="0" tIns="0" bIns="0"/>
+          <a:lstStyle/>
+          <a:p>
+            <a:pPr algn="l"/>
+            <a:r>
+              <a:rPr sz="1900" b="1" i="0">
+                <a:solidFill>
+                  <a:srgbClr val="03306E"/>
+                </a:solidFill>
+                <a:latin typeface="Calibri"/>
+              </a:rPr>
+              <a:t>Fitness for purpose</a:t>
             </a:r>
           </a:p>
         </p:txBody>
@@ -5871,8 +7893,8 @@
         </p:nvSpPr>
         <p:spPr>
           <a:xfrm>
-            <a:off x="8046720" y="2606040"/>
-            <a:ext cx="3291840" cy="365760"/>
+            <a:off x="777240" y="2468880"/>
+            <a:ext cx="4952847" cy="1143000"/>
           </a:xfrm>
           <a:prstGeom prst="rect">
             <a:avLst/>
@@ -5885,27 +7907,124 @@
           <a:p>
             <a:pPr algn="l"/>
             <a:r>
-              <a:rPr sz="1300" b="1" i="0">
-                <a:solidFill>
-                  <a:srgbClr val="A9C8F0"/>
-                </a:solidFill>
-                <a:latin typeface="Calibri"/>
-              </a:rPr>
-              <a:t>KEY IDEA</a:t>
-            </a:r>
-          </a:p>
-        </p:txBody>
-      </p:sp>
-      <p:sp>
-        <p:nvSpPr>
-          <p:cNvPr id="10" name="TextBox 9"/>
+              <a:rPr sz="2000" b="0" i="0">
+                <a:solidFill>
+                  <a:srgbClr val="202122"/>
+                </a:solidFill>
+                <a:latin typeface="Calibri"/>
+              </a:rPr>
+              <a:t>Properties that meet the function.</a:t>
+            </a:r>
+          </a:p>
+        </p:txBody>
+      </p:sp>
+      <p:sp>
+        <p:nvSpPr>
+          <p:cNvPr id="10" name="Rounded Rectangle 9"/>
+          <p:cNvSpPr/>
+          <p:nvPr/>
+        </p:nvSpPr>
+        <p:spPr>
+          <a:xfrm>
+            <a:off x="6233007" y="1600200"/>
+            <a:ext cx="5410047" cy="2148840"/>
+          </a:xfrm>
+          <a:prstGeom prst="roundRect">
+            <a:avLst>
+              <a:gd name="adj" fmla="val 6000"/>
+            </a:avLst>
+          </a:prstGeom>
+          <a:solidFill>
+            <a:srgbClr val="EAF3FF"/>
+          </a:solidFill>
+          <a:ln>
+            <a:noFill/>
+          </a:ln>
+          <a:effectLst/>
+        </p:spPr>
+        <p:style>
+          <a:lnRef idx="1">
+            <a:schemeClr val="accent1"/>
+          </a:lnRef>
+          <a:fillRef idx="3">
+            <a:schemeClr val="accent1"/>
+          </a:fillRef>
+          <a:effectRef idx="2">
+            <a:schemeClr val="accent1"/>
+          </a:effectRef>
+          <a:fontRef idx="minor">
+            <a:schemeClr val="lt1"/>
+          </a:fontRef>
+        </p:style>
+        <p:txBody>
+          <a:bodyPr rtlCol="0" anchor="ctr"/>
+          <a:lstStyle/>
+          <a:p/>
+        </p:txBody>
+      </p:sp>
+      <p:sp>
+        <p:nvSpPr>
+          <p:cNvPr id="11" name="Oval 10"/>
+          <p:cNvSpPr/>
+          <p:nvPr/>
+        </p:nvSpPr>
+        <p:spPr>
+          <a:xfrm>
+            <a:off x="6461607" y="1828800"/>
+            <a:ext cx="457200" cy="457200"/>
+          </a:xfrm>
+          <a:prstGeom prst="ellipse">
+            <a:avLst/>
+          </a:prstGeom>
+          <a:solidFill>
+            <a:srgbClr val="E0463A"/>
+          </a:solidFill>
+          <a:ln>
+            <a:noFill/>
+          </a:ln>
+          <a:effectLst/>
+        </p:spPr>
+        <p:style>
+          <a:lnRef idx="1">
+            <a:schemeClr val="accent1"/>
+          </a:lnRef>
+          <a:fillRef idx="3">
+            <a:schemeClr val="accent1"/>
+          </a:fillRef>
+          <a:effectRef idx="2">
+            <a:schemeClr val="accent1"/>
+          </a:effectRef>
+          <a:fontRef idx="minor">
+            <a:schemeClr val="lt1"/>
+          </a:fontRef>
+        </p:style>
+        <p:txBody>
+          <a:bodyPr rtlCol="0" anchor="ctr" lIns="0" rIns="0" tIns="0" bIns="0"/>
+          <a:lstStyle/>
+          <a:p>
+            <a:pPr algn="ctr"/>
+            <a:r>
+              <a:rPr sz="1500" b="1">
+                <a:solidFill>
+                  <a:srgbClr val="FFFFFF"/>
+                </a:solidFill>
+                <a:latin typeface="Calibri"/>
+              </a:rPr>
+              <a:t>2</a:t>
+            </a:r>
+          </a:p>
+        </p:txBody>
+      </p:sp>
+      <p:sp>
+        <p:nvSpPr>
+          <p:cNvPr id="12" name="TextBox 11"/>
           <p:cNvSpPr txBox="1"/>
           <p:nvPr/>
         </p:nvSpPr>
         <p:spPr>
           <a:xfrm>
-            <a:off x="8046720" y="3017520"/>
-            <a:ext cx="3291840" cy="2926080"/>
+            <a:off x="7055967" y="1801368"/>
+            <a:ext cx="4404207" cy="512064"/>
           </a:xfrm>
           <a:prstGeom prst="rect">
             <a:avLst/>
@@ -5913,18 +8032,377 @@
           <a:noFill/>
         </p:spPr>
         <p:txBody>
+          <a:bodyPr wrap="square" anchor="ctr" lIns="0" rIns="0" tIns="0" bIns="0"/>
+          <a:lstStyle/>
+          <a:p>
+            <a:pPr algn="l"/>
+            <a:r>
+              <a:rPr sz="1900" b="1" i="0">
+                <a:solidFill>
+                  <a:srgbClr val="03306E"/>
+                </a:solidFill>
+                <a:latin typeface="Calibri"/>
+              </a:rPr>
+              <a:t>Availability</a:t>
+            </a:r>
+          </a:p>
+        </p:txBody>
+      </p:sp>
+      <p:sp>
+        <p:nvSpPr>
+          <p:cNvPr id="13" name="TextBox 12"/>
+          <p:cNvSpPr txBox="1"/>
+          <p:nvPr/>
+        </p:nvSpPr>
+        <p:spPr>
+          <a:xfrm>
+            <a:off x="6461607" y="2468880"/>
+            <a:ext cx="4952847" cy="1143000"/>
+          </a:xfrm>
+          <a:prstGeom prst="rect">
+            <a:avLst/>
+          </a:prstGeom>
+          <a:noFill/>
+        </p:spPr>
+        <p:txBody>
           <a:bodyPr wrap="square" anchor="t" lIns="0" rIns="0" tIns="0" bIns="0"/>
           <a:lstStyle/>
           <a:p>
             <a:pPr algn="l"/>
             <a:r>
-              <a:rPr sz="2200" b="0" i="0">
+              <a:rPr sz="2000" b="0" i="0">
+                <a:solidFill>
+                  <a:srgbClr val="202122"/>
+                </a:solidFill>
+                <a:latin typeface="Calibri"/>
+              </a:rPr>
+              <a:t>Standard stock forms and lead times.</a:t>
+            </a:r>
+          </a:p>
+        </p:txBody>
+      </p:sp>
+      <p:sp>
+        <p:nvSpPr>
+          <p:cNvPr id="14" name="Rounded Rectangle 13"/>
+          <p:cNvSpPr/>
+          <p:nvPr/>
+        </p:nvSpPr>
+        <p:spPr>
+          <a:xfrm>
+            <a:off x="548640" y="4023360"/>
+            <a:ext cx="5410047" cy="2148840"/>
+          </a:xfrm>
+          <a:prstGeom prst="roundRect">
+            <a:avLst>
+              <a:gd name="adj" fmla="val 6000"/>
+            </a:avLst>
+          </a:prstGeom>
+          <a:solidFill>
+            <a:srgbClr val="EAF3FF"/>
+          </a:solidFill>
+          <a:ln>
+            <a:noFill/>
+          </a:ln>
+          <a:effectLst/>
+        </p:spPr>
+        <p:style>
+          <a:lnRef idx="1">
+            <a:schemeClr val="accent1"/>
+          </a:lnRef>
+          <a:fillRef idx="3">
+            <a:schemeClr val="accent1"/>
+          </a:fillRef>
+          <a:effectRef idx="2">
+            <a:schemeClr val="accent1"/>
+          </a:effectRef>
+          <a:fontRef idx="minor">
+            <a:schemeClr val="lt1"/>
+          </a:fontRef>
+        </p:style>
+        <p:txBody>
+          <a:bodyPr rtlCol="0" anchor="ctr"/>
+          <a:lstStyle/>
+          <a:p/>
+        </p:txBody>
+      </p:sp>
+      <p:sp>
+        <p:nvSpPr>
+          <p:cNvPr id="15" name="Oval 14"/>
+          <p:cNvSpPr/>
+          <p:nvPr/>
+        </p:nvSpPr>
+        <p:spPr>
+          <a:xfrm>
+            <a:off x="777240" y="4251960"/>
+            <a:ext cx="457200" cy="457200"/>
+          </a:xfrm>
+          <a:prstGeom prst="ellipse">
+            <a:avLst/>
+          </a:prstGeom>
+          <a:solidFill>
+            <a:srgbClr val="E0463A"/>
+          </a:solidFill>
+          <a:ln>
+            <a:noFill/>
+          </a:ln>
+          <a:effectLst/>
+        </p:spPr>
+        <p:style>
+          <a:lnRef idx="1">
+            <a:schemeClr val="accent1"/>
+          </a:lnRef>
+          <a:fillRef idx="3">
+            <a:schemeClr val="accent1"/>
+          </a:fillRef>
+          <a:effectRef idx="2">
+            <a:schemeClr val="accent1"/>
+          </a:effectRef>
+          <a:fontRef idx="minor">
+            <a:schemeClr val="lt1"/>
+          </a:fontRef>
+        </p:style>
+        <p:txBody>
+          <a:bodyPr rtlCol="0" anchor="ctr" lIns="0" rIns="0" tIns="0" bIns="0"/>
+          <a:lstStyle/>
+          <a:p>
+            <a:pPr algn="ctr"/>
+            <a:r>
+              <a:rPr sz="1500" b="1">
                 <a:solidFill>
                   <a:srgbClr val="FFFFFF"/>
                 </a:solidFill>
-                <a:latin typeface="Cambria"/>
-              </a:rPr>
-              <a:t>Design around standard parts wherever you can. It cuts cost and lead time.</a:t>
+                <a:latin typeface="Calibri"/>
+              </a:rPr>
+              <a:t>3</a:t>
+            </a:r>
+          </a:p>
+        </p:txBody>
+      </p:sp>
+      <p:sp>
+        <p:nvSpPr>
+          <p:cNvPr id="16" name="TextBox 15"/>
+          <p:cNvSpPr txBox="1"/>
+          <p:nvPr/>
+        </p:nvSpPr>
+        <p:spPr>
+          <a:xfrm>
+            <a:off x="1371600" y="4224528"/>
+            <a:ext cx="4404207" cy="512064"/>
+          </a:xfrm>
+          <a:prstGeom prst="rect">
+            <a:avLst/>
+          </a:prstGeom>
+          <a:noFill/>
+        </p:spPr>
+        <p:txBody>
+          <a:bodyPr wrap="square" anchor="ctr" lIns="0" rIns="0" tIns="0" bIns="0"/>
+          <a:lstStyle/>
+          <a:p>
+            <a:pPr algn="l"/>
+            <a:r>
+              <a:rPr sz="1900" b="1" i="0">
+                <a:solidFill>
+                  <a:srgbClr val="03306E"/>
+                </a:solidFill>
+                <a:latin typeface="Calibri"/>
+              </a:rPr>
+              <a:t>Risk</a:t>
+            </a:r>
+          </a:p>
+        </p:txBody>
+      </p:sp>
+      <p:sp>
+        <p:nvSpPr>
+          <p:cNvPr id="17" name="TextBox 16"/>
+          <p:cNvSpPr txBox="1"/>
+          <p:nvPr/>
+        </p:nvSpPr>
+        <p:spPr>
+          <a:xfrm>
+            <a:off x="777240" y="4892040"/>
+            <a:ext cx="4952847" cy="1143000"/>
+          </a:xfrm>
+          <a:prstGeom prst="rect">
+            <a:avLst/>
+          </a:prstGeom>
+          <a:noFill/>
+        </p:spPr>
+        <p:txBody>
+          <a:bodyPr wrap="square" anchor="t" lIns="0" rIns="0" tIns="0" bIns="0"/>
+          <a:lstStyle/>
+          <a:p>
+            <a:pPr algn="l"/>
+            <a:r>
+              <a:rPr sz="2000" b="0" i="0">
+                <a:solidFill>
+                  <a:srgbClr val="202122"/>
+                </a:solidFill>
+                <a:latin typeface="Calibri"/>
+              </a:rPr>
+              <a:t>Consequences if it fails.</a:t>
+            </a:r>
+          </a:p>
+        </p:txBody>
+      </p:sp>
+      <p:sp>
+        <p:nvSpPr>
+          <p:cNvPr id="18" name="Rounded Rectangle 17"/>
+          <p:cNvSpPr/>
+          <p:nvPr/>
+        </p:nvSpPr>
+        <p:spPr>
+          <a:xfrm>
+            <a:off x="6233007" y="4023360"/>
+            <a:ext cx="5410047" cy="2148840"/>
+          </a:xfrm>
+          <a:prstGeom prst="roundRect">
+            <a:avLst>
+              <a:gd name="adj" fmla="val 6000"/>
+            </a:avLst>
+          </a:prstGeom>
+          <a:solidFill>
+            <a:srgbClr val="EAF3FF"/>
+          </a:solidFill>
+          <a:ln>
+            <a:noFill/>
+          </a:ln>
+          <a:effectLst/>
+        </p:spPr>
+        <p:style>
+          <a:lnRef idx="1">
+            <a:schemeClr val="accent1"/>
+          </a:lnRef>
+          <a:fillRef idx="3">
+            <a:schemeClr val="accent1"/>
+          </a:fillRef>
+          <a:effectRef idx="2">
+            <a:schemeClr val="accent1"/>
+          </a:effectRef>
+          <a:fontRef idx="minor">
+            <a:schemeClr val="lt1"/>
+          </a:fontRef>
+        </p:style>
+        <p:txBody>
+          <a:bodyPr rtlCol="0" anchor="ctr"/>
+          <a:lstStyle/>
+          <a:p/>
+        </p:txBody>
+      </p:sp>
+      <p:sp>
+        <p:nvSpPr>
+          <p:cNvPr id="19" name="Oval 18"/>
+          <p:cNvSpPr/>
+          <p:nvPr/>
+        </p:nvSpPr>
+        <p:spPr>
+          <a:xfrm>
+            <a:off x="6461607" y="4251960"/>
+            <a:ext cx="457200" cy="457200"/>
+          </a:xfrm>
+          <a:prstGeom prst="ellipse">
+            <a:avLst/>
+          </a:prstGeom>
+          <a:solidFill>
+            <a:srgbClr val="E0463A"/>
+          </a:solidFill>
+          <a:ln>
+            <a:noFill/>
+          </a:ln>
+          <a:effectLst/>
+        </p:spPr>
+        <p:style>
+          <a:lnRef idx="1">
+            <a:schemeClr val="accent1"/>
+          </a:lnRef>
+          <a:fillRef idx="3">
+            <a:schemeClr val="accent1"/>
+          </a:fillRef>
+          <a:effectRef idx="2">
+            <a:schemeClr val="accent1"/>
+          </a:effectRef>
+          <a:fontRef idx="minor">
+            <a:schemeClr val="lt1"/>
+          </a:fontRef>
+        </p:style>
+        <p:txBody>
+          <a:bodyPr rtlCol="0" anchor="ctr" lIns="0" rIns="0" tIns="0" bIns="0"/>
+          <a:lstStyle/>
+          <a:p>
+            <a:pPr algn="ctr"/>
+            <a:r>
+              <a:rPr sz="1500" b="1">
+                <a:solidFill>
+                  <a:srgbClr val="FFFFFF"/>
+                </a:solidFill>
+                <a:latin typeface="Calibri"/>
+              </a:rPr>
+              <a:t>4</a:t>
+            </a:r>
+          </a:p>
+        </p:txBody>
+      </p:sp>
+      <p:sp>
+        <p:nvSpPr>
+          <p:cNvPr id="20" name="TextBox 19"/>
+          <p:cNvSpPr txBox="1"/>
+          <p:nvPr/>
+        </p:nvSpPr>
+        <p:spPr>
+          <a:xfrm>
+            <a:off x="7055967" y="4224528"/>
+            <a:ext cx="4404207" cy="512064"/>
+          </a:xfrm>
+          <a:prstGeom prst="rect">
+            <a:avLst/>
+          </a:prstGeom>
+          <a:noFill/>
+        </p:spPr>
+        <p:txBody>
+          <a:bodyPr wrap="square" anchor="ctr" lIns="0" rIns="0" tIns="0" bIns="0"/>
+          <a:lstStyle/>
+          <a:p>
+            <a:pPr algn="l"/>
+            <a:r>
+              <a:rPr sz="1900" b="1" i="0">
+                <a:solidFill>
+                  <a:srgbClr val="03306E"/>
+                </a:solidFill>
+                <a:latin typeface="Calibri"/>
+              </a:rPr>
+              <a:t>Factor of safety</a:t>
+            </a:r>
+          </a:p>
+        </p:txBody>
+      </p:sp>
+      <p:sp>
+        <p:nvSpPr>
+          <p:cNvPr id="21" name="TextBox 20"/>
+          <p:cNvSpPr txBox="1"/>
+          <p:nvPr/>
+        </p:nvSpPr>
+        <p:spPr>
+          <a:xfrm>
+            <a:off x="6461607" y="4892040"/>
+            <a:ext cx="4952847" cy="1143000"/>
+          </a:xfrm>
+          <a:prstGeom prst="rect">
+            <a:avLst/>
+          </a:prstGeom>
+          <a:noFill/>
+        </p:spPr>
+        <p:txBody>
+          <a:bodyPr wrap="square" anchor="t" lIns="0" rIns="0" tIns="0" bIns="0"/>
+          <a:lstStyle/>
+          <a:p>
+            <a:pPr algn="l"/>
+            <a:r>
+              <a:rPr sz="2000" b="0" i="0">
+                <a:solidFill>
+                  <a:srgbClr val="202122"/>
+                </a:solidFill>
+                <a:latin typeface="Calibri"/>
+              </a:rPr>
+              <a:t>Design for more load than expected, e.g. 2 x the working load.</a:t>
             </a:r>
           </a:p>
         </p:txBody>
@@ -6016,7 +8494,7 @@
                 </a:solidFill>
                 <a:latin typeface="Cambria"/>
               </a:rPr>
-              <a:t>Manufacturing processes</a:t>
+              <a:t>Quick check: Choosing materials</a:t>
             </a:r>
           </a:p>
         </p:txBody>
@@ -6083,6 +8561,1293 @@
                 <a:latin typeface="Calibri"/>
               </a:rPr>
               <a:t>5</a:t>
+            </a:r>
+          </a:p>
+        </p:txBody>
+      </p:sp>
+      <p:sp>
+        <p:nvSpPr>
+          <p:cNvPr id="6" name="Oval 5"/>
+          <p:cNvSpPr/>
+          <p:nvPr/>
+        </p:nvSpPr>
+        <p:spPr>
+          <a:xfrm>
+            <a:off x="548640" y="1691640"/>
+            <a:ext cx="502920" cy="502920"/>
+          </a:xfrm>
+          <a:prstGeom prst="ellipse">
+            <a:avLst/>
+          </a:prstGeom>
+          <a:solidFill>
+            <a:srgbClr val="E0463A"/>
+          </a:solidFill>
+          <a:ln>
+            <a:noFill/>
+          </a:ln>
+          <a:effectLst/>
+        </p:spPr>
+        <p:style>
+          <a:lnRef idx="1">
+            <a:schemeClr val="accent1"/>
+          </a:lnRef>
+          <a:fillRef idx="3">
+            <a:schemeClr val="accent1"/>
+          </a:fillRef>
+          <a:effectRef idx="2">
+            <a:schemeClr val="accent1"/>
+          </a:effectRef>
+          <a:fontRef idx="minor">
+            <a:schemeClr val="lt1"/>
+          </a:fontRef>
+        </p:style>
+        <p:txBody>
+          <a:bodyPr rtlCol="0" anchor="ctr" lIns="0" rIns="0" tIns="0" bIns="0"/>
+          <a:lstStyle/>
+          <a:p>
+            <a:pPr algn="ctr"/>
+            <a:r>
+              <a:rPr sz="1600" b="1">
+                <a:solidFill>
+                  <a:srgbClr val="FFFFFF"/>
+                </a:solidFill>
+                <a:latin typeface="Calibri"/>
+              </a:rPr>
+              <a:t>1</a:t>
+            </a:r>
+          </a:p>
+        </p:txBody>
+      </p:sp>
+      <p:sp>
+        <p:nvSpPr>
+          <p:cNvPr id="7" name="TextBox 6"/>
+          <p:cNvSpPr txBox="1"/>
+          <p:nvPr/>
+        </p:nvSpPr>
+        <p:spPr>
+          <a:xfrm>
+            <a:off x="1371600" y="1645920"/>
+            <a:ext cx="10271455" cy="1188720"/>
+          </a:xfrm>
+          <a:prstGeom prst="rect">
+            <a:avLst/>
+          </a:prstGeom>
+          <a:noFill/>
+        </p:spPr>
+        <p:txBody>
+          <a:bodyPr wrap="square" anchor="t" lIns="0" rIns="0" tIns="0" bIns="0"/>
+          <a:lstStyle/>
+          <a:p>
+            <a:pPr algn="l"/>
+            <a:r>
+              <a:rPr sz="2400" b="0" i="0">
+                <a:solidFill>
+                  <a:srgbClr val="202122"/>
+                </a:solidFill>
+                <a:latin typeface="Calibri"/>
+              </a:rPr>
+              <a:t>What is a factor of safety?</a:t>
+            </a:r>
+          </a:p>
+        </p:txBody>
+      </p:sp>
+      <p:sp>
+        <p:nvSpPr>
+          <p:cNvPr id="8" name="Oval 7"/>
+          <p:cNvSpPr/>
+          <p:nvPr/>
+        </p:nvSpPr>
+        <p:spPr>
+          <a:xfrm>
+            <a:off x="548640" y="3108960"/>
+            <a:ext cx="502920" cy="502920"/>
+          </a:xfrm>
+          <a:prstGeom prst="ellipse">
+            <a:avLst/>
+          </a:prstGeom>
+          <a:solidFill>
+            <a:srgbClr val="E0463A"/>
+          </a:solidFill>
+          <a:ln>
+            <a:noFill/>
+          </a:ln>
+          <a:effectLst/>
+        </p:spPr>
+        <p:style>
+          <a:lnRef idx="1">
+            <a:schemeClr val="accent1"/>
+          </a:lnRef>
+          <a:fillRef idx="3">
+            <a:schemeClr val="accent1"/>
+          </a:fillRef>
+          <a:effectRef idx="2">
+            <a:schemeClr val="accent1"/>
+          </a:effectRef>
+          <a:fontRef idx="minor">
+            <a:schemeClr val="lt1"/>
+          </a:fontRef>
+        </p:style>
+        <p:txBody>
+          <a:bodyPr rtlCol="0" anchor="ctr" lIns="0" rIns="0" tIns="0" bIns="0"/>
+          <a:lstStyle/>
+          <a:p>
+            <a:pPr algn="ctr"/>
+            <a:r>
+              <a:rPr sz="1600" b="1">
+                <a:solidFill>
+                  <a:srgbClr val="FFFFFF"/>
+                </a:solidFill>
+                <a:latin typeface="Calibri"/>
+              </a:rPr>
+              <a:t>2</a:t>
+            </a:r>
+          </a:p>
+        </p:txBody>
+      </p:sp>
+      <p:sp>
+        <p:nvSpPr>
+          <p:cNvPr id="9" name="TextBox 8"/>
+          <p:cNvSpPr txBox="1"/>
+          <p:nvPr/>
+        </p:nvSpPr>
+        <p:spPr>
+          <a:xfrm>
+            <a:off x="1371600" y="3063240"/>
+            <a:ext cx="10271455" cy="1188720"/>
+          </a:xfrm>
+          <a:prstGeom prst="rect">
+            <a:avLst/>
+          </a:prstGeom>
+          <a:noFill/>
+        </p:spPr>
+        <p:txBody>
+          <a:bodyPr wrap="square" anchor="t" lIns="0" rIns="0" tIns="0" bIns="0"/>
+          <a:lstStyle/>
+          <a:p>
+            <a:pPr algn="l"/>
+            <a:r>
+              <a:rPr sz="2400" b="0" i="0">
+                <a:solidFill>
+                  <a:srgbClr val="202122"/>
+                </a:solidFill>
+                <a:latin typeface="Calibri"/>
+              </a:rPr>
+              <a:t>When would you use a higher factor of safety?</a:t>
+            </a:r>
+          </a:p>
+        </p:txBody>
+      </p:sp>
+      <p:sp>
+        <p:nvSpPr>
+          <p:cNvPr id="10" name="Oval 9"/>
+          <p:cNvSpPr/>
+          <p:nvPr/>
+        </p:nvSpPr>
+        <p:spPr>
+          <a:xfrm>
+            <a:off x="548640" y="4526280"/>
+            <a:ext cx="502920" cy="502920"/>
+          </a:xfrm>
+          <a:prstGeom prst="ellipse">
+            <a:avLst/>
+          </a:prstGeom>
+          <a:solidFill>
+            <a:srgbClr val="E0463A"/>
+          </a:solidFill>
+          <a:ln>
+            <a:noFill/>
+          </a:ln>
+          <a:effectLst/>
+        </p:spPr>
+        <p:style>
+          <a:lnRef idx="1">
+            <a:schemeClr val="accent1"/>
+          </a:lnRef>
+          <a:fillRef idx="3">
+            <a:schemeClr val="accent1"/>
+          </a:fillRef>
+          <a:effectRef idx="2">
+            <a:schemeClr val="accent1"/>
+          </a:effectRef>
+          <a:fontRef idx="minor">
+            <a:schemeClr val="lt1"/>
+          </a:fontRef>
+        </p:style>
+        <p:txBody>
+          <a:bodyPr rtlCol="0" anchor="ctr" lIns="0" rIns="0" tIns="0" bIns="0"/>
+          <a:lstStyle/>
+          <a:p>
+            <a:pPr algn="ctr"/>
+            <a:r>
+              <a:rPr sz="1600" b="1">
+                <a:solidFill>
+                  <a:srgbClr val="FFFFFF"/>
+                </a:solidFill>
+                <a:latin typeface="Calibri"/>
+              </a:rPr>
+              <a:t>3</a:t>
+            </a:r>
+          </a:p>
+        </p:txBody>
+      </p:sp>
+      <p:sp>
+        <p:nvSpPr>
+          <p:cNvPr id="11" name="TextBox 10"/>
+          <p:cNvSpPr txBox="1"/>
+          <p:nvPr/>
+        </p:nvSpPr>
+        <p:spPr>
+          <a:xfrm>
+            <a:off x="1371600" y="4480560"/>
+            <a:ext cx="10271455" cy="1188720"/>
+          </a:xfrm>
+          <a:prstGeom prst="rect">
+            <a:avLst/>
+          </a:prstGeom>
+          <a:noFill/>
+        </p:spPr>
+        <p:txBody>
+          <a:bodyPr wrap="square" anchor="t" lIns="0" rIns="0" tIns="0" bIns="0"/>
+          <a:lstStyle/>
+          <a:p>
+            <a:pPr algn="l"/>
+            <a:r>
+              <a:rPr sz="2400" b="0" i="0">
+                <a:solidFill>
+                  <a:srgbClr val="202122"/>
+                </a:solidFill>
+                <a:latin typeface="Calibri"/>
+              </a:rPr>
+              <a:t>Name two considerations when choosing a material.</a:t>
+            </a:r>
+          </a:p>
+        </p:txBody>
+      </p:sp>
+      <p:sp>
+        <p:nvSpPr>
+          <p:cNvPr id="12" name="TextBox 11"/>
+          <p:cNvSpPr txBox="1"/>
+          <p:nvPr/>
+        </p:nvSpPr>
+        <p:spPr>
+          <a:xfrm>
+            <a:off x="548640" y="5852160"/>
+            <a:ext cx="11094415" cy="365760"/>
+          </a:xfrm>
+          <a:prstGeom prst="rect">
+            <a:avLst/>
+          </a:prstGeom>
+          <a:noFill/>
+        </p:spPr>
+        <p:txBody>
+          <a:bodyPr wrap="square" anchor="t" lIns="0" rIns="0" tIns="0" bIns="0"/>
+          <a:lstStyle/>
+          <a:p>
+            <a:pPr algn="l"/>
+            <a:r>
+              <a:rPr sz="1300" b="0" i="1">
+                <a:solidFill>
+                  <a:srgbClr val="54595D"/>
+                </a:solidFill>
+                <a:latin typeface="Calibri"/>
+              </a:rPr>
+              <a:t>Answer on mini whiteboards or in your book. Answers are in the speaker notes.</a:t>
+            </a:r>
+          </a:p>
+        </p:txBody>
+      </p:sp>
+    </p:spTree>
+  </p:cSld>
+  <p:clrMapOvr>
+    <a:masterClrMapping/>
+  </p:clrMapOvr>
+</p:sld>
+</file>
+
+<file path=ppt/slides/slide6.xml><?xml version="1.0" encoding="utf-8"?>
+<p:sld xmlns:a="http://schemas.openxmlformats.org/drawingml/2006/main" xmlns:p="http://schemas.openxmlformats.org/presentationml/2006/main" xmlns:r="http://schemas.openxmlformats.org/officeDocument/2006/relationships">
+  <p:cSld>
+    <p:bg>
+      <p:bgPr>
+        <a:solidFill>
+          <a:srgbClr val="FFFFFF"/>
+        </a:solidFill>
+        <a:effectLst/>
+      </p:bgPr>
+    </p:bg>
+    <p:spTree>
+      <p:nvGrpSpPr>
+        <p:cNvPr id="1" name=""/>
+        <p:cNvGrpSpPr/>
+        <p:nvPr/>
+      </p:nvGrpSpPr>
+      <p:grpSpPr/>
+      <p:sp>
+        <p:nvSpPr>
+          <p:cNvPr id="2" name="TextBox 1"/>
+          <p:cNvSpPr txBox="1"/>
+          <p:nvPr/>
+        </p:nvSpPr>
+        <p:spPr>
+          <a:xfrm>
+            <a:off x="548640" y="320040"/>
+            <a:ext cx="11094415" cy="274320"/>
+          </a:xfrm>
+          <a:prstGeom prst="rect">
+            <a:avLst/>
+          </a:prstGeom>
+          <a:noFill/>
+        </p:spPr>
+        <p:txBody>
+          <a:bodyPr wrap="square" anchor="t" lIns="0" rIns="0" tIns="0" bIns="0"/>
+          <a:lstStyle/>
+          <a:p>
+            <a:pPr algn="l"/>
+            <a:r>
+              <a:rPr sz="1100" b="1" i="0">
+                <a:solidFill>
+                  <a:srgbClr val="54595D"/>
+                </a:solidFill>
+                <a:latin typeface="Calibri"/>
+              </a:rPr>
+              <a:t>MECHANICAL ENGINEERING  ·  Mechanical: Knowledge criteria</a:t>
+            </a:r>
+          </a:p>
+        </p:txBody>
+      </p:sp>
+      <p:sp>
+        <p:nvSpPr>
+          <p:cNvPr id="3" name="TextBox 2"/>
+          <p:cNvSpPr txBox="1"/>
+          <p:nvPr/>
+        </p:nvSpPr>
+        <p:spPr>
+          <a:xfrm>
+            <a:off x="548640" y="566928"/>
+            <a:ext cx="11094415" cy="822960"/>
+          </a:xfrm>
+          <a:prstGeom prst="rect">
+            <a:avLst/>
+          </a:prstGeom>
+          <a:noFill/>
+        </p:spPr>
+        <p:txBody>
+          <a:bodyPr wrap="square" anchor="ctr" lIns="0" rIns="0" tIns="0" bIns="0"/>
+          <a:lstStyle/>
+          <a:p>
+            <a:pPr algn="l"/>
+            <a:r>
+              <a:rPr sz="3200" b="1" i="0">
+                <a:solidFill>
+                  <a:srgbClr val="03306E"/>
+                </a:solidFill>
+                <a:latin typeface="Cambria"/>
+              </a:rPr>
+              <a:t>Standard parts</a:t>
+            </a:r>
+          </a:p>
+        </p:txBody>
+      </p:sp>
+      <p:sp>
+        <p:nvSpPr>
+          <p:cNvPr id="4" name="TextBox 3"/>
+          <p:cNvSpPr txBox="1"/>
+          <p:nvPr/>
+        </p:nvSpPr>
+        <p:spPr>
+          <a:xfrm>
+            <a:off x="548640" y="6446520"/>
+            <a:ext cx="8229600" cy="274320"/>
+          </a:xfrm>
+          <a:prstGeom prst="rect">
+            <a:avLst/>
+          </a:prstGeom>
+          <a:noFill/>
+        </p:spPr>
+        <p:txBody>
+          <a:bodyPr wrap="square" anchor="t" lIns="0" rIns="0" tIns="0" bIns="0"/>
+          <a:lstStyle/>
+          <a:p>
+            <a:pPr algn="l"/>
+            <a:r>
+              <a:rPr sz="1000" b="0" i="0">
+                <a:solidFill>
+                  <a:srgbClr val="54595D"/>
+                </a:solidFill>
+                <a:latin typeface="Calibri"/>
+              </a:rPr>
+              <a:t>Design and Development for Engineering and Manufacturing T Level  ·  Materials, Standard Parts and Manufacturing Processes</a:t>
+            </a:r>
+          </a:p>
+        </p:txBody>
+      </p:sp>
+      <p:sp>
+        <p:nvSpPr>
+          <p:cNvPr id="5" name="TextBox 4"/>
+          <p:cNvSpPr txBox="1"/>
+          <p:nvPr/>
+        </p:nvSpPr>
+        <p:spPr>
+          <a:xfrm>
+            <a:off x="10728655" y="6446520"/>
+            <a:ext cx="914400" cy="274320"/>
+          </a:xfrm>
+          <a:prstGeom prst="rect">
+            <a:avLst/>
+          </a:prstGeom>
+          <a:noFill/>
+        </p:spPr>
+        <p:txBody>
+          <a:bodyPr wrap="square" anchor="t" lIns="0" rIns="0" tIns="0" bIns="0"/>
+          <a:lstStyle/>
+          <a:p>
+            <a:pPr algn="r"/>
+            <a:r>
+              <a:rPr sz="1000" b="0" i="0">
+                <a:solidFill>
+                  <a:srgbClr val="54595D"/>
+                </a:solidFill>
+                <a:latin typeface="Calibri"/>
+              </a:rPr>
+              <a:t>6</a:t>
+            </a:r>
+          </a:p>
+        </p:txBody>
+      </p:sp>
+      <p:sp>
+        <p:nvSpPr>
+          <p:cNvPr id="6" name="TextBox 5"/>
+          <p:cNvSpPr txBox="1"/>
+          <p:nvPr/>
+        </p:nvSpPr>
+        <p:spPr>
+          <a:xfrm>
+            <a:off x="548640" y="1600200"/>
+            <a:ext cx="6675120" cy="4572000"/>
+          </a:xfrm>
+          <a:prstGeom prst="rect">
+            <a:avLst/>
+          </a:prstGeom>
+          <a:noFill/>
+        </p:spPr>
+        <p:txBody>
+          <a:bodyPr wrap="square" lIns="0" rIns="0" tIns="0" bIns="0">
+            <a:spAutoFit/>
+          </a:bodyPr>
+          <a:lstStyle/>
+          <a:p>
+            <a:pPr marL="274320" indent="-274320">
+              <a:spcAft>
+                <a:spcPts val="1080"/>
+              </a:spcAft>
+              <a:buClr>
+                <a:srgbClr val="0645AD"/>
+              </a:buClr>
+              <a:buFont typeface="Arial"/>
+              <a:buChar char="•"/>
+            </a:pPr>
+            <a:r>
+              <a:rPr sz="2400" b="1">
+                <a:solidFill>
+                  <a:srgbClr val="202122"/>
+                </a:solidFill>
+                <a:latin typeface="Calibri"/>
+              </a:rPr>
+              <a:t>Examples:</a:t>
+            </a:r>
+            <a:r>
+              <a:rPr sz="2400" b="0">
+                <a:solidFill>
+                  <a:srgbClr val="202122"/>
+                </a:solidFill>
+                <a:latin typeface="Calibri"/>
+              </a:rPr>
+              <a:t> valves, sensors, piping, supports and fittings.</a:t>
+            </a:r>
+          </a:p>
+          <a:p>
+            <a:pPr marL="274320" indent="-274320">
+              <a:spcAft>
+                <a:spcPts val="1080"/>
+              </a:spcAft>
+              <a:buClr>
+                <a:srgbClr val="0645AD"/>
+              </a:buClr>
+              <a:buFont typeface="Arial"/>
+              <a:buChar char="•"/>
+            </a:pPr>
+            <a:r>
+              <a:rPr sz="2400" b="0">
+                <a:solidFill>
+                  <a:srgbClr val="202122"/>
+                </a:solidFill>
+                <a:latin typeface="Calibri"/>
+              </a:rPr>
+              <a:t>Cheaper than making your own.</a:t>
+            </a:r>
+          </a:p>
+          <a:p>
+            <a:pPr marL="274320" indent="-274320">
+              <a:spcAft>
+                <a:spcPts val="1080"/>
+              </a:spcAft>
+              <a:buClr>
+                <a:srgbClr val="0645AD"/>
+              </a:buClr>
+              <a:buFont typeface="Arial"/>
+              <a:buChar char="•"/>
+            </a:pPr>
+            <a:r>
+              <a:rPr sz="2400" b="0">
+                <a:solidFill>
+                  <a:srgbClr val="202122"/>
+                </a:solidFill>
+                <a:latin typeface="Calibri"/>
+              </a:rPr>
+              <a:t>Proven quality and known performance.</a:t>
+            </a:r>
+          </a:p>
+          <a:p>
+            <a:pPr marL="274320" indent="-274320">
+              <a:spcAft>
+                <a:spcPts val="1080"/>
+              </a:spcAft>
+              <a:buClr>
+                <a:srgbClr val="0645AD"/>
+              </a:buClr>
+              <a:buFont typeface="Arial"/>
+              <a:buChar char="•"/>
+            </a:pPr>
+            <a:r>
+              <a:rPr sz="2400" b="0">
+                <a:solidFill>
+                  <a:srgbClr val="202122"/>
+                </a:solidFill>
+                <a:latin typeface="Calibri"/>
+              </a:rPr>
+              <a:t>Easy to replace and source.</a:t>
+            </a:r>
+          </a:p>
+        </p:txBody>
+      </p:sp>
+      <p:sp>
+        <p:nvSpPr>
+          <p:cNvPr id="7" name="Rounded Rectangle 6"/>
+          <p:cNvSpPr/>
+          <p:nvPr/>
+        </p:nvSpPr>
+        <p:spPr>
+          <a:xfrm>
+            <a:off x="7772400" y="1600200"/>
+            <a:ext cx="3867912" cy="4434840"/>
+          </a:xfrm>
+          <a:prstGeom prst="roundRect">
+            <a:avLst>
+              <a:gd name="adj" fmla="val 8000"/>
+            </a:avLst>
+          </a:prstGeom>
+          <a:solidFill>
+            <a:srgbClr val="03306E"/>
+          </a:solidFill>
+          <a:ln>
+            <a:noFill/>
+          </a:ln>
+          <a:effectLst/>
+        </p:spPr>
+        <p:style>
+          <a:lnRef idx="1">
+            <a:schemeClr val="accent1"/>
+          </a:lnRef>
+          <a:fillRef idx="3">
+            <a:schemeClr val="accent1"/>
+          </a:fillRef>
+          <a:effectRef idx="2">
+            <a:schemeClr val="accent1"/>
+          </a:effectRef>
+          <a:fontRef idx="minor">
+            <a:schemeClr val="lt1"/>
+          </a:fontRef>
+        </p:style>
+        <p:txBody>
+          <a:bodyPr rtlCol="0" anchor="ctr"/>
+          <a:lstStyle/>
+          <a:p/>
+        </p:txBody>
+      </p:sp>
+      <p:sp>
+        <p:nvSpPr>
+          <p:cNvPr id="8" name="Oval 7"/>
+          <p:cNvSpPr/>
+          <p:nvPr/>
+        </p:nvSpPr>
+        <p:spPr>
+          <a:xfrm>
+            <a:off x="8046720" y="1874519"/>
+            <a:ext cx="548640" cy="548640"/>
+          </a:xfrm>
+          <a:prstGeom prst="ellipse">
+            <a:avLst/>
+          </a:prstGeom>
+          <a:solidFill>
+            <a:srgbClr val="E0463A"/>
+          </a:solidFill>
+          <a:ln>
+            <a:noFill/>
+          </a:ln>
+          <a:effectLst/>
+        </p:spPr>
+        <p:style>
+          <a:lnRef idx="1">
+            <a:schemeClr val="accent1"/>
+          </a:lnRef>
+          <a:fillRef idx="3">
+            <a:schemeClr val="accent1"/>
+          </a:fillRef>
+          <a:effectRef idx="2">
+            <a:schemeClr val="accent1"/>
+          </a:effectRef>
+          <a:fontRef idx="minor">
+            <a:schemeClr val="lt1"/>
+          </a:fontRef>
+        </p:style>
+        <p:txBody>
+          <a:bodyPr rtlCol="0" anchor="ctr" lIns="0" rIns="0" tIns="0" bIns="0"/>
+          <a:lstStyle/>
+          <a:p>
+            <a:pPr algn="ctr"/>
+            <a:r>
+              <a:rPr sz="2000" b="1">
+                <a:solidFill>
+                  <a:srgbClr val="FFFFFF"/>
+                </a:solidFill>
+                <a:latin typeface="Calibri"/>
+              </a:rPr>
+              <a:t>!</a:t>
+            </a:r>
+          </a:p>
+        </p:txBody>
+      </p:sp>
+      <p:sp>
+        <p:nvSpPr>
+          <p:cNvPr id="9" name="TextBox 8"/>
+          <p:cNvSpPr txBox="1"/>
+          <p:nvPr/>
+        </p:nvSpPr>
+        <p:spPr>
+          <a:xfrm>
+            <a:off x="8046720" y="2606040"/>
+            <a:ext cx="3291840" cy="365760"/>
+          </a:xfrm>
+          <a:prstGeom prst="rect">
+            <a:avLst/>
+          </a:prstGeom>
+          <a:noFill/>
+        </p:spPr>
+        <p:txBody>
+          <a:bodyPr wrap="square" anchor="t" lIns="0" rIns="0" tIns="0" bIns="0"/>
+          <a:lstStyle/>
+          <a:p>
+            <a:pPr algn="l"/>
+            <a:r>
+              <a:rPr sz="1300" b="1" i="0">
+                <a:solidFill>
+                  <a:srgbClr val="A9C8F0"/>
+                </a:solidFill>
+                <a:latin typeface="Calibri"/>
+              </a:rPr>
+              <a:t>KEY IDEA</a:t>
+            </a:r>
+          </a:p>
+        </p:txBody>
+      </p:sp>
+      <p:sp>
+        <p:nvSpPr>
+          <p:cNvPr id="10" name="TextBox 9"/>
+          <p:cNvSpPr txBox="1"/>
+          <p:nvPr/>
+        </p:nvSpPr>
+        <p:spPr>
+          <a:xfrm>
+            <a:off x="8046720" y="3017520"/>
+            <a:ext cx="3291840" cy="2926080"/>
+          </a:xfrm>
+          <a:prstGeom prst="rect">
+            <a:avLst/>
+          </a:prstGeom>
+          <a:noFill/>
+        </p:spPr>
+        <p:txBody>
+          <a:bodyPr wrap="square" anchor="t" lIns="0" rIns="0" tIns="0" bIns="0"/>
+          <a:lstStyle/>
+          <a:p>
+            <a:pPr algn="l"/>
+            <a:r>
+              <a:rPr sz="2200" b="0" i="0">
+                <a:solidFill>
+                  <a:srgbClr val="FFFFFF"/>
+                </a:solidFill>
+                <a:latin typeface="Cambria"/>
+              </a:rPr>
+              <a:t>Design around standard parts wherever you can. It cuts cost and lead time.</a:t>
+            </a:r>
+          </a:p>
+        </p:txBody>
+      </p:sp>
+    </p:spTree>
+  </p:cSld>
+  <p:clrMapOvr>
+    <a:masterClrMapping/>
+  </p:clrMapOvr>
+</p:sld>
+</file>
+
+<file path=ppt/slides/slide7.xml><?xml version="1.0" encoding="utf-8"?>
+<p:sld xmlns:a="http://schemas.openxmlformats.org/drawingml/2006/main" xmlns:p="http://schemas.openxmlformats.org/presentationml/2006/main" xmlns:r="http://schemas.openxmlformats.org/officeDocument/2006/relationships">
+  <p:cSld>
+    <p:bg>
+      <p:bgPr>
+        <a:solidFill>
+          <a:srgbClr val="FFFFFF"/>
+        </a:solidFill>
+        <a:effectLst/>
+      </p:bgPr>
+    </p:bg>
+    <p:spTree>
+      <p:nvGrpSpPr>
+        <p:cNvPr id="1" name=""/>
+        <p:cNvGrpSpPr/>
+        <p:nvPr/>
+      </p:nvGrpSpPr>
+      <p:grpSpPr/>
+      <p:sp>
+        <p:nvSpPr>
+          <p:cNvPr id="2" name="TextBox 1"/>
+          <p:cNvSpPr txBox="1"/>
+          <p:nvPr/>
+        </p:nvSpPr>
+        <p:spPr>
+          <a:xfrm>
+            <a:off x="548640" y="320040"/>
+            <a:ext cx="11094415" cy="274320"/>
+          </a:xfrm>
+          <a:prstGeom prst="rect">
+            <a:avLst/>
+          </a:prstGeom>
+          <a:noFill/>
+        </p:spPr>
+        <p:txBody>
+          <a:bodyPr wrap="square" anchor="t" lIns="0" rIns="0" tIns="0" bIns="0"/>
+          <a:lstStyle/>
+          <a:p>
+            <a:pPr algn="l"/>
+            <a:r>
+              <a:rPr sz="1100" b="1" i="0">
+                <a:solidFill>
+                  <a:srgbClr val="54595D"/>
+                </a:solidFill>
+                <a:latin typeface="Calibri"/>
+              </a:rPr>
+              <a:t>MECHANICAL ENGINEERING  ·  Mechanical: Knowledge criteria</a:t>
+            </a:r>
+          </a:p>
+        </p:txBody>
+      </p:sp>
+      <p:sp>
+        <p:nvSpPr>
+          <p:cNvPr id="3" name="TextBox 2"/>
+          <p:cNvSpPr txBox="1"/>
+          <p:nvPr/>
+        </p:nvSpPr>
+        <p:spPr>
+          <a:xfrm>
+            <a:off x="548640" y="566928"/>
+            <a:ext cx="11094415" cy="822960"/>
+          </a:xfrm>
+          <a:prstGeom prst="rect">
+            <a:avLst/>
+          </a:prstGeom>
+          <a:noFill/>
+        </p:spPr>
+        <p:txBody>
+          <a:bodyPr wrap="square" anchor="ctr" lIns="0" rIns="0" tIns="0" bIns="0"/>
+          <a:lstStyle/>
+          <a:p>
+            <a:pPr algn="l"/>
+            <a:r>
+              <a:rPr sz="3200" b="1" i="0">
+                <a:solidFill>
+                  <a:srgbClr val="03306E"/>
+                </a:solidFill>
+                <a:latin typeface="Cambria"/>
+              </a:rPr>
+              <a:t>Manufacturing processes</a:t>
+            </a:r>
+          </a:p>
+        </p:txBody>
+      </p:sp>
+      <p:sp>
+        <p:nvSpPr>
+          <p:cNvPr id="4" name="TextBox 3"/>
+          <p:cNvSpPr txBox="1"/>
+          <p:nvPr/>
+        </p:nvSpPr>
+        <p:spPr>
+          <a:xfrm>
+            <a:off x="548640" y="6446520"/>
+            <a:ext cx="8229600" cy="274320"/>
+          </a:xfrm>
+          <a:prstGeom prst="rect">
+            <a:avLst/>
+          </a:prstGeom>
+          <a:noFill/>
+        </p:spPr>
+        <p:txBody>
+          <a:bodyPr wrap="square" anchor="t" lIns="0" rIns="0" tIns="0" bIns="0"/>
+          <a:lstStyle/>
+          <a:p>
+            <a:pPr algn="l"/>
+            <a:r>
+              <a:rPr sz="1000" b="0" i="0">
+                <a:solidFill>
+                  <a:srgbClr val="54595D"/>
+                </a:solidFill>
+                <a:latin typeface="Calibri"/>
+              </a:rPr>
+              <a:t>Design and Development for Engineering and Manufacturing T Level  ·  Materials, Standard Parts and Manufacturing Processes</a:t>
+            </a:r>
+          </a:p>
+        </p:txBody>
+      </p:sp>
+      <p:sp>
+        <p:nvSpPr>
+          <p:cNvPr id="5" name="TextBox 4"/>
+          <p:cNvSpPr txBox="1"/>
+          <p:nvPr/>
+        </p:nvSpPr>
+        <p:spPr>
+          <a:xfrm>
+            <a:off x="10728655" y="6446520"/>
+            <a:ext cx="914400" cy="274320"/>
+          </a:xfrm>
+          <a:prstGeom prst="rect">
+            <a:avLst/>
+          </a:prstGeom>
+          <a:noFill/>
+        </p:spPr>
+        <p:txBody>
+          <a:bodyPr wrap="square" anchor="t" lIns="0" rIns="0" tIns="0" bIns="0"/>
+          <a:lstStyle/>
+          <a:p>
+            <a:pPr algn="r"/>
+            <a:r>
+              <a:rPr sz="1000" b="0" i="0">
+                <a:solidFill>
+                  <a:srgbClr val="54595D"/>
+                </a:solidFill>
+                <a:latin typeface="Calibri"/>
+              </a:rPr>
+              <a:t>7</a:t>
+            </a:r>
+          </a:p>
+        </p:txBody>
+      </p:sp>
+      <p:sp>
+        <p:nvSpPr>
+          <p:cNvPr id="6" name="TextBox 5"/>
+          <p:cNvSpPr txBox="1"/>
+          <p:nvPr/>
+        </p:nvSpPr>
+        <p:spPr>
+          <a:xfrm>
+            <a:off x="548640" y="1554480"/>
+            <a:ext cx="6720840" cy="4617720"/>
+          </a:xfrm>
+          <a:prstGeom prst="rect">
+            <a:avLst/>
+          </a:prstGeom>
+          <a:noFill/>
+        </p:spPr>
+        <p:txBody>
+          <a:bodyPr wrap="square" lIns="0" rIns="0" tIns="0" bIns="0">
+            <a:spAutoFit/>
+          </a:bodyPr>
+          <a:lstStyle/>
+          <a:p>
+            <a:pPr>
+              <a:spcAft>
+                <a:spcPts val="1200"/>
+              </a:spcAft>
+            </a:pPr>
+            <a:r>
+              <a:rPr sz="2000" b="0">
+                <a:solidFill>
+                  <a:srgbClr val="202122"/>
+                </a:solidFill>
+                <a:latin typeface="Calibri"/>
+              </a:rPr>
+              <a:t>Wasting processes (cutting, filing, turning, milling, grinding) remove material. They're accurate but waste material. Shaping (casting, moulding) makes complex shapes but tooling is expensive. Forming (bending, pressing) is fast with little waste but needs ductile material.</a:t>
+            </a:r>
+          </a:p>
+          <a:p>
+            <a:pPr>
+              <a:spcAft>
+                <a:spcPts val="1200"/>
+              </a:spcAft>
+            </a:pPr>
+            <a:r>
+              <a:rPr sz="2000" b="1">
+                <a:solidFill>
+                  <a:srgbClr val="202122"/>
+                </a:solidFill>
+                <a:latin typeface="Calibri"/>
+              </a:rPr>
+              <a:t>Welding makes strong, permanent joints:</a:t>
+            </a:r>
+            <a:r>
+              <a:rPr sz="2000" b="0">
+                <a:solidFill>
+                  <a:srgbClr val="202122"/>
+                </a:solidFill>
+                <a:latin typeface="Calibri"/>
+              </a:rPr>
+              <a:t> MIG/MAG is fast for general work; TIG is slower but neat and precise, for thin or stainless material. Heat can distort parts. 3D printing makes complex one-offs but is slow in volume. Joining, finishing and assembly complete the product.</a:t>
+            </a:r>
+          </a:p>
+          <a:p>
+            <a:pPr>
+              <a:spcAft>
+                <a:spcPts val="1200"/>
+              </a:spcAft>
+            </a:pPr>
+            <a:r>
+              <a:rPr sz="2000" b="0">
+                <a:solidFill>
+                  <a:srgbClr val="202122"/>
+                </a:solidFill>
+                <a:latin typeface="Calibri"/>
+              </a:rPr>
+              <a:t>Tolerances and fits must be designed so parts assemble correctly.</a:t>
+            </a:r>
+          </a:p>
+        </p:txBody>
+      </p:sp>
+      <p:sp>
+        <p:nvSpPr>
+          <p:cNvPr id="7" name="Rounded Rectangle 6"/>
+          <p:cNvSpPr/>
+          <p:nvPr/>
+        </p:nvSpPr>
+        <p:spPr>
+          <a:xfrm>
+            <a:off x="7772400" y="1554480"/>
+            <a:ext cx="3867912" cy="4526280"/>
+          </a:xfrm>
+          <a:prstGeom prst="roundRect">
+            <a:avLst>
+              <a:gd name="adj" fmla="val 8000"/>
+            </a:avLst>
+          </a:prstGeom>
+          <a:solidFill>
+            <a:srgbClr val="03306E"/>
+          </a:solidFill>
+          <a:ln>
+            <a:noFill/>
+          </a:ln>
+          <a:effectLst/>
+        </p:spPr>
+        <p:style>
+          <a:lnRef idx="1">
+            <a:schemeClr val="accent1"/>
+          </a:lnRef>
+          <a:fillRef idx="3">
+            <a:schemeClr val="accent1"/>
+          </a:fillRef>
+          <a:effectRef idx="2">
+            <a:schemeClr val="accent1"/>
+          </a:effectRef>
+          <a:fontRef idx="minor">
+            <a:schemeClr val="lt1"/>
+          </a:fontRef>
+        </p:style>
+        <p:txBody>
+          <a:bodyPr rtlCol="0" anchor="ctr"/>
+          <a:lstStyle/>
+          <a:p/>
+        </p:txBody>
+      </p:sp>
+      <p:sp>
+        <p:nvSpPr>
+          <p:cNvPr id="8" name="Oval 7"/>
+          <p:cNvSpPr/>
+          <p:nvPr/>
+        </p:nvSpPr>
+        <p:spPr>
+          <a:xfrm>
+            <a:off x="8046720" y="1828800"/>
+            <a:ext cx="548640" cy="548640"/>
+          </a:xfrm>
+          <a:prstGeom prst="ellipse">
+            <a:avLst/>
+          </a:prstGeom>
+          <a:solidFill>
+            <a:srgbClr val="E0463A"/>
+          </a:solidFill>
+          <a:ln>
+            <a:noFill/>
+          </a:ln>
+          <a:effectLst/>
+        </p:spPr>
+        <p:style>
+          <a:lnRef idx="1">
+            <a:schemeClr val="accent1"/>
+          </a:lnRef>
+          <a:fillRef idx="3">
+            <a:schemeClr val="accent1"/>
+          </a:fillRef>
+          <a:effectRef idx="2">
+            <a:schemeClr val="accent1"/>
+          </a:effectRef>
+          <a:fontRef idx="minor">
+            <a:schemeClr val="lt1"/>
+          </a:fontRef>
+        </p:style>
+        <p:txBody>
+          <a:bodyPr rtlCol="0" anchor="ctr" lIns="0" rIns="0" tIns="0" bIns="0"/>
+          <a:lstStyle/>
+          <a:p>
+            <a:pPr algn="ctr"/>
+            <a:r>
+              <a:rPr sz="1300" b="1">
+                <a:solidFill>
+                  <a:srgbClr val="FFFFFF"/>
+                </a:solidFill>
+                <a:latin typeface="Calibri"/>
+              </a:rPr>
+              <a:t>e.g.</a:t>
+            </a:r>
+          </a:p>
+        </p:txBody>
+      </p:sp>
+      <p:sp>
+        <p:nvSpPr>
+          <p:cNvPr id="9" name="TextBox 8"/>
+          <p:cNvSpPr txBox="1"/>
+          <p:nvPr/>
+        </p:nvSpPr>
+        <p:spPr>
+          <a:xfrm>
+            <a:off x="8046720" y="2560320"/>
+            <a:ext cx="3291840" cy="365760"/>
+          </a:xfrm>
+          <a:prstGeom prst="rect">
+            <a:avLst/>
+          </a:prstGeom>
+          <a:noFill/>
+        </p:spPr>
+        <p:txBody>
+          <a:bodyPr wrap="square" anchor="t" lIns="0" rIns="0" tIns="0" bIns="0"/>
+          <a:lstStyle/>
+          <a:p>
+            <a:pPr algn="l"/>
+            <a:r>
+              <a:rPr sz="1300" b="1" i="0">
+                <a:solidFill>
+                  <a:srgbClr val="A9C8F0"/>
+                </a:solidFill>
+                <a:latin typeface="Calibri"/>
+              </a:rPr>
+              <a:t>EXAMPLE</a:t>
+            </a:r>
+          </a:p>
+        </p:txBody>
+      </p:sp>
+      <p:sp>
+        <p:nvSpPr>
+          <p:cNvPr id="10" name="TextBox 9"/>
+          <p:cNvSpPr txBox="1"/>
+          <p:nvPr/>
+        </p:nvSpPr>
+        <p:spPr>
+          <a:xfrm>
+            <a:off x="8046720" y="2971800"/>
+            <a:ext cx="3291840" cy="2971800"/>
+          </a:xfrm>
+          <a:prstGeom prst="rect">
+            <a:avLst/>
+          </a:prstGeom>
+          <a:noFill/>
+        </p:spPr>
+        <p:txBody>
+          <a:bodyPr wrap="square" anchor="t" lIns="0" rIns="0" tIns="0" bIns="0"/>
+          <a:lstStyle/>
+          <a:p>
+            <a:pPr algn="l"/>
+            <a:r>
+              <a:rPr sz="1900" b="0" i="0">
+                <a:solidFill>
+                  <a:srgbClr val="FFFFFF"/>
+                </a:solidFill>
+                <a:latin typeface="Cambria"/>
+              </a:rPr>
+              <a:t>10,000 plastic clips: injection moulding (shaping). One prototype clip: 3D printing.</a:t>
+            </a:r>
+          </a:p>
+        </p:txBody>
+      </p:sp>
+    </p:spTree>
+  </p:cSld>
+  <p:clrMapOvr>
+    <a:masterClrMapping/>
+  </p:clrMapOvr>
+</p:sld>
+</file>
+
+<file path=ppt/slides/slide8.xml><?xml version="1.0" encoding="utf-8"?>
+<p:sld xmlns:a="http://schemas.openxmlformats.org/drawingml/2006/main" xmlns:p="http://schemas.openxmlformats.org/presentationml/2006/main" xmlns:r="http://schemas.openxmlformats.org/officeDocument/2006/relationships">
+  <p:cSld>
+    <p:bg>
+      <p:bgPr>
+        <a:solidFill>
+          <a:srgbClr val="FFFFFF"/>
+        </a:solidFill>
+        <a:effectLst/>
+      </p:bgPr>
+    </p:bg>
+    <p:spTree>
+      <p:nvGrpSpPr>
+        <p:cNvPr id="1" name=""/>
+        <p:cNvGrpSpPr/>
+        <p:nvPr/>
+      </p:nvGrpSpPr>
+      <p:grpSpPr/>
+      <p:sp>
+        <p:nvSpPr>
+          <p:cNvPr id="2" name="TextBox 1"/>
+          <p:cNvSpPr txBox="1"/>
+          <p:nvPr/>
+        </p:nvSpPr>
+        <p:spPr>
+          <a:xfrm>
+            <a:off x="548640" y="320040"/>
+            <a:ext cx="11094415" cy="274320"/>
+          </a:xfrm>
+          <a:prstGeom prst="rect">
+            <a:avLst/>
+          </a:prstGeom>
+          <a:noFill/>
+        </p:spPr>
+        <p:txBody>
+          <a:bodyPr wrap="square" anchor="t" lIns="0" rIns="0" tIns="0" bIns="0"/>
+          <a:lstStyle/>
+          <a:p>
+            <a:pPr algn="l"/>
+            <a:r>
+              <a:rPr sz="1100" b="1" i="0">
+                <a:solidFill>
+                  <a:srgbClr val="54595D"/>
+                </a:solidFill>
+                <a:latin typeface="Calibri"/>
+              </a:rPr>
+              <a:t>MECHANICAL ENGINEERING  ·  Mechanical: Knowledge criteria</a:t>
+            </a:r>
+          </a:p>
+        </p:txBody>
+      </p:sp>
+      <p:sp>
+        <p:nvSpPr>
+          <p:cNvPr id="3" name="TextBox 2"/>
+          <p:cNvSpPr txBox="1"/>
+          <p:nvPr/>
+        </p:nvSpPr>
+        <p:spPr>
+          <a:xfrm>
+            <a:off x="548640" y="566928"/>
+            <a:ext cx="11094415" cy="822960"/>
+          </a:xfrm>
+          <a:prstGeom prst="rect">
+            <a:avLst/>
+          </a:prstGeom>
+          <a:noFill/>
+        </p:spPr>
+        <p:txBody>
+          <a:bodyPr wrap="square" anchor="ctr" lIns="0" rIns="0" tIns="0" bIns="0"/>
+          <a:lstStyle/>
+          <a:p>
+            <a:pPr algn="l"/>
+            <a:r>
+              <a:rPr sz="3200" b="1" i="0">
+                <a:solidFill>
+                  <a:srgbClr val="03306E"/>
+                </a:solidFill>
+                <a:latin typeface="Cambria"/>
+              </a:rPr>
+              <a:t>Manufacturing processes</a:t>
+            </a:r>
+          </a:p>
+        </p:txBody>
+      </p:sp>
+      <p:sp>
+        <p:nvSpPr>
+          <p:cNvPr id="4" name="TextBox 3"/>
+          <p:cNvSpPr txBox="1"/>
+          <p:nvPr/>
+        </p:nvSpPr>
+        <p:spPr>
+          <a:xfrm>
+            <a:off x="548640" y="6446520"/>
+            <a:ext cx="8229600" cy="274320"/>
+          </a:xfrm>
+          <a:prstGeom prst="rect">
+            <a:avLst/>
+          </a:prstGeom>
+          <a:noFill/>
+        </p:spPr>
+        <p:txBody>
+          <a:bodyPr wrap="square" anchor="t" lIns="0" rIns="0" tIns="0" bIns="0"/>
+          <a:lstStyle/>
+          <a:p>
+            <a:pPr algn="l"/>
+            <a:r>
+              <a:rPr sz="1000" b="0" i="0">
+                <a:solidFill>
+                  <a:srgbClr val="54595D"/>
+                </a:solidFill>
+                <a:latin typeface="Calibri"/>
+              </a:rPr>
+              <a:t>Design and Development for Engineering and Manufacturing T Level  ·  Materials, Standard Parts and Manufacturing Processes</a:t>
+            </a:r>
+          </a:p>
+        </p:txBody>
+      </p:sp>
+      <p:sp>
+        <p:nvSpPr>
+          <p:cNvPr id="5" name="TextBox 4"/>
+          <p:cNvSpPr txBox="1"/>
+          <p:nvPr/>
+        </p:nvSpPr>
+        <p:spPr>
+          <a:xfrm>
+            <a:off x="10728655" y="6446520"/>
+            <a:ext cx="914400" cy="274320"/>
+          </a:xfrm>
+          <a:prstGeom prst="rect">
+            <a:avLst/>
+          </a:prstGeom>
+          <a:noFill/>
+        </p:spPr>
+        <p:txBody>
+          <a:bodyPr wrap="square" anchor="t" lIns="0" rIns="0" tIns="0" bIns="0"/>
+          <a:lstStyle/>
+          <a:p>
+            <a:pPr algn="r"/>
+            <a:r>
+              <a:rPr sz="1000" b="0" i="0">
+                <a:solidFill>
+                  <a:srgbClr val="54595D"/>
+                </a:solidFill>
+                <a:latin typeface="Calibri"/>
+              </a:rPr>
+              <a:t>8</a:t>
             </a:r>
           </a:p>
         </p:txBody>
@@ -6598,7 +10363,7 @@
 </p:sld>
 </file>
 
-<file path=ppt/slides/slide6.xml><?xml version="1.0" encoding="utf-8"?>
+<file path=ppt/slides/slide9.xml><?xml version="1.0" encoding="utf-8"?>
 <p:sld xmlns:a="http://schemas.openxmlformats.org/drawingml/2006/main" xmlns:p="http://schemas.openxmlformats.org/presentationml/2006/main" xmlns:r="http://schemas.openxmlformats.org/officeDocument/2006/relationships">
   <p:cSld>
     <p:bg>
@@ -6677,7 +10442,7 @@
                 </a:solidFill>
                 <a:latin typeface="Cambria"/>
               </a:rPr>
-              <a:t>Check your understanding</a:t>
+              <a:t>Quick check: Manufacturing processes</a:t>
             </a:r>
           </a:p>
         </p:txBody>
@@ -6743,7 +10508,7 @@
                 </a:solidFill>
                 <a:latin typeface="Calibri"/>
               </a:rPr>
-              <a:t>6</a:t>
+              <a:t>9</a:t>
             </a:r>
           </a:p>
         </p:txBody>
@@ -6756,8 +10521,8 @@
         </p:nvSpPr>
         <p:spPr>
           <a:xfrm>
-            <a:off x="548640" y="1618488"/>
-            <a:ext cx="411480" cy="411480"/>
+            <a:off x="548640" y="1691640"/>
+            <a:ext cx="502920" cy="502920"/>
           </a:xfrm>
           <a:prstGeom prst="ellipse">
             <a:avLst/>
@@ -6790,7 +10555,7 @@
           <a:p>
             <a:pPr algn="ctr"/>
             <a:r>
-              <a:rPr sz="1400" b="1">
+              <a:rPr sz="1600" b="1">
                 <a:solidFill>
                   <a:srgbClr val="FFFFFF"/>
                 </a:solidFill>
@@ -6809,8 +10574,8 @@
         </p:nvSpPr>
         <p:spPr>
           <a:xfrm>
-            <a:off x="1234440" y="1600200"/>
-            <a:ext cx="10408615" cy="1030986"/>
+            <a:off x="1371600" y="1645920"/>
+            <a:ext cx="10271455" cy="1188720"/>
           </a:xfrm>
           <a:prstGeom prst="rect">
             <a:avLst/>
@@ -6823,13 +10588,13 @@
           <a:p>
             <a:pPr algn="l"/>
             <a:r>
-              <a:rPr sz="2200" b="0" i="0">
+              <a:rPr sz="2400" b="0" i="0">
                 <a:solidFill>
                   <a:srgbClr val="202122"/>
                 </a:solidFill>
                 <a:latin typeface="Calibri"/>
               </a:rPr>
-              <a:t>What is a factor of safety?</a:t>
+              <a:t>Which welding process gives the neatest finish on thin stainless steel?</a:t>
             </a:r>
           </a:p>
         </p:txBody>
@@ -6842,8 +10607,8 @@
         </p:nvSpPr>
         <p:spPr>
           <a:xfrm>
-            <a:off x="548640" y="2814066"/>
-            <a:ext cx="411480" cy="411480"/>
+            <a:off x="548640" y="3108960"/>
+            <a:ext cx="502920" cy="502920"/>
           </a:xfrm>
           <a:prstGeom prst="ellipse">
             <a:avLst/>
@@ -6876,7 +10641,7 @@
           <a:p>
             <a:pPr algn="ctr"/>
             <a:r>
-              <a:rPr sz="1400" b="1">
+              <a:rPr sz="1600" b="1">
                 <a:solidFill>
                   <a:srgbClr val="FFFFFF"/>
                 </a:solidFill>
@@ -6895,8 +10660,8 @@
         </p:nvSpPr>
         <p:spPr>
           <a:xfrm>
-            <a:off x="1234440" y="2795778"/>
-            <a:ext cx="10408615" cy="1030986"/>
+            <a:off x="1371600" y="3063240"/>
+            <a:ext cx="10271455" cy="1188720"/>
           </a:xfrm>
           <a:prstGeom prst="rect">
             <a:avLst/>
@@ -6909,13 +10674,13 @@
           <a:p>
             <a:pPr algn="l"/>
             <a:r>
-              <a:rPr sz="2200" b="0" i="0">
+              <a:rPr sz="2400" b="0" i="0">
                 <a:solidFill>
                   <a:srgbClr val="202122"/>
                 </a:solidFill>
                 <a:latin typeface="Calibri"/>
               </a:rPr>
-              <a:t>Why use standard parts?</a:t>
+              <a:t>Why is casting costly for small quantities?</a:t>
             </a:r>
           </a:p>
         </p:txBody>
@@ -6928,8 +10693,8 @@
         </p:nvSpPr>
         <p:spPr>
           <a:xfrm>
-            <a:off x="548640" y="4009644"/>
-            <a:ext cx="411480" cy="411480"/>
+            <a:off x="548640" y="4526280"/>
+            <a:ext cx="502920" cy="502920"/>
           </a:xfrm>
           <a:prstGeom prst="ellipse">
             <a:avLst/>
@@ -6962,7 +10727,7 @@
           <a:p>
             <a:pPr algn="ctr"/>
             <a:r>
-              <a:rPr sz="1400" b="1">
+              <a:rPr sz="1600" b="1">
                 <a:solidFill>
                   <a:srgbClr val="FFFFFF"/>
                 </a:solidFill>
@@ -6981,8 +10746,8 @@
         </p:nvSpPr>
         <p:spPr>
           <a:xfrm>
-            <a:off x="1234440" y="3991356"/>
-            <a:ext cx="10408615" cy="1030986"/>
+            <a:off x="1371600" y="4480560"/>
+            <a:ext cx="10271455" cy="1188720"/>
           </a:xfrm>
           <a:prstGeom prst="rect">
             <a:avLst/>
@@ -6995,1052 +10760,13 @@
           <a:p>
             <a:pPr algn="l"/>
             <a:r>
-              <a:rPr sz="2200" b="0" i="0">
+              <a:rPr sz="2400" b="0" i="0">
                 <a:solidFill>
                   <a:srgbClr val="202122"/>
                 </a:solidFill>
                 <a:latin typeface="Calibri"/>
               </a:rPr>
-              <a:t>Which welding process suits thin stainless steel with a neat finish?</a:t>
-            </a:r>
-          </a:p>
-        </p:txBody>
-      </p:sp>
-      <p:sp>
-        <p:nvSpPr>
-          <p:cNvPr id="12" name="Oval 11"/>
-          <p:cNvSpPr/>
-          <p:nvPr/>
-        </p:nvSpPr>
-        <p:spPr>
-          <a:xfrm>
-            <a:off x="548640" y="5205221"/>
-            <a:ext cx="411480" cy="411480"/>
-          </a:xfrm>
-          <a:prstGeom prst="ellipse">
-            <a:avLst/>
-          </a:prstGeom>
-          <a:solidFill>
-            <a:srgbClr val="E0463A"/>
-          </a:solidFill>
-          <a:ln>
-            <a:noFill/>
-          </a:ln>
-          <a:effectLst/>
-        </p:spPr>
-        <p:style>
-          <a:lnRef idx="1">
-            <a:schemeClr val="accent1"/>
-          </a:lnRef>
-          <a:fillRef idx="3">
-            <a:schemeClr val="accent1"/>
-          </a:fillRef>
-          <a:effectRef idx="2">
-            <a:schemeClr val="accent1"/>
-          </a:effectRef>
-          <a:fontRef idx="minor">
-            <a:schemeClr val="lt1"/>
-          </a:fontRef>
-        </p:style>
-        <p:txBody>
-          <a:bodyPr rtlCol="0" anchor="ctr" lIns="0" rIns="0" tIns="0" bIns="0"/>
-          <a:lstStyle/>
-          <a:p>
-            <a:pPr algn="ctr"/>
-            <a:r>
-              <a:rPr sz="1400" b="1">
-                <a:solidFill>
-                  <a:srgbClr val="FFFFFF"/>
-                </a:solidFill>
-                <a:latin typeface="Calibri"/>
-              </a:rPr>
-              <a:t>4</a:t>
-            </a:r>
-          </a:p>
-        </p:txBody>
-      </p:sp>
-      <p:sp>
-        <p:nvSpPr>
-          <p:cNvPr id="13" name="TextBox 12"/>
-          <p:cNvSpPr txBox="1"/>
-          <p:nvPr/>
-        </p:nvSpPr>
-        <p:spPr>
-          <a:xfrm>
-            <a:off x="1234440" y="5186933"/>
-            <a:ext cx="10408615" cy="1030986"/>
-          </a:xfrm>
-          <a:prstGeom prst="rect">
-            <a:avLst/>
-          </a:prstGeom>
-          <a:noFill/>
-        </p:spPr>
-        <p:txBody>
-          <a:bodyPr wrap="square" anchor="t" lIns="0" rIns="0" tIns="0" bIns="0"/>
-          <a:lstStyle/>
-          <a:p>
-            <a:pPr algn="l"/>
-            <a:r>
-              <a:rPr sz="2200" b="0" i="0">
-                <a:solidFill>
-                  <a:srgbClr val="202122"/>
-                </a:solidFill>
-                <a:latin typeface="Calibri"/>
-              </a:rPr>
-              <a:t>Why do tolerances matter for assembly?</a:t>
-            </a:r>
-          </a:p>
-        </p:txBody>
-      </p:sp>
-    </p:spTree>
-  </p:cSld>
-  <p:clrMapOvr>
-    <a:masterClrMapping/>
-  </p:clrMapOvr>
-</p:sld>
-</file>
-
-<file path=ppt/slides/slide7.xml><?xml version="1.0" encoding="utf-8"?>
-<p:sld xmlns:a="http://schemas.openxmlformats.org/drawingml/2006/main" xmlns:p="http://schemas.openxmlformats.org/presentationml/2006/main" xmlns:r="http://schemas.openxmlformats.org/officeDocument/2006/relationships">
-  <p:cSld>
-    <p:bg>
-      <p:bgPr>
-        <a:solidFill>
-          <a:srgbClr val="FFFFFF"/>
-        </a:solidFill>
-        <a:effectLst/>
-      </p:bgPr>
-    </p:bg>
-    <p:spTree>
-      <p:nvGrpSpPr>
-        <p:cNvPr id="1" name=""/>
-        <p:cNvGrpSpPr/>
-        <p:nvPr/>
-      </p:nvGrpSpPr>
-      <p:grpSpPr/>
-      <p:sp>
-        <p:nvSpPr>
-          <p:cNvPr id="2" name="TextBox 1"/>
-          <p:cNvSpPr txBox="1"/>
-          <p:nvPr/>
-        </p:nvSpPr>
-        <p:spPr>
-          <a:xfrm>
-            <a:off x="548640" y="320040"/>
-            <a:ext cx="11094415" cy="274320"/>
-          </a:xfrm>
-          <a:prstGeom prst="rect">
-            <a:avLst/>
-          </a:prstGeom>
-          <a:noFill/>
-        </p:spPr>
-        <p:txBody>
-          <a:bodyPr wrap="square" anchor="t" lIns="0" rIns="0" tIns="0" bIns="0"/>
-          <a:lstStyle/>
-          <a:p>
-            <a:pPr algn="l"/>
-            <a:r>
-              <a:rPr sz="1100" b="1" i="0">
-                <a:solidFill>
-                  <a:srgbClr val="54595D"/>
-                </a:solidFill>
-                <a:latin typeface="Calibri"/>
-              </a:rPr>
-              <a:t>MECHANICAL ENGINEERING  ·  Mechanical: Knowledge criteria</a:t>
-            </a:r>
-          </a:p>
-        </p:txBody>
-      </p:sp>
-      <p:sp>
-        <p:nvSpPr>
-          <p:cNvPr id="3" name="TextBox 2"/>
-          <p:cNvSpPr txBox="1"/>
-          <p:nvPr/>
-        </p:nvSpPr>
-        <p:spPr>
-          <a:xfrm>
-            <a:off x="548640" y="566928"/>
-            <a:ext cx="11094415" cy="822960"/>
-          </a:xfrm>
-          <a:prstGeom prst="rect">
-            <a:avLst/>
-          </a:prstGeom>
-          <a:noFill/>
-        </p:spPr>
-        <p:txBody>
-          <a:bodyPr wrap="square" anchor="ctr" lIns="0" rIns="0" tIns="0" bIns="0"/>
-          <a:lstStyle/>
-          <a:p>
-            <a:pPr algn="l"/>
-            <a:r>
-              <a:rPr sz="3200" b="1" i="0">
-                <a:solidFill>
-                  <a:srgbClr val="03306E"/>
-                </a:solidFill>
-                <a:latin typeface="Cambria"/>
-              </a:rPr>
-              <a:t>Answers</a:t>
-            </a:r>
-          </a:p>
-        </p:txBody>
-      </p:sp>
-      <p:sp>
-        <p:nvSpPr>
-          <p:cNvPr id="4" name="TextBox 3"/>
-          <p:cNvSpPr txBox="1"/>
-          <p:nvPr/>
-        </p:nvSpPr>
-        <p:spPr>
-          <a:xfrm>
-            <a:off x="548640" y="6446520"/>
-            <a:ext cx="8229600" cy="274320"/>
-          </a:xfrm>
-          <a:prstGeom prst="rect">
-            <a:avLst/>
-          </a:prstGeom>
-          <a:noFill/>
-        </p:spPr>
-        <p:txBody>
-          <a:bodyPr wrap="square" anchor="t" lIns="0" rIns="0" tIns="0" bIns="0"/>
-          <a:lstStyle/>
-          <a:p>
-            <a:pPr algn="l"/>
-            <a:r>
-              <a:rPr sz="1000" b="0" i="0">
-                <a:solidFill>
-                  <a:srgbClr val="54595D"/>
-                </a:solidFill>
-                <a:latin typeface="Calibri"/>
-              </a:rPr>
-              <a:t>Design and Development for Engineering and Manufacturing T Level  ·  Materials, Standard Parts and Manufacturing Processes</a:t>
-            </a:r>
-          </a:p>
-        </p:txBody>
-      </p:sp>
-      <p:sp>
-        <p:nvSpPr>
-          <p:cNvPr id="5" name="TextBox 4"/>
-          <p:cNvSpPr txBox="1"/>
-          <p:nvPr/>
-        </p:nvSpPr>
-        <p:spPr>
-          <a:xfrm>
-            <a:off x="10728655" y="6446520"/>
-            <a:ext cx="914400" cy="274320"/>
-          </a:xfrm>
-          <a:prstGeom prst="rect">
-            <a:avLst/>
-          </a:prstGeom>
-          <a:noFill/>
-        </p:spPr>
-        <p:txBody>
-          <a:bodyPr wrap="square" anchor="t" lIns="0" rIns="0" tIns="0" bIns="0"/>
-          <a:lstStyle/>
-          <a:p>
-            <a:pPr algn="r"/>
-            <a:r>
-              <a:rPr sz="1000" b="0" i="0">
-                <a:solidFill>
-                  <a:srgbClr val="54595D"/>
-                </a:solidFill>
-                <a:latin typeface="Calibri"/>
-              </a:rPr>
-              <a:t>7</a:t>
-            </a:r>
-          </a:p>
-        </p:txBody>
-      </p:sp>
-      <p:sp>
-        <p:nvSpPr>
-          <p:cNvPr id="6" name="Oval 5"/>
-          <p:cNvSpPr/>
-          <p:nvPr/>
-        </p:nvSpPr>
-        <p:spPr>
-          <a:xfrm>
-            <a:off x="548640" y="1618488"/>
-            <a:ext cx="411480" cy="411480"/>
-          </a:xfrm>
-          <a:prstGeom prst="ellipse">
-            <a:avLst/>
-          </a:prstGeom>
-          <a:solidFill>
-            <a:srgbClr val="E0463A"/>
-          </a:solidFill>
-          <a:ln>
-            <a:noFill/>
-          </a:ln>
-          <a:effectLst/>
-        </p:spPr>
-        <p:style>
-          <a:lnRef idx="1">
-            <a:schemeClr val="accent1"/>
-          </a:lnRef>
-          <a:fillRef idx="3">
-            <a:schemeClr val="accent1"/>
-          </a:fillRef>
-          <a:effectRef idx="2">
-            <a:schemeClr val="accent1"/>
-          </a:effectRef>
-          <a:fontRef idx="minor">
-            <a:schemeClr val="lt1"/>
-          </a:fontRef>
-        </p:style>
-        <p:txBody>
-          <a:bodyPr rtlCol="0" anchor="ctr" lIns="0" rIns="0" tIns="0" bIns="0"/>
-          <a:lstStyle/>
-          <a:p>
-            <a:pPr algn="ctr"/>
-            <a:r>
-              <a:rPr sz="1400" b="1">
-                <a:solidFill>
-                  <a:srgbClr val="FFFFFF"/>
-                </a:solidFill>
-                <a:latin typeface="Calibri"/>
-              </a:rPr>
-              <a:t>1</a:t>
-            </a:r>
-          </a:p>
-        </p:txBody>
-      </p:sp>
-      <p:sp>
-        <p:nvSpPr>
-          <p:cNvPr id="7" name="TextBox 6"/>
-          <p:cNvSpPr txBox="1"/>
-          <p:nvPr/>
-        </p:nvSpPr>
-        <p:spPr>
-          <a:xfrm>
-            <a:off x="1234440" y="1600200"/>
-            <a:ext cx="10408615" cy="1030986"/>
-          </a:xfrm>
-          <a:prstGeom prst="rect">
-            <a:avLst/>
-          </a:prstGeom>
-          <a:noFill/>
-        </p:spPr>
-        <p:txBody>
-          <a:bodyPr wrap="square" anchor="t" lIns="0" rIns="0" tIns="0" bIns="0"/>
-          <a:lstStyle/>
-          <a:p>
-            <a:pPr algn="l"/>
-            <a:r>
-              <a:rPr sz="1800" b="0" i="0">
-                <a:solidFill>
-                  <a:srgbClr val="54595D"/>
-                </a:solidFill>
-                <a:latin typeface="Calibri"/>
-              </a:rPr>
-              <a:t>What is a factor of safety?</a:t>
-            </a:r>
-          </a:p>
-          <a:p>
-            <a:r>
-              <a:rPr sz="1800" b="1">
-                <a:solidFill>
-                  <a:srgbClr val="03306E"/>
-                </a:solidFill>
-                <a:latin typeface="Calibri"/>
-              </a:rPr>
-              <a:t>The ratio of a design's strength to the load it is expected to carry.</a:t>
-            </a:r>
-          </a:p>
-        </p:txBody>
-      </p:sp>
-      <p:sp>
-        <p:nvSpPr>
-          <p:cNvPr id="8" name="Oval 7"/>
-          <p:cNvSpPr/>
-          <p:nvPr/>
-        </p:nvSpPr>
-        <p:spPr>
-          <a:xfrm>
-            <a:off x="548640" y="2814066"/>
-            <a:ext cx="411480" cy="411480"/>
-          </a:xfrm>
-          <a:prstGeom prst="ellipse">
-            <a:avLst/>
-          </a:prstGeom>
-          <a:solidFill>
-            <a:srgbClr val="E0463A"/>
-          </a:solidFill>
-          <a:ln>
-            <a:noFill/>
-          </a:ln>
-          <a:effectLst/>
-        </p:spPr>
-        <p:style>
-          <a:lnRef idx="1">
-            <a:schemeClr val="accent1"/>
-          </a:lnRef>
-          <a:fillRef idx="3">
-            <a:schemeClr val="accent1"/>
-          </a:fillRef>
-          <a:effectRef idx="2">
-            <a:schemeClr val="accent1"/>
-          </a:effectRef>
-          <a:fontRef idx="minor">
-            <a:schemeClr val="lt1"/>
-          </a:fontRef>
-        </p:style>
-        <p:txBody>
-          <a:bodyPr rtlCol="0" anchor="ctr" lIns="0" rIns="0" tIns="0" bIns="0"/>
-          <a:lstStyle/>
-          <a:p>
-            <a:pPr algn="ctr"/>
-            <a:r>
-              <a:rPr sz="1400" b="1">
-                <a:solidFill>
-                  <a:srgbClr val="FFFFFF"/>
-                </a:solidFill>
-                <a:latin typeface="Calibri"/>
-              </a:rPr>
-              <a:t>2</a:t>
-            </a:r>
-          </a:p>
-        </p:txBody>
-      </p:sp>
-      <p:sp>
-        <p:nvSpPr>
-          <p:cNvPr id="9" name="TextBox 8"/>
-          <p:cNvSpPr txBox="1"/>
-          <p:nvPr/>
-        </p:nvSpPr>
-        <p:spPr>
-          <a:xfrm>
-            <a:off x="1234440" y="2795778"/>
-            <a:ext cx="10408615" cy="1030986"/>
-          </a:xfrm>
-          <a:prstGeom prst="rect">
-            <a:avLst/>
-          </a:prstGeom>
-          <a:noFill/>
-        </p:spPr>
-        <p:txBody>
-          <a:bodyPr wrap="square" anchor="t" lIns="0" rIns="0" tIns="0" bIns="0"/>
-          <a:lstStyle/>
-          <a:p>
-            <a:pPr algn="l"/>
-            <a:r>
-              <a:rPr sz="1800" b="0" i="0">
-                <a:solidFill>
-                  <a:srgbClr val="54595D"/>
-                </a:solidFill>
-                <a:latin typeface="Calibri"/>
-              </a:rPr>
-              <a:t>Why use standard parts?</a:t>
-            </a:r>
-          </a:p>
-          <a:p>
-            <a:r>
-              <a:rPr sz="1800" b="1">
-                <a:solidFill>
-                  <a:srgbClr val="03306E"/>
-                </a:solidFill>
-                <a:latin typeface="Calibri"/>
-              </a:rPr>
-              <a:t>Cheaper, proven, easy to replace and source.</a:t>
-            </a:r>
-          </a:p>
-        </p:txBody>
-      </p:sp>
-      <p:sp>
-        <p:nvSpPr>
-          <p:cNvPr id="10" name="Oval 9"/>
-          <p:cNvSpPr/>
-          <p:nvPr/>
-        </p:nvSpPr>
-        <p:spPr>
-          <a:xfrm>
-            <a:off x="548640" y="4009644"/>
-            <a:ext cx="411480" cy="411480"/>
-          </a:xfrm>
-          <a:prstGeom prst="ellipse">
-            <a:avLst/>
-          </a:prstGeom>
-          <a:solidFill>
-            <a:srgbClr val="E0463A"/>
-          </a:solidFill>
-          <a:ln>
-            <a:noFill/>
-          </a:ln>
-          <a:effectLst/>
-        </p:spPr>
-        <p:style>
-          <a:lnRef idx="1">
-            <a:schemeClr val="accent1"/>
-          </a:lnRef>
-          <a:fillRef idx="3">
-            <a:schemeClr val="accent1"/>
-          </a:fillRef>
-          <a:effectRef idx="2">
-            <a:schemeClr val="accent1"/>
-          </a:effectRef>
-          <a:fontRef idx="minor">
-            <a:schemeClr val="lt1"/>
-          </a:fontRef>
-        </p:style>
-        <p:txBody>
-          <a:bodyPr rtlCol="0" anchor="ctr" lIns="0" rIns="0" tIns="0" bIns="0"/>
-          <a:lstStyle/>
-          <a:p>
-            <a:pPr algn="ctr"/>
-            <a:r>
-              <a:rPr sz="1400" b="1">
-                <a:solidFill>
-                  <a:srgbClr val="FFFFFF"/>
-                </a:solidFill>
-                <a:latin typeface="Calibri"/>
-              </a:rPr>
-              <a:t>3</a:t>
-            </a:r>
-          </a:p>
-        </p:txBody>
-      </p:sp>
-      <p:sp>
-        <p:nvSpPr>
-          <p:cNvPr id="11" name="TextBox 10"/>
-          <p:cNvSpPr txBox="1"/>
-          <p:nvPr/>
-        </p:nvSpPr>
-        <p:spPr>
-          <a:xfrm>
-            <a:off x="1234440" y="3991356"/>
-            <a:ext cx="10408615" cy="1030986"/>
-          </a:xfrm>
-          <a:prstGeom prst="rect">
-            <a:avLst/>
-          </a:prstGeom>
-          <a:noFill/>
-        </p:spPr>
-        <p:txBody>
-          <a:bodyPr wrap="square" anchor="t" lIns="0" rIns="0" tIns="0" bIns="0"/>
-          <a:lstStyle/>
-          <a:p>
-            <a:pPr algn="l"/>
-            <a:r>
-              <a:rPr sz="1800" b="0" i="0">
-                <a:solidFill>
-                  <a:srgbClr val="54595D"/>
-                </a:solidFill>
-                <a:latin typeface="Calibri"/>
-              </a:rPr>
-              <a:t>Which welding process suits thin stainless steel with a neat finish?</a:t>
-            </a:r>
-          </a:p>
-          <a:p>
-            <a:r>
-              <a:rPr sz="1800" b="1">
-                <a:solidFill>
-                  <a:srgbClr val="03306E"/>
-                </a:solidFill>
-                <a:latin typeface="Calibri"/>
-              </a:rPr>
-              <a:t>TIG.</a:t>
-            </a:r>
-          </a:p>
-        </p:txBody>
-      </p:sp>
-      <p:sp>
-        <p:nvSpPr>
-          <p:cNvPr id="12" name="Oval 11"/>
-          <p:cNvSpPr/>
-          <p:nvPr/>
-        </p:nvSpPr>
-        <p:spPr>
-          <a:xfrm>
-            <a:off x="548640" y="5205221"/>
-            <a:ext cx="411480" cy="411480"/>
-          </a:xfrm>
-          <a:prstGeom prst="ellipse">
-            <a:avLst/>
-          </a:prstGeom>
-          <a:solidFill>
-            <a:srgbClr val="E0463A"/>
-          </a:solidFill>
-          <a:ln>
-            <a:noFill/>
-          </a:ln>
-          <a:effectLst/>
-        </p:spPr>
-        <p:style>
-          <a:lnRef idx="1">
-            <a:schemeClr val="accent1"/>
-          </a:lnRef>
-          <a:fillRef idx="3">
-            <a:schemeClr val="accent1"/>
-          </a:fillRef>
-          <a:effectRef idx="2">
-            <a:schemeClr val="accent1"/>
-          </a:effectRef>
-          <a:fontRef idx="minor">
-            <a:schemeClr val="lt1"/>
-          </a:fontRef>
-        </p:style>
-        <p:txBody>
-          <a:bodyPr rtlCol="0" anchor="ctr" lIns="0" rIns="0" tIns="0" bIns="0"/>
-          <a:lstStyle/>
-          <a:p>
-            <a:pPr algn="ctr"/>
-            <a:r>
-              <a:rPr sz="1400" b="1">
-                <a:solidFill>
-                  <a:srgbClr val="FFFFFF"/>
-                </a:solidFill>
-                <a:latin typeface="Calibri"/>
-              </a:rPr>
-              <a:t>4</a:t>
-            </a:r>
-          </a:p>
-        </p:txBody>
-      </p:sp>
-      <p:sp>
-        <p:nvSpPr>
-          <p:cNvPr id="13" name="TextBox 12"/>
-          <p:cNvSpPr txBox="1"/>
-          <p:nvPr/>
-        </p:nvSpPr>
-        <p:spPr>
-          <a:xfrm>
-            <a:off x="1234440" y="5186933"/>
-            <a:ext cx="10408615" cy="1030986"/>
-          </a:xfrm>
-          <a:prstGeom prst="rect">
-            <a:avLst/>
-          </a:prstGeom>
-          <a:noFill/>
-        </p:spPr>
-        <p:txBody>
-          <a:bodyPr wrap="square" anchor="t" lIns="0" rIns="0" tIns="0" bIns="0"/>
-          <a:lstStyle/>
-          <a:p>
-            <a:pPr algn="l"/>
-            <a:r>
-              <a:rPr sz="1800" b="0" i="0">
-                <a:solidFill>
-                  <a:srgbClr val="54595D"/>
-                </a:solidFill>
-                <a:latin typeface="Calibri"/>
-              </a:rPr>
-              <a:t>Why do tolerances matter for assembly?</a:t>
-            </a:r>
-          </a:p>
-          <a:p>
-            <a:r>
-              <a:rPr sz="1800" b="1">
-                <a:solidFill>
-                  <a:srgbClr val="03306E"/>
-                </a:solidFill>
-                <a:latin typeface="Calibri"/>
-              </a:rPr>
-              <a:t>Parts must fit together as intended.</a:t>
-            </a:r>
-          </a:p>
-        </p:txBody>
-      </p:sp>
-    </p:spTree>
-  </p:cSld>
-  <p:clrMapOvr>
-    <a:masterClrMapping/>
-  </p:clrMapOvr>
-</p:sld>
-</file>
-
-<file path=ppt/slides/slide8.xml><?xml version="1.0" encoding="utf-8"?>
-<p:sld xmlns:a="http://schemas.openxmlformats.org/drawingml/2006/main" xmlns:p="http://schemas.openxmlformats.org/presentationml/2006/main" xmlns:r="http://schemas.openxmlformats.org/officeDocument/2006/relationships">
-  <p:cSld>
-    <p:bg>
-      <p:bgPr>
-        <a:solidFill>
-          <a:srgbClr val="FFFFFF"/>
-        </a:solidFill>
-        <a:effectLst/>
-      </p:bgPr>
-    </p:bg>
-    <p:spTree>
-      <p:nvGrpSpPr>
-        <p:cNvPr id="1" name=""/>
-        <p:cNvGrpSpPr/>
-        <p:nvPr/>
-      </p:nvGrpSpPr>
-      <p:grpSpPr/>
-      <p:sp>
-        <p:nvSpPr>
-          <p:cNvPr id="2" name="TextBox 1"/>
-          <p:cNvSpPr txBox="1"/>
-          <p:nvPr/>
-        </p:nvSpPr>
-        <p:spPr>
-          <a:xfrm>
-            <a:off x="548640" y="320040"/>
-            <a:ext cx="11094415" cy="274320"/>
-          </a:xfrm>
-          <a:prstGeom prst="rect">
-            <a:avLst/>
-          </a:prstGeom>
-          <a:noFill/>
-        </p:spPr>
-        <p:txBody>
-          <a:bodyPr wrap="square" anchor="t" lIns="0" rIns="0" tIns="0" bIns="0"/>
-          <a:lstStyle/>
-          <a:p>
-            <a:pPr algn="l"/>
-            <a:r>
-              <a:rPr sz="1100" b="1" i="0">
-                <a:solidFill>
-                  <a:srgbClr val="54595D"/>
-                </a:solidFill>
-                <a:latin typeface="Calibri"/>
-              </a:rPr>
-              <a:t>MECHANICAL ENGINEERING  ·  Mechanical: Knowledge criteria</a:t>
-            </a:r>
-          </a:p>
-        </p:txBody>
-      </p:sp>
-      <p:sp>
-        <p:nvSpPr>
-          <p:cNvPr id="3" name="TextBox 2"/>
-          <p:cNvSpPr txBox="1"/>
-          <p:nvPr/>
-        </p:nvSpPr>
-        <p:spPr>
-          <a:xfrm>
-            <a:off x="548640" y="566928"/>
-            <a:ext cx="11094415" cy="822960"/>
-          </a:xfrm>
-          <a:prstGeom prst="rect">
-            <a:avLst/>
-          </a:prstGeom>
-          <a:noFill/>
-        </p:spPr>
-        <p:txBody>
-          <a:bodyPr wrap="square" anchor="ctr" lIns="0" rIns="0" tIns="0" bIns="0"/>
-          <a:lstStyle/>
-          <a:p>
-            <a:pPr algn="l"/>
-            <a:r>
-              <a:rPr sz="3200" b="1" i="0">
-                <a:solidFill>
-                  <a:srgbClr val="03306E"/>
-                </a:solidFill>
-                <a:latin typeface="Cambria"/>
-              </a:rPr>
-              <a:t>Activity: Process selection</a:t>
-            </a:r>
-          </a:p>
-        </p:txBody>
-      </p:sp>
-      <p:sp>
-        <p:nvSpPr>
-          <p:cNvPr id="4" name="TextBox 3"/>
-          <p:cNvSpPr txBox="1"/>
-          <p:nvPr/>
-        </p:nvSpPr>
-        <p:spPr>
-          <a:xfrm>
-            <a:off x="548640" y="6446520"/>
-            <a:ext cx="8229600" cy="274320"/>
-          </a:xfrm>
-          <a:prstGeom prst="rect">
-            <a:avLst/>
-          </a:prstGeom>
-          <a:noFill/>
-        </p:spPr>
-        <p:txBody>
-          <a:bodyPr wrap="square" anchor="t" lIns="0" rIns="0" tIns="0" bIns="0"/>
-          <a:lstStyle/>
-          <a:p>
-            <a:pPr algn="l"/>
-            <a:r>
-              <a:rPr sz="1000" b="0" i="0">
-                <a:solidFill>
-                  <a:srgbClr val="54595D"/>
-                </a:solidFill>
-                <a:latin typeface="Calibri"/>
-              </a:rPr>
-              <a:t>Design and Development for Engineering and Manufacturing T Level  ·  Materials, Standard Parts and Manufacturing Processes</a:t>
-            </a:r>
-          </a:p>
-        </p:txBody>
-      </p:sp>
-      <p:sp>
-        <p:nvSpPr>
-          <p:cNvPr id="5" name="TextBox 4"/>
-          <p:cNvSpPr txBox="1"/>
-          <p:nvPr/>
-        </p:nvSpPr>
-        <p:spPr>
-          <a:xfrm>
-            <a:off x="10728655" y="6446520"/>
-            <a:ext cx="914400" cy="274320"/>
-          </a:xfrm>
-          <a:prstGeom prst="rect">
-            <a:avLst/>
-          </a:prstGeom>
-          <a:noFill/>
-        </p:spPr>
-        <p:txBody>
-          <a:bodyPr wrap="square" anchor="t" lIns="0" rIns="0" tIns="0" bIns="0"/>
-          <a:lstStyle/>
-          <a:p>
-            <a:pPr algn="r"/>
-            <a:r>
-              <a:rPr sz="1000" b="0" i="0">
-                <a:solidFill>
-                  <a:srgbClr val="54595D"/>
-                </a:solidFill>
-                <a:latin typeface="Calibri"/>
-              </a:rPr>
-              <a:t>8</a:t>
-            </a:r>
-          </a:p>
-        </p:txBody>
-      </p:sp>
-      <p:sp>
-        <p:nvSpPr>
-          <p:cNvPr id="6" name="Rounded Rectangle 5"/>
-          <p:cNvSpPr/>
-          <p:nvPr/>
-        </p:nvSpPr>
-        <p:spPr>
-          <a:xfrm>
-            <a:off x="548640" y="1508760"/>
-            <a:ext cx="2011680" cy="457200"/>
-          </a:xfrm>
-          <a:prstGeom prst="roundRect">
-            <a:avLst>
-              <a:gd name="adj" fmla="val 50000"/>
-            </a:avLst>
-          </a:prstGeom>
-          <a:solidFill>
-            <a:srgbClr val="E0463A"/>
-          </a:solidFill>
-          <a:ln>
-            <a:noFill/>
-          </a:ln>
-          <a:effectLst/>
-        </p:spPr>
-        <p:style>
-          <a:lnRef idx="1">
-            <a:schemeClr val="accent1"/>
-          </a:lnRef>
-          <a:fillRef idx="3">
-            <a:schemeClr val="accent1"/>
-          </a:fillRef>
-          <a:effectRef idx="2">
-            <a:schemeClr val="accent1"/>
-          </a:effectRef>
-          <a:fontRef idx="minor">
-            <a:schemeClr val="lt1"/>
-          </a:fontRef>
-        </p:style>
-        <p:txBody>
-          <a:bodyPr rtlCol="0" anchor="ctr"/>
-          <a:lstStyle/>
-          <a:p/>
-        </p:txBody>
-      </p:sp>
-      <p:sp>
-        <p:nvSpPr>
-          <p:cNvPr id="7" name="TextBox 6"/>
-          <p:cNvSpPr txBox="1"/>
-          <p:nvPr/>
-        </p:nvSpPr>
-        <p:spPr>
-          <a:xfrm>
-            <a:off x="548640" y="1508760"/>
-            <a:ext cx="2011680" cy="457200"/>
-          </a:xfrm>
-          <a:prstGeom prst="rect">
-            <a:avLst/>
-          </a:prstGeom>
-          <a:noFill/>
-        </p:spPr>
-        <p:txBody>
-          <a:bodyPr wrap="square" anchor="ctr" lIns="0" rIns="0" tIns="0" bIns="0"/>
-          <a:lstStyle/>
-          <a:p>
-            <a:pPr algn="ctr"/>
-            <a:r>
-              <a:rPr sz="1400" b="1" i="0">
-                <a:solidFill>
-                  <a:srgbClr val="FFFFFF"/>
-                </a:solidFill>
-                <a:latin typeface="Calibri"/>
-              </a:rPr>
-              <a:t>25 minutes</a:t>
-            </a:r>
-          </a:p>
-        </p:txBody>
-      </p:sp>
-      <p:sp>
-        <p:nvSpPr>
-          <p:cNvPr id="8" name="TextBox 7"/>
-          <p:cNvSpPr txBox="1"/>
-          <p:nvPr/>
-        </p:nvSpPr>
-        <p:spPr>
-          <a:xfrm>
-            <a:off x="2743200" y="1508760"/>
-            <a:ext cx="4754880" cy="457200"/>
-          </a:xfrm>
-          <a:prstGeom prst="rect">
-            <a:avLst/>
-          </a:prstGeom>
-          <a:noFill/>
-        </p:spPr>
-        <p:txBody>
-          <a:bodyPr wrap="square" anchor="ctr" lIns="0" rIns="0" tIns="0" bIns="0"/>
-          <a:lstStyle/>
-          <a:p>
-            <a:pPr algn="l"/>
-            <a:r>
-              <a:rPr sz="1400" b="0" i="1">
-                <a:solidFill>
-                  <a:srgbClr val="54595D"/>
-                </a:solidFill>
-                <a:latin typeface="Calibri"/>
-              </a:rPr>
-              <a:t>Pairs</a:t>
-            </a:r>
-          </a:p>
-        </p:txBody>
-      </p:sp>
-      <p:sp>
-        <p:nvSpPr>
-          <p:cNvPr id="9" name="Oval 8"/>
-          <p:cNvSpPr/>
-          <p:nvPr/>
-        </p:nvSpPr>
-        <p:spPr>
-          <a:xfrm>
-            <a:off x="548640" y="2482596"/>
-            <a:ext cx="384048" cy="384048"/>
-          </a:xfrm>
-          <a:prstGeom prst="ellipse">
-            <a:avLst/>
-          </a:prstGeom>
-          <a:solidFill>
-            <a:srgbClr val="0645AD"/>
-          </a:solidFill>
-          <a:ln>
-            <a:noFill/>
-          </a:ln>
-          <a:effectLst/>
-        </p:spPr>
-        <p:style>
-          <a:lnRef idx="1">
-            <a:schemeClr val="accent1"/>
-          </a:lnRef>
-          <a:fillRef idx="3">
-            <a:schemeClr val="accent1"/>
-          </a:fillRef>
-          <a:effectRef idx="2">
-            <a:schemeClr val="accent1"/>
-          </a:effectRef>
-          <a:fontRef idx="minor">
-            <a:schemeClr val="lt1"/>
-          </a:fontRef>
-        </p:style>
-        <p:txBody>
-          <a:bodyPr rtlCol="0" anchor="ctr" lIns="0" rIns="0" tIns="0" bIns="0"/>
-          <a:lstStyle/>
-          <a:p>
-            <a:pPr algn="ctr"/>
-            <a:r>
-              <a:rPr sz="1300" b="1">
-                <a:solidFill>
-                  <a:srgbClr val="FFFFFF"/>
-                </a:solidFill>
-                <a:latin typeface="Calibri"/>
-              </a:rPr>
-              <a:t>1</a:t>
-            </a:r>
-          </a:p>
-        </p:txBody>
-      </p:sp>
-      <p:sp>
-        <p:nvSpPr>
-          <p:cNvPr id="10" name="TextBox 9"/>
-          <p:cNvSpPr txBox="1"/>
-          <p:nvPr/>
-        </p:nvSpPr>
-        <p:spPr>
-          <a:xfrm>
-            <a:off x="1143000" y="2240280"/>
-            <a:ext cx="5943600" cy="868680"/>
-          </a:xfrm>
-          <a:prstGeom prst="rect">
-            <a:avLst/>
-          </a:prstGeom>
-          <a:noFill/>
-        </p:spPr>
-        <p:txBody>
-          <a:bodyPr wrap="square" anchor="ctr" lIns="0" rIns="0" tIns="0" bIns="0"/>
-          <a:lstStyle/>
-          <a:p>
-            <a:pPr algn="l"/>
-            <a:r>
-              <a:rPr sz="1700" b="0" i="0">
-                <a:solidFill>
-                  <a:srgbClr val="202122"/>
-                </a:solidFill>
-                <a:latin typeface="Calibri"/>
-              </a:rPr>
-              <a:t>Three parts: a one-off prototype bracket, 10,000 plastic clips, and a steel frame.</a:t>
-            </a:r>
-          </a:p>
-        </p:txBody>
-      </p:sp>
-      <p:sp>
-        <p:nvSpPr>
-          <p:cNvPr id="11" name="Oval 10"/>
-          <p:cNvSpPr/>
-          <p:nvPr/>
-        </p:nvSpPr>
-        <p:spPr>
-          <a:xfrm>
-            <a:off x="548640" y="3461004"/>
-            <a:ext cx="384048" cy="384048"/>
-          </a:xfrm>
-          <a:prstGeom prst="ellipse">
-            <a:avLst/>
-          </a:prstGeom>
-          <a:solidFill>
-            <a:srgbClr val="0645AD"/>
-          </a:solidFill>
-          <a:ln>
-            <a:noFill/>
-          </a:ln>
-          <a:effectLst/>
-        </p:spPr>
-        <p:style>
-          <a:lnRef idx="1">
-            <a:schemeClr val="accent1"/>
-          </a:lnRef>
-          <a:fillRef idx="3">
-            <a:schemeClr val="accent1"/>
-          </a:fillRef>
-          <a:effectRef idx="2">
-            <a:schemeClr val="accent1"/>
-          </a:effectRef>
-          <a:fontRef idx="minor">
-            <a:schemeClr val="lt1"/>
-          </a:fontRef>
-        </p:style>
-        <p:txBody>
-          <a:bodyPr rtlCol="0" anchor="ctr" lIns="0" rIns="0" tIns="0" bIns="0"/>
-          <a:lstStyle/>
-          <a:p>
-            <a:pPr algn="ctr"/>
-            <a:r>
-              <a:rPr sz="1300" b="1">
-                <a:solidFill>
-                  <a:srgbClr val="FFFFFF"/>
-                </a:solidFill>
-                <a:latin typeface="Calibri"/>
-              </a:rPr>
-              <a:t>2</a:t>
+              <a:t>What does forming need from the material?</a:t>
             </a:r>
           </a:p>
         </p:txBody>
@@ -8053,8 +10779,8 @@
         </p:nvSpPr>
         <p:spPr>
           <a:xfrm>
-            <a:off x="1143000" y="3218688"/>
-            <a:ext cx="5943600" cy="868680"/>
+            <a:off x="548640" y="5852160"/>
+            <a:ext cx="11094415" cy="365760"/>
           </a:xfrm>
           <a:prstGeom prst="rect">
             <a:avLst/>
@@ -8062,879 +10788,18 @@
           <a:noFill/>
         </p:spPr>
         <p:txBody>
-          <a:bodyPr wrap="square" anchor="ctr" lIns="0" rIns="0" tIns="0" bIns="0"/>
+          <a:bodyPr wrap="square" anchor="t" lIns="0" rIns="0" tIns="0" bIns="0"/>
           <a:lstStyle/>
           <a:p>
             <a:pPr algn="l"/>
             <a:r>
-              <a:rPr sz="1700" b="0" i="0">
-                <a:solidFill>
-                  <a:srgbClr val="202122"/>
-                </a:solidFill>
-                <a:latin typeface="Calibri"/>
-              </a:rPr>
-              <a:t>Choose a material and process for each.</a:t>
-            </a:r>
-          </a:p>
-        </p:txBody>
-      </p:sp>
-      <p:sp>
-        <p:nvSpPr>
-          <p:cNvPr id="13" name="Oval 12"/>
-          <p:cNvSpPr/>
-          <p:nvPr/>
-        </p:nvSpPr>
-        <p:spPr>
-          <a:xfrm>
-            <a:off x="548640" y="4439412"/>
-            <a:ext cx="384048" cy="384048"/>
-          </a:xfrm>
-          <a:prstGeom prst="ellipse">
-            <a:avLst/>
-          </a:prstGeom>
-          <a:solidFill>
-            <a:srgbClr val="0645AD"/>
-          </a:solidFill>
-          <a:ln>
-            <a:noFill/>
-          </a:ln>
-          <a:effectLst/>
-        </p:spPr>
-        <p:style>
-          <a:lnRef idx="1">
-            <a:schemeClr val="accent1"/>
-          </a:lnRef>
-          <a:fillRef idx="3">
-            <a:schemeClr val="accent1"/>
-          </a:fillRef>
-          <a:effectRef idx="2">
-            <a:schemeClr val="accent1"/>
-          </a:effectRef>
-          <a:fontRef idx="minor">
-            <a:schemeClr val="lt1"/>
-          </a:fontRef>
-        </p:style>
-        <p:txBody>
-          <a:bodyPr rtlCol="0" anchor="ctr" lIns="0" rIns="0" tIns="0" bIns="0"/>
-          <a:lstStyle/>
-          <a:p>
-            <a:pPr algn="ctr"/>
-            <a:r>
-              <a:rPr sz="1300" b="1">
-                <a:solidFill>
-                  <a:srgbClr val="FFFFFF"/>
-                </a:solidFill>
-                <a:latin typeface="Calibri"/>
-              </a:rPr>
-              <a:t>3</a:t>
-            </a:r>
-          </a:p>
-        </p:txBody>
-      </p:sp>
-      <p:sp>
-        <p:nvSpPr>
-          <p:cNvPr id="14" name="TextBox 13"/>
-          <p:cNvSpPr txBox="1"/>
-          <p:nvPr/>
-        </p:nvSpPr>
-        <p:spPr>
-          <a:xfrm>
-            <a:off x="1143000" y="4197096"/>
-            <a:ext cx="5943600" cy="868680"/>
-          </a:xfrm>
-          <a:prstGeom prst="rect">
-            <a:avLst/>
-          </a:prstGeom>
-          <a:noFill/>
-        </p:spPr>
-        <p:txBody>
-          <a:bodyPr wrap="square" anchor="ctr" lIns="0" rIns="0" tIns="0" bIns="0"/>
-          <a:lstStyle/>
-          <a:p>
-            <a:pPr algn="l"/>
-            <a:r>
-              <a:rPr sz="1700" b="0" i="0">
-                <a:solidFill>
-                  <a:srgbClr val="202122"/>
-                </a:solidFill>
-                <a:latin typeface="Calibri"/>
-              </a:rPr>
-              <a:t>Name any standard parts you would buy in.</a:t>
-            </a:r>
-          </a:p>
-        </p:txBody>
-      </p:sp>
-      <p:sp>
-        <p:nvSpPr>
-          <p:cNvPr id="15" name="Oval 14"/>
-          <p:cNvSpPr/>
-          <p:nvPr/>
-        </p:nvSpPr>
-        <p:spPr>
-          <a:xfrm>
-            <a:off x="548640" y="5417820"/>
-            <a:ext cx="384048" cy="384048"/>
-          </a:xfrm>
-          <a:prstGeom prst="ellipse">
-            <a:avLst/>
-          </a:prstGeom>
-          <a:solidFill>
-            <a:srgbClr val="0645AD"/>
-          </a:solidFill>
-          <a:ln>
-            <a:noFill/>
-          </a:ln>
-          <a:effectLst/>
-        </p:spPr>
-        <p:style>
-          <a:lnRef idx="1">
-            <a:schemeClr val="accent1"/>
-          </a:lnRef>
-          <a:fillRef idx="3">
-            <a:schemeClr val="accent1"/>
-          </a:fillRef>
-          <a:effectRef idx="2">
-            <a:schemeClr val="accent1"/>
-          </a:effectRef>
-          <a:fontRef idx="minor">
-            <a:schemeClr val="lt1"/>
-          </a:fontRef>
-        </p:style>
-        <p:txBody>
-          <a:bodyPr rtlCol="0" anchor="ctr" lIns="0" rIns="0" tIns="0" bIns="0"/>
-          <a:lstStyle/>
-          <a:p>
-            <a:pPr algn="ctr"/>
-            <a:r>
-              <a:rPr sz="1300" b="1">
-                <a:solidFill>
-                  <a:srgbClr val="FFFFFF"/>
-                </a:solidFill>
-                <a:latin typeface="Calibri"/>
-              </a:rPr>
-              <a:t>4</a:t>
-            </a:r>
-          </a:p>
-        </p:txBody>
-      </p:sp>
-      <p:sp>
-        <p:nvSpPr>
-          <p:cNvPr id="16" name="TextBox 15"/>
-          <p:cNvSpPr txBox="1"/>
-          <p:nvPr/>
-        </p:nvSpPr>
-        <p:spPr>
-          <a:xfrm>
-            <a:off x="1143000" y="5175504"/>
-            <a:ext cx="5943600" cy="868680"/>
-          </a:xfrm>
-          <a:prstGeom prst="rect">
-            <a:avLst/>
-          </a:prstGeom>
-          <a:noFill/>
-        </p:spPr>
-        <p:txBody>
-          <a:bodyPr wrap="square" anchor="ctr" lIns="0" rIns="0" tIns="0" bIns="0"/>
-          <a:lstStyle/>
-          <a:p>
-            <a:pPr algn="l"/>
-            <a:r>
-              <a:rPr sz="1700" b="0" i="0">
-                <a:solidFill>
-                  <a:srgbClr val="202122"/>
-                </a:solidFill>
-                <a:latin typeface="Calibri"/>
-              </a:rPr>
-              <a:t>Justify each choice.</a:t>
-            </a:r>
-          </a:p>
-        </p:txBody>
-      </p:sp>
-      <p:sp>
-        <p:nvSpPr>
-          <p:cNvPr id="17" name="Rounded Rectangle 16"/>
-          <p:cNvSpPr/>
-          <p:nvPr/>
-        </p:nvSpPr>
-        <p:spPr>
-          <a:xfrm>
-            <a:off x="7772400" y="1508760"/>
-            <a:ext cx="3867912" cy="4572000"/>
-          </a:xfrm>
-          <a:prstGeom prst="roundRect">
-            <a:avLst>
-              <a:gd name="adj" fmla="val 8000"/>
-            </a:avLst>
-          </a:prstGeom>
-          <a:solidFill>
-            <a:srgbClr val="EAF3FF"/>
-          </a:solidFill>
-          <a:ln>
-            <a:noFill/>
-          </a:ln>
-          <a:effectLst/>
-        </p:spPr>
-        <p:style>
-          <a:lnRef idx="1">
-            <a:schemeClr val="accent1"/>
-          </a:lnRef>
-          <a:fillRef idx="3">
-            <a:schemeClr val="accent1"/>
-          </a:fillRef>
-          <a:effectRef idx="2">
-            <a:schemeClr val="accent1"/>
-          </a:effectRef>
-          <a:fontRef idx="minor">
-            <a:schemeClr val="lt1"/>
-          </a:fontRef>
-        </p:style>
-        <p:txBody>
-          <a:bodyPr rtlCol="0" anchor="ctr"/>
-          <a:lstStyle/>
-          <a:p/>
-        </p:txBody>
-      </p:sp>
-      <p:sp>
-        <p:nvSpPr>
-          <p:cNvPr id="18" name="TextBox 17"/>
-          <p:cNvSpPr txBox="1"/>
-          <p:nvPr/>
-        </p:nvSpPr>
-        <p:spPr>
-          <a:xfrm>
-            <a:off x="8046720" y="1737360"/>
-            <a:ext cx="3291840" cy="365760"/>
-          </a:xfrm>
-          <a:prstGeom prst="rect">
-            <a:avLst/>
-          </a:prstGeom>
-          <a:noFill/>
-        </p:spPr>
-        <p:txBody>
-          <a:bodyPr wrap="square" anchor="t" lIns="0" rIns="0" tIns="0" bIns="0"/>
-          <a:lstStyle/>
-          <a:p>
-            <a:pPr algn="l"/>
-            <a:r>
-              <a:rPr sz="1300" b="1" i="0">
-                <a:solidFill>
-                  <a:srgbClr val="0645AD"/>
-                </a:solidFill>
-                <a:latin typeface="Calibri"/>
-              </a:rPr>
-              <a:t>SUCCESS CRITERIA</a:t>
-            </a:r>
-          </a:p>
-        </p:txBody>
-      </p:sp>
-      <p:sp>
-        <p:nvSpPr>
-          <p:cNvPr id="19" name="TextBox 18"/>
-          <p:cNvSpPr txBox="1"/>
-          <p:nvPr/>
-        </p:nvSpPr>
-        <p:spPr>
-          <a:xfrm>
-            <a:off x="8046720" y="2240280"/>
-            <a:ext cx="3337560" cy="3657600"/>
-          </a:xfrm>
-          <a:prstGeom prst="rect">
-            <a:avLst/>
-          </a:prstGeom>
-          <a:noFill/>
-        </p:spPr>
-        <p:txBody>
-          <a:bodyPr wrap="square" lIns="0" rIns="0" tIns="0" bIns="0">
-            <a:spAutoFit/>
-          </a:bodyPr>
-          <a:lstStyle/>
-          <a:p>
-            <a:pPr marL="274320" indent="-274320">
-              <a:spcAft>
-                <a:spcPts val="810"/>
-              </a:spcAft>
-              <a:buClr>
-                <a:srgbClr val="0645AD"/>
-              </a:buClr>
-              <a:buFont typeface="Arial"/>
-              <a:buChar char="•"/>
-            </a:pPr>
-            <a:r>
-              <a:rPr sz="1800" b="0">
-                <a:solidFill>
-                  <a:srgbClr val="202122"/>
-                </a:solidFill>
-                <a:latin typeface="Calibri"/>
-              </a:rPr>
-              <a:t>Process suits the quantity</a:t>
-            </a:r>
-          </a:p>
-          <a:p>
-            <a:pPr marL="274320" indent="-274320">
-              <a:spcAft>
-                <a:spcPts val="810"/>
-              </a:spcAft>
-              <a:buClr>
-                <a:srgbClr val="0645AD"/>
-              </a:buClr>
-              <a:buFont typeface="Arial"/>
-              <a:buChar char="•"/>
-            </a:pPr>
-            <a:r>
-              <a:rPr sz="1800" b="0">
-                <a:solidFill>
-                  <a:srgbClr val="202122"/>
-                </a:solidFill>
-                <a:latin typeface="Calibri"/>
-              </a:rPr>
-              <a:t>Material suits the function</a:t>
-            </a:r>
-          </a:p>
-          <a:p>
-            <a:pPr marL="274320" indent="-274320">
-              <a:spcAft>
-                <a:spcPts val="810"/>
-              </a:spcAft>
-              <a:buClr>
-                <a:srgbClr val="0645AD"/>
-              </a:buClr>
-              <a:buFont typeface="Arial"/>
-              <a:buChar char="•"/>
-            </a:pPr>
-            <a:r>
-              <a:rPr sz="1800" b="0">
-                <a:solidFill>
-                  <a:srgbClr val="202122"/>
-                </a:solidFill>
-                <a:latin typeface="Calibri"/>
-              </a:rPr>
-              <a:t>Standard parts sensibly used</a:t>
-            </a:r>
-          </a:p>
-        </p:txBody>
-      </p:sp>
-    </p:spTree>
-  </p:cSld>
-  <p:clrMapOvr>
-    <a:masterClrMapping/>
-  </p:clrMapOvr>
-</p:sld>
-</file>
-
-<file path=ppt/slides/slide9.xml><?xml version="1.0" encoding="utf-8"?>
-<p:sld xmlns:a="http://schemas.openxmlformats.org/drawingml/2006/main" xmlns:p="http://schemas.openxmlformats.org/presentationml/2006/main" xmlns:r="http://schemas.openxmlformats.org/officeDocument/2006/relationships">
-  <p:cSld>
-    <p:bg>
-      <p:bgPr>
-        <a:solidFill>
-          <a:srgbClr val="03306E"/>
-        </a:solidFill>
-        <a:effectLst/>
-      </p:bgPr>
-    </p:bg>
-    <p:spTree>
-      <p:nvGrpSpPr>
-        <p:cNvPr id="1" name=""/>
-        <p:cNvGrpSpPr/>
-        <p:nvPr/>
-      </p:nvGrpSpPr>
-      <p:grpSpPr/>
-      <p:sp>
-        <p:nvSpPr>
-          <p:cNvPr id="2" name="TextBox 1"/>
-          <p:cNvSpPr txBox="1"/>
-          <p:nvPr/>
-        </p:nvSpPr>
-        <p:spPr>
-          <a:xfrm>
-            <a:off x="548640" y="320040"/>
-            <a:ext cx="11094415" cy="274320"/>
-          </a:xfrm>
-          <a:prstGeom prst="rect">
-            <a:avLst/>
-          </a:prstGeom>
-          <a:noFill/>
-        </p:spPr>
-        <p:txBody>
-          <a:bodyPr wrap="square" anchor="t" lIns="0" rIns="0" tIns="0" bIns="0"/>
-          <a:lstStyle/>
-          <a:p>
-            <a:pPr algn="l"/>
-            <a:r>
-              <a:rPr sz="1100" b="1" i="0">
-                <a:solidFill>
-                  <a:srgbClr val="A9C8F0"/>
-                </a:solidFill>
-                <a:latin typeface="Calibri"/>
-              </a:rPr>
-              <a:t>MECHANICAL ENGINEERING  ·  Mechanical: Knowledge criteria</a:t>
-            </a:r>
-          </a:p>
-        </p:txBody>
-      </p:sp>
-      <p:sp>
-        <p:nvSpPr>
-          <p:cNvPr id="3" name="TextBox 2"/>
-          <p:cNvSpPr txBox="1"/>
-          <p:nvPr/>
-        </p:nvSpPr>
-        <p:spPr>
-          <a:xfrm>
-            <a:off x="548640" y="566928"/>
-            <a:ext cx="11094415" cy="822960"/>
-          </a:xfrm>
-          <a:prstGeom prst="rect">
-            <a:avLst/>
-          </a:prstGeom>
-          <a:noFill/>
-        </p:spPr>
-        <p:txBody>
-          <a:bodyPr wrap="square" anchor="ctr" lIns="0" rIns="0" tIns="0" bIns="0"/>
-          <a:lstStyle/>
-          <a:p>
-            <a:pPr algn="l"/>
-            <a:r>
-              <a:rPr sz="3200" b="1" i="0">
-                <a:solidFill>
-                  <a:srgbClr val="FFFFFF"/>
-                </a:solidFill>
-                <a:latin typeface="Cambria"/>
-              </a:rPr>
-              <a:t>Exit ticket</a:t>
-            </a:r>
-          </a:p>
-        </p:txBody>
-      </p:sp>
-      <p:sp>
-        <p:nvSpPr>
-          <p:cNvPr id="4" name="Oval 3"/>
-          <p:cNvSpPr/>
-          <p:nvPr/>
-        </p:nvSpPr>
-        <p:spPr>
-          <a:xfrm>
-            <a:off x="548640" y="1737360"/>
-            <a:ext cx="502920" cy="502920"/>
-          </a:xfrm>
-          <a:prstGeom prst="ellipse">
-            <a:avLst/>
-          </a:prstGeom>
-          <a:solidFill>
-            <a:srgbClr val="E0463A"/>
-          </a:solidFill>
-          <a:ln>
-            <a:noFill/>
-          </a:ln>
-          <a:effectLst/>
-        </p:spPr>
-        <p:style>
-          <a:lnRef idx="1">
-            <a:schemeClr val="accent1"/>
-          </a:lnRef>
-          <a:fillRef idx="3">
-            <a:schemeClr val="accent1"/>
-          </a:fillRef>
-          <a:effectRef idx="2">
-            <a:schemeClr val="accent1"/>
-          </a:effectRef>
-          <a:fontRef idx="minor">
-            <a:schemeClr val="lt1"/>
-          </a:fontRef>
-        </p:style>
-        <p:txBody>
-          <a:bodyPr rtlCol="0" anchor="ctr" lIns="0" rIns="0" tIns="0" bIns="0"/>
-          <a:lstStyle/>
-          <a:p>
-            <a:pPr algn="ctr"/>
-            <a:r>
-              <a:rPr sz="1700" b="1">
-                <a:solidFill>
-                  <a:srgbClr val="FFFFFF"/>
-                </a:solidFill>
-                <a:latin typeface="Calibri"/>
-              </a:rPr>
-              <a:t>1</a:t>
-            </a:r>
-          </a:p>
-        </p:txBody>
-      </p:sp>
-      <p:sp>
-        <p:nvSpPr>
-          <p:cNvPr id="5" name="TextBox 4"/>
-          <p:cNvSpPr txBox="1"/>
-          <p:nvPr/>
-        </p:nvSpPr>
-        <p:spPr>
-          <a:xfrm>
-            <a:off x="1325880" y="1645920"/>
-            <a:ext cx="6583680" cy="822960"/>
-          </a:xfrm>
-          <a:prstGeom prst="rect">
-            <a:avLst/>
-          </a:prstGeom>
-          <a:noFill/>
-        </p:spPr>
-        <p:txBody>
-          <a:bodyPr wrap="square" anchor="ctr" lIns="0" rIns="0" tIns="0" bIns="0"/>
-          <a:lstStyle/>
-          <a:p>
-            <a:pPr algn="l"/>
-            <a:r>
-              <a:rPr sz="2000" b="0" i="0">
-                <a:solidFill>
-                  <a:srgbClr val="FFFFFF"/>
-                </a:solidFill>
-                <a:latin typeface="Calibri"/>
-              </a:rPr>
-              <a:t>When is 3D printing the best process?</a:t>
-            </a:r>
-          </a:p>
-        </p:txBody>
-      </p:sp>
-      <p:sp>
-        <p:nvSpPr>
-          <p:cNvPr id="6" name="Oval 5"/>
-          <p:cNvSpPr/>
-          <p:nvPr/>
-        </p:nvSpPr>
-        <p:spPr>
-          <a:xfrm>
-            <a:off x="548640" y="2697480"/>
-            <a:ext cx="502920" cy="502920"/>
-          </a:xfrm>
-          <a:prstGeom prst="ellipse">
-            <a:avLst/>
-          </a:prstGeom>
-          <a:solidFill>
-            <a:srgbClr val="E0463A"/>
-          </a:solidFill>
-          <a:ln>
-            <a:noFill/>
-          </a:ln>
-          <a:effectLst/>
-        </p:spPr>
-        <p:style>
-          <a:lnRef idx="1">
-            <a:schemeClr val="accent1"/>
-          </a:lnRef>
-          <a:fillRef idx="3">
-            <a:schemeClr val="accent1"/>
-          </a:fillRef>
-          <a:effectRef idx="2">
-            <a:schemeClr val="accent1"/>
-          </a:effectRef>
-          <a:fontRef idx="minor">
-            <a:schemeClr val="lt1"/>
-          </a:fontRef>
-        </p:style>
-        <p:txBody>
-          <a:bodyPr rtlCol="0" anchor="ctr" lIns="0" rIns="0" tIns="0" bIns="0"/>
-          <a:lstStyle/>
-          <a:p>
-            <a:pPr algn="ctr"/>
-            <a:r>
-              <a:rPr sz="1700" b="1">
-                <a:solidFill>
-                  <a:srgbClr val="FFFFFF"/>
-                </a:solidFill>
-                <a:latin typeface="Calibri"/>
-              </a:rPr>
-              <a:t>2</a:t>
-            </a:r>
-          </a:p>
-        </p:txBody>
-      </p:sp>
-      <p:sp>
-        <p:nvSpPr>
-          <p:cNvPr id="7" name="TextBox 6"/>
-          <p:cNvSpPr txBox="1"/>
-          <p:nvPr/>
-        </p:nvSpPr>
-        <p:spPr>
-          <a:xfrm>
-            <a:off x="1325880" y="2606040"/>
-            <a:ext cx="6583680" cy="822960"/>
-          </a:xfrm>
-          <a:prstGeom prst="rect">
-            <a:avLst/>
-          </a:prstGeom>
-          <a:noFill/>
-        </p:spPr>
-        <p:txBody>
-          <a:bodyPr wrap="square" anchor="ctr" lIns="0" rIns="0" tIns="0" bIns="0"/>
-          <a:lstStyle/>
-          <a:p>
-            <a:pPr algn="l"/>
-            <a:r>
-              <a:rPr sz="2000" b="0" i="0">
-                <a:solidFill>
-                  <a:srgbClr val="FFFFFF"/>
-                </a:solidFill>
-                <a:latin typeface="Calibri"/>
-              </a:rPr>
-              <a:t>What is the difference between MIG and TIG?</a:t>
-            </a:r>
-          </a:p>
-        </p:txBody>
-      </p:sp>
-      <p:sp>
-        <p:nvSpPr>
-          <p:cNvPr id="8" name="Oval 7"/>
-          <p:cNvSpPr/>
-          <p:nvPr/>
-        </p:nvSpPr>
-        <p:spPr>
-          <a:xfrm>
-            <a:off x="548640" y="3657600"/>
-            <a:ext cx="502920" cy="502920"/>
-          </a:xfrm>
-          <a:prstGeom prst="ellipse">
-            <a:avLst/>
-          </a:prstGeom>
-          <a:solidFill>
-            <a:srgbClr val="E0463A"/>
-          </a:solidFill>
-          <a:ln>
-            <a:noFill/>
-          </a:ln>
-          <a:effectLst/>
-        </p:spPr>
-        <p:style>
-          <a:lnRef idx="1">
-            <a:schemeClr val="accent1"/>
-          </a:lnRef>
-          <a:fillRef idx="3">
-            <a:schemeClr val="accent1"/>
-          </a:fillRef>
-          <a:effectRef idx="2">
-            <a:schemeClr val="accent1"/>
-          </a:effectRef>
-          <a:fontRef idx="minor">
-            <a:schemeClr val="lt1"/>
-          </a:fontRef>
-        </p:style>
-        <p:txBody>
-          <a:bodyPr rtlCol="0" anchor="ctr" lIns="0" rIns="0" tIns="0" bIns="0"/>
-          <a:lstStyle/>
-          <a:p>
-            <a:pPr algn="ctr"/>
-            <a:r>
-              <a:rPr sz="1700" b="1">
-                <a:solidFill>
-                  <a:srgbClr val="FFFFFF"/>
-                </a:solidFill>
-                <a:latin typeface="Calibri"/>
-              </a:rPr>
-              <a:t>3</a:t>
-            </a:r>
-          </a:p>
-        </p:txBody>
-      </p:sp>
-      <p:sp>
-        <p:nvSpPr>
-          <p:cNvPr id="9" name="TextBox 8"/>
-          <p:cNvSpPr txBox="1"/>
-          <p:nvPr/>
-        </p:nvSpPr>
-        <p:spPr>
-          <a:xfrm>
-            <a:off x="1325880" y="3566160"/>
-            <a:ext cx="6583680" cy="822960"/>
-          </a:xfrm>
-          <a:prstGeom prst="rect">
-            <a:avLst/>
-          </a:prstGeom>
-          <a:noFill/>
-        </p:spPr>
-        <p:txBody>
-          <a:bodyPr wrap="square" anchor="ctr" lIns="0" rIns="0" tIns="0" bIns="0"/>
-          <a:lstStyle/>
-          <a:p>
-            <a:pPr algn="l"/>
-            <a:r>
-              <a:rPr sz="2000" b="0" i="0">
-                <a:solidFill>
-                  <a:srgbClr val="FFFFFF"/>
-                </a:solidFill>
-                <a:latin typeface="Calibri"/>
-              </a:rPr>
-              <a:t>Why choose a polymer over a metal?</a:t>
-            </a:r>
-          </a:p>
-        </p:txBody>
-      </p:sp>
-      <p:sp>
-        <p:nvSpPr>
-          <p:cNvPr id="10" name="Rounded Rectangle 9"/>
-          <p:cNvSpPr/>
-          <p:nvPr/>
-        </p:nvSpPr>
-        <p:spPr>
-          <a:xfrm>
-            <a:off x="8229600" y="1645920"/>
-            <a:ext cx="3410712" cy="2926080"/>
-          </a:xfrm>
-          <a:prstGeom prst="roundRect">
-            <a:avLst>
-              <a:gd name="adj" fmla="val 8000"/>
-            </a:avLst>
-          </a:prstGeom>
-          <a:solidFill>
-            <a:srgbClr val="0645AD"/>
-          </a:solidFill>
-          <a:ln>
-            <a:noFill/>
-          </a:ln>
-          <a:effectLst/>
-        </p:spPr>
-        <p:style>
-          <a:lnRef idx="1">
-            <a:schemeClr val="accent1"/>
-          </a:lnRef>
-          <a:fillRef idx="3">
-            <a:schemeClr val="accent1"/>
-          </a:fillRef>
-          <a:effectRef idx="2">
-            <a:schemeClr val="accent1"/>
-          </a:effectRef>
-          <a:fontRef idx="minor">
-            <a:schemeClr val="lt1"/>
-          </a:fontRef>
-        </p:style>
-        <p:txBody>
-          <a:bodyPr rtlCol="0" anchor="ctr"/>
-          <a:lstStyle/>
-          <a:p/>
-        </p:txBody>
-      </p:sp>
-      <p:sp>
-        <p:nvSpPr>
-          <p:cNvPr id="11" name="TextBox 10"/>
-          <p:cNvSpPr txBox="1"/>
-          <p:nvPr/>
-        </p:nvSpPr>
-        <p:spPr>
-          <a:xfrm>
-            <a:off x="8503920" y="1874519"/>
-            <a:ext cx="2926080" cy="365760"/>
-          </a:xfrm>
-          <a:prstGeom prst="rect">
-            <a:avLst/>
-          </a:prstGeom>
-          <a:noFill/>
-        </p:spPr>
-        <p:txBody>
-          <a:bodyPr wrap="square" anchor="t" lIns="0" rIns="0" tIns="0" bIns="0"/>
-          <a:lstStyle/>
-          <a:p>
-            <a:pPr algn="l"/>
-            <a:r>
-              <a:rPr sz="1300" b="1" i="0">
-                <a:solidFill>
-                  <a:srgbClr val="A9C8F0"/>
-                </a:solidFill>
-                <a:latin typeface="Calibri"/>
-              </a:rPr>
-              <a:t>REVISE THIS TOPIC</a:t>
-            </a:r>
-          </a:p>
-        </p:txBody>
-      </p:sp>
-      <p:sp>
-        <p:nvSpPr>
-          <p:cNvPr id="12" name="TextBox 11"/>
-          <p:cNvSpPr txBox="1"/>
-          <p:nvPr/>
-        </p:nvSpPr>
-        <p:spPr>
-          <a:xfrm>
-            <a:off x="8503920" y="2286000"/>
-            <a:ext cx="2926080" cy="548640"/>
-          </a:xfrm>
-          <a:prstGeom prst="rect">
-            <a:avLst/>
-          </a:prstGeom>
-          <a:noFill/>
-        </p:spPr>
-        <p:txBody>
-          <a:bodyPr wrap="square" anchor="t" lIns="0" rIns="0" tIns="0" bIns="0"/>
-          <a:lstStyle/>
-          <a:p>
-            <a:pPr algn="l"/>
-            <a:r>
-              <a:rPr sz="1400" b="0" i="0">
-                <a:solidFill>
-                  <a:srgbClr val="FFFFFF"/>
-                </a:solidFill>
-                <a:latin typeface="Calibri"/>
-              </a:rPr>
-              <a:t>Revision notes for this lesson are on the study wiki:</a:t>
-            </a:r>
-          </a:p>
-        </p:txBody>
-      </p:sp>
-      <p:sp>
-        <p:nvSpPr>
-          <p:cNvPr id="13" name="TextBox 12"/>
-          <p:cNvSpPr txBox="1"/>
-          <p:nvPr/>
-        </p:nvSpPr>
-        <p:spPr>
-          <a:xfrm>
-            <a:off x="8503920" y="2926080"/>
-            <a:ext cx="2926080" cy="1463040"/>
-          </a:xfrm>
-          <a:prstGeom prst="rect">
-            <a:avLst/>
-          </a:prstGeom>
-          <a:noFill/>
-        </p:spPr>
-        <p:txBody>
-          <a:bodyPr wrap="square" anchor="t" lIns="0" rIns="0" tIns="0" bIns="0"/>
-          <a:lstStyle/>
-          <a:p>
-            <a:pPr algn="l"/>
-            <a:r>
-              <a:rPr sz="2000" b="1" i="0">
-                <a:solidFill>
-                  <a:srgbClr val="FFFFFF"/>
-                </a:solidFill>
-                <a:latin typeface="Cambria"/>
-              </a:rPr>
-              <a:t>Knowledge Criteria</a:t>
-            </a:r>
-          </a:p>
-        </p:txBody>
-      </p:sp>
-      <p:sp>
-        <p:nvSpPr>
-          <p:cNvPr id="14" name="TextBox 13"/>
-          <p:cNvSpPr txBox="1"/>
-          <p:nvPr/>
-        </p:nvSpPr>
-        <p:spPr>
-          <a:xfrm>
-            <a:off x="548640" y="5669280"/>
-            <a:ext cx="11094415" cy="548640"/>
-          </a:xfrm>
-          <a:prstGeom prst="rect">
-            <a:avLst/>
-          </a:prstGeom>
-          <a:noFill/>
-        </p:spPr>
-        <p:txBody>
-          <a:bodyPr wrap="square" anchor="t" lIns="0" rIns="0" tIns="0" bIns="0"/>
-          <a:lstStyle/>
-          <a:p>
-            <a:pPr algn="l"/>
-            <a:r>
-              <a:rPr sz="1200" b="0" i="0">
-                <a:solidFill>
-                  <a:srgbClr val="A9C8F0"/>
-                </a:solidFill>
-                <a:latin typeface="Calibri"/>
-              </a:rPr>
-              <a:t>https://lana6478.github.io/T-level-Design-Development-Engineering-Manufacturing/#/02-occupational-specialism/01-knowledge-criteria.md</a:t>
+              <a:rPr sz="1300" b="0" i="1">
+                <a:solidFill>
+                  <a:srgbClr val="54595D"/>
+                </a:solidFill>
+                <a:latin typeface="Calibri"/>
+              </a:rPr>
+              <a:t>Answer on mini whiteboards or in your book. Answers are in the speaker notes.</a:t>
             </a:r>
           </a:p>
         </p:txBody>
